--- a/output/wordlabs-invest-3day.pptx
+++ b/output/wordlabs-invest-3day.pptx
@@ -5622,7 +5622,7 @@
                 <a:ea typeface="Trebuchet MS" pitchFamily="34" charset="-122"/>
                 <a:cs typeface="Trebuchet MS" pitchFamily="34" charset="-120"/>
               </a:rPr>
-              <a:t>1</a:t>
+              <a:t>0</a:t>
             </a:r>
             <a:pPr algn="ctr" indent="0" marL="0">
               <a:buNone/>
@@ -6040,7 +6040,7 @@
                 <a:ea typeface="Calibri" pitchFamily="34" charset="-122"/>
                 <a:cs typeface="Calibri" pitchFamily="34" charset="-120"/>
               </a:rPr>
-              <a:t>Our teacher said that making an </a:t>
+              <a:t>The careful </a:t>
             </a:r>
             <a:pPr algn="l" indent="0" marL="0">
               <a:buNone/>
@@ -6057,7 +6057,7 @@
                 <a:ea typeface="Calibri" pitchFamily="34" charset="-122"/>
                 <a:cs typeface="Calibri" pitchFamily="34" charset="-120"/>
               </a:rPr>
-              <a:t>investment</a:t>
+              <a:t>investor</a:t>
             </a:r>
             <a:pPr algn="l" indent="0" marL="0">
               <a:buNone/>
@@ -6071,7 +6071,7 @@
                 <a:ea typeface="Calibri" pitchFamily="34" charset="-122"/>
                 <a:cs typeface="Calibri" pitchFamily="34" charset="-120"/>
               </a:rPr>
-              <a:t> in your education is the wisest choice, so we should keep </a:t>
+              <a:t> made a wise </a:t>
             </a:r>
             <a:pPr algn="l" indent="0" marL="0">
               <a:buNone/>
@@ -6088,7 +6088,7 @@
                 <a:ea typeface="Calibri" pitchFamily="34" charset="-122"/>
                 <a:cs typeface="Calibri" pitchFamily="34" charset="-120"/>
               </a:rPr>
-              <a:t>investing</a:t>
+              <a:t>investment</a:t>
             </a:r>
             <a:pPr algn="l" indent="0" marL="0">
               <a:buNone/>
@@ -6102,7 +6102,7 @@
                 <a:ea typeface="Calibri" pitchFamily="34" charset="-122"/>
                 <a:cs typeface="Calibri" pitchFamily="34" charset="-120"/>
               </a:rPr>
-              <a:t> in our learning every day.</a:t>
+              <a:t> in the new school library.</a:t>
             </a:r>
             <a:endParaRPr lang="en-US" sz="1800" dirty="0"/>
           </a:p>
@@ -6257,7 +6257,7 @@
                 <a:ea typeface="Trebuchet MS" pitchFamily="34" charset="-122"/>
                 <a:cs typeface="Trebuchet MS" pitchFamily="34" charset="-120"/>
               </a:rPr>
-              <a:t>investment</a:t>
+              <a:t>investor</a:t>
             </a:r>
             <a:endParaRPr lang="en-US" sz="1400" dirty="0"/>
           </a:p>
@@ -6385,7 +6385,7 @@
                 <a:ea typeface="Trebuchet MS" pitchFamily="34" charset="-122"/>
                 <a:cs typeface="Trebuchet MS" pitchFamily="34" charset="-120"/>
               </a:rPr>
-              <a:t>investing</a:t>
+              <a:t>investment</a:t>
             </a:r>
             <a:endParaRPr lang="en-US" sz="1400" dirty="0"/>
           </a:p>
@@ -6855,7 +6855,7 @@
                 <a:ea typeface="Trebuchet MS" pitchFamily="34" charset="-122"/>
                 <a:cs typeface="Trebuchet MS" pitchFamily="34" charset="-120"/>
               </a:rPr>
-              <a:t>investment</a:t>
+              <a:t>investor</a:t>
             </a:r>
             <a:endParaRPr lang="en-US" sz="2800" dirty="0"/>
           </a:p>
@@ -7682,7 +7682,7 @@
                 <a:ea typeface="Trebuchet MS" pitchFamily="34" charset="-122"/>
                 <a:cs typeface="Trebuchet MS" pitchFamily="34" charset="-120"/>
               </a:rPr>
-              <a:t>investment</a:t>
+              <a:t>investor</a:t>
             </a:r>
             <a:endParaRPr lang="en-US" sz="2800" dirty="0"/>
           </a:p>
@@ -7860,7 +7860,7 @@
                 <a:ea typeface="Calibri" pitchFamily="34" charset="-122"/>
                 <a:cs typeface="Calibri" pitchFamily="34" charset="-120"/>
               </a:rPr>
-              <a:t>to put in / to clothe</a:t>
+              <a:t>to put money or effort in</a:t>
             </a:r>
             <a:endParaRPr lang="en-US" sz="850" dirty="0"/>
           </a:p>
@@ -7933,7 +7933,7 @@
                 <a:ea typeface="Trebuchet MS" pitchFamily="34" charset="-122"/>
                 <a:cs typeface="Trebuchet MS" pitchFamily="34" charset="-120"/>
               </a:rPr>
-              <a:t>ment</a:t>
+              <a:t>or</a:t>
             </a:r>
             <a:endParaRPr lang="en-US" sz="1300" dirty="0"/>
           </a:p>
@@ -7972,7 +7972,7 @@
                 <a:ea typeface="Calibri" pitchFamily="34" charset="-122"/>
                 <a:cs typeface="Calibri" pitchFamily="34" charset="-120"/>
               </a:rPr>
-              <a:t>result or action of</a:t>
+              <a:t>person who does something</a:t>
             </a:r>
             <a:endParaRPr lang="en-US" sz="850" dirty="0"/>
           </a:p>
@@ -8667,7 +8667,7 @@
                 <a:ea typeface="Trebuchet MS" pitchFamily="34" charset="-122"/>
                 <a:cs typeface="Trebuchet MS" pitchFamily="34" charset="-120"/>
               </a:rPr>
-              <a:t>investment</a:t>
+              <a:t>investor</a:t>
             </a:r>
             <a:endParaRPr lang="en-US" sz="2800" dirty="0"/>
           </a:p>
@@ -8845,7 +8845,7 @@
                 <a:ea typeface="Calibri" pitchFamily="34" charset="-122"/>
                 <a:cs typeface="Calibri" pitchFamily="34" charset="-120"/>
               </a:rPr>
-              <a:t>to put in / to clothe</a:t>
+              <a:t>to put money or effort in</a:t>
             </a:r>
             <a:endParaRPr lang="en-US" sz="850" dirty="0"/>
           </a:p>
@@ -8918,7 +8918,7 @@
                 <a:ea typeface="Trebuchet MS" pitchFamily="34" charset="-122"/>
                 <a:cs typeface="Trebuchet MS" pitchFamily="34" charset="-120"/>
               </a:rPr>
-              <a:t>ment</a:t>
+              <a:t>or</a:t>
             </a:r>
             <a:endParaRPr lang="en-US" sz="1300" dirty="0"/>
           </a:p>
@@ -8957,7 +8957,7 @@
                 <a:ea typeface="Calibri" pitchFamily="34" charset="-122"/>
                 <a:cs typeface="Calibri" pitchFamily="34" charset="-120"/>
               </a:rPr>
-              <a:t>result or action of</a:t>
+              <a:t>person who does something</a:t>
             </a:r>
             <a:endParaRPr lang="en-US" sz="850" dirty="0"/>
           </a:p>
@@ -9326,7 +9326,7 @@
                 <a:ea typeface="Trebuchet MS" pitchFamily="34" charset="-122"/>
                 <a:cs typeface="Trebuchet MS" pitchFamily="34" charset="-120"/>
               </a:rPr>
-              <a:t>ment</a:t>
+              <a:t>or</a:t>
             </a:r>
             <a:endParaRPr lang="en-US" sz="1400" dirty="0"/>
           </a:p>
@@ -9889,7 +9889,7 @@
                 <a:ea typeface="Trebuchet MS" pitchFamily="34" charset="-122"/>
                 <a:cs typeface="Trebuchet MS" pitchFamily="34" charset="-120"/>
               </a:rPr>
-              <a:t>investment</a:t>
+              <a:t>investor</a:t>
             </a:r>
             <a:endParaRPr lang="en-US" sz="2800" dirty="0"/>
           </a:p>
@@ -10067,7 +10067,7 @@
                 <a:ea typeface="Calibri" pitchFamily="34" charset="-122"/>
                 <a:cs typeface="Calibri" pitchFamily="34" charset="-120"/>
               </a:rPr>
-              <a:t>to put in / to clothe</a:t>
+              <a:t>to put money or effort in</a:t>
             </a:r>
             <a:endParaRPr lang="en-US" sz="850" dirty="0"/>
           </a:p>
@@ -10140,7 +10140,7 @@
                 <a:ea typeface="Trebuchet MS" pitchFamily="34" charset="-122"/>
                 <a:cs typeface="Trebuchet MS" pitchFamily="34" charset="-120"/>
               </a:rPr>
-              <a:t>ment</a:t>
+              <a:t>or</a:t>
             </a:r>
             <a:endParaRPr lang="en-US" sz="1300" dirty="0"/>
           </a:p>
@@ -10179,7 +10179,7 @@
                 <a:ea typeface="Calibri" pitchFamily="34" charset="-122"/>
                 <a:cs typeface="Calibri" pitchFamily="34" charset="-120"/>
               </a:rPr>
-              <a:t>result or action of</a:t>
+              <a:t>person who does something</a:t>
             </a:r>
             <a:endParaRPr lang="en-US" sz="850" dirty="0"/>
           </a:p>
@@ -10548,7 +10548,7 @@
                 <a:ea typeface="Trebuchet MS" pitchFamily="34" charset="-122"/>
                 <a:cs typeface="Trebuchet MS" pitchFamily="34" charset="-120"/>
               </a:rPr>
-              <a:t>ment</a:t>
+              <a:t>or</a:t>
             </a:r>
             <a:endParaRPr lang="en-US" sz="1400" dirty="0"/>
           </a:p>
@@ -10655,8 +10655,8 @@
         </p:nvSpPr>
         <p:spPr>
           <a:xfrm>
-            <a:off x="1951828" y="4169664"/>
-            <a:ext cx="603504" cy="475488"/>
+            <a:off x="2124837" y="4169664"/>
+            <a:ext cx="685800" cy="475488"/>
           </a:xfrm>
           <a:prstGeom prst="rect">
             <a:avLst>
@@ -10682,8 +10682,8 @@
         </p:nvSpPr>
         <p:spPr>
           <a:xfrm>
-            <a:off x="1951828" y="4169664"/>
-            <a:ext cx="603504" cy="475488"/>
+            <a:off x="2124837" y="4169664"/>
+            <a:ext cx="685800" cy="475488"/>
           </a:xfrm>
           <a:prstGeom prst="rect">
             <a:avLst/>
@@ -10721,8 +10721,8 @@
         </p:nvSpPr>
         <p:spPr>
           <a:xfrm>
-            <a:off x="2605209" y="4169664"/>
-            <a:ext cx="603504" cy="475488"/>
+            <a:off x="3033522" y="4169664"/>
+            <a:ext cx="685800" cy="475488"/>
           </a:xfrm>
           <a:prstGeom prst="rect">
             <a:avLst>
@@ -10748,8 +10748,8 @@
         </p:nvSpPr>
         <p:spPr>
           <a:xfrm>
-            <a:off x="2605209" y="4169664"/>
-            <a:ext cx="603504" cy="475488"/>
+            <a:off x="3033522" y="4169664"/>
+            <a:ext cx="685800" cy="475488"/>
           </a:xfrm>
           <a:prstGeom prst="rect">
             <a:avLst/>
@@ -10787,8 +10787,8 @@
         </p:nvSpPr>
         <p:spPr>
           <a:xfrm>
-            <a:off x="3258589" y="4169664"/>
-            <a:ext cx="603504" cy="475488"/>
+            <a:off x="3942207" y="4169664"/>
+            <a:ext cx="685800" cy="475488"/>
           </a:xfrm>
           <a:prstGeom prst="rect">
             <a:avLst>
@@ -10814,8 +10814,8 @@
         </p:nvSpPr>
         <p:spPr>
           <a:xfrm>
-            <a:off x="3258589" y="4169664"/>
-            <a:ext cx="603504" cy="475488"/>
+            <a:off x="3942207" y="4169664"/>
+            <a:ext cx="685800" cy="475488"/>
           </a:xfrm>
           <a:prstGeom prst="rect">
             <a:avLst/>
@@ -10853,8 +10853,8 @@
         </p:nvSpPr>
         <p:spPr>
           <a:xfrm>
-            <a:off x="3911969" y="4169664"/>
-            <a:ext cx="603504" cy="475488"/>
+            <a:off x="4850892" y="4169664"/>
+            <a:ext cx="685800" cy="475488"/>
           </a:xfrm>
           <a:prstGeom prst="rect">
             <a:avLst>
@@ -10880,8 +10880,8 @@
         </p:nvSpPr>
         <p:spPr>
           <a:xfrm>
-            <a:off x="3911969" y="4169664"/>
-            <a:ext cx="603504" cy="475488"/>
+            <a:off x="4850892" y="4169664"/>
+            <a:ext cx="685800" cy="475488"/>
           </a:xfrm>
           <a:prstGeom prst="rect">
             <a:avLst/>
@@ -10919,8 +10919,8 @@
         </p:nvSpPr>
         <p:spPr>
           <a:xfrm>
-            <a:off x="4565350" y="4169664"/>
-            <a:ext cx="603504" cy="475488"/>
+            <a:off x="5759577" y="4169664"/>
+            <a:ext cx="685800" cy="475488"/>
           </a:xfrm>
           <a:prstGeom prst="rect">
             <a:avLst>
@@ -10946,8 +10946,8 @@
         </p:nvSpPr>
         <p:spPr>
           <a:xfrm>
-            <a:off x="4565350" y="4169664"/>
-            <a:ext cx="603504" cy="475488"/>
+            <a:off x="5759577" y="4169664"/>
+            <a:ext cx="685800" cy="475488"/>
           </a:xfrm>
           <a:prstGeom prst="rect">
             <a:avLst/>
@@ -10985,8 +10985,8 @@
         </p:nvSpPr>
         <p:spPr>
           <a:xfrm>
-            <a:off x="5218730" y="4169664"/>
-            <a:ext cx="603504" cy="475488"/>
+            <a:off x="6668262" y="4169664"/>
+            <a:ext cx="685800" cy="475488"/>
           </a:xfrm>
           <a:prstGeom prst="rect">
             <a:avLst>
@@ -11012,8 +11012,8 @@
         </p:nvSpPr>
         <p:spPr>
           <a:xfrm>
-            <a:off x="5218730" y="4169664"/>
-            <a:ext cx="603504" cy="475488"/>
+            <a:off x="6668262" y="4169664"/>
+            <a:ext cx="685800" cy="475488"/>
           </a:xfrm>
           <a:prstGeom prst="rect">
             <a:avLst/>
@@ -11051,8 +11051,8 @@
         </p:nvSpPr>
         <p:spPr>
           <a:xfrm>
-            <a:off x="5872111" y="4169664"/>
-            <a:ext cx="603504" cy="475488"/>
+            <a:off x="7576947" y="4169664"/>
+            <a:ext cx="685800" cy="475488"/>
           </a:xfrm>
           <a:prstGeom prst="rect">
             <a:avLst>
@@ -11078,8 +11078,8 @@
         </p:nvSpPr>
         <p:spPr>
           <a:xfrm>
-            <a:off x="5872111" y="4169664"/>
-            <a:ext cx="603504" cy="475488"/>
+            <a:off x="7576947" y="4169664"/>
+            <a:ext cx="685800" cy="475488"/>
           </a:xfrm>
           <a:prstGeom prst="rect">
             <a:avLst/>
@@ -11103,205 +11103,7 @@
                 <a:ea typeface="Trebuchet MS" pitchFamily="34" charset="-122"/>
                 <a:cs typeface="Trebuchet MS" pitchFamily="34" charset="-120"/>
               </a:rPr>
-              <a:t>m</a:t>
-            </a:r>
-            <a:endParaRPr lang="en-US" sz="900" dirty="0"/>
-          </a:p>
-        </p:txBody>
-      </p:sp>
-      <p:sp>
-        <p:nvSpPr>
-          <p:cNvPr id="50" name="Shape 48"/>
-          <p:cNvSpPr/>
-          <p:nvPr/>
-        </p:nvSpPr>
-        <p:spPr>
-          <a:xfrm>
-            <a:off x="6525491" y="4169664"/>
-            <a:ext cx="603504" cy="475488"/>
-          </a:xfrm>
-          <a:prstGeom prst="rect">
-            <a:avLst>
-              <a:gd name="adj" fmla="val 7692"/>
-            </a:avLst>
-          </a:prstGeom>
-          <a:solidFill>
-            <a:srgbClr val="FFFFFF"/>
-          </a:solidFill>
-          <a:ln w="12700">
-            <a:solidFill>
-              <a:srgbClr val="DB2777"/>
-            </a:solidFill>
-            <a:prstDash val="solid"/>
-          </a:ln>
-        </p:spPr>
-      </p:sp>
-      <p:sp>
-        <p:nvSpPr>
-          <p:cNvPr id="51" name="Text 49"/>
-          <p:cNvSpPr/>
-          <p:nvPr/>
-        </p:nvSpPr>
-        <p:spPr>
-          <a:xfrm>
-            <a:off x="6525491" y="4169664"/>
-            <a:ext cx="603504" cy="475488"/>
-          </a:xfrm>
-          <a:prstGeom prst="rect">
-            <a:avLst/>
-          </a:prstGeom>
-          <a:noFill/>
-          <a:ln/>
-        </p:spPr>
-        <p:txBody>
-          <a:bodyPr wrap="square" lIns="0" tIns="0" rIns="0" bIns="0" rtlCol="0" anchor="ctr"/>
-          <a:lstStyle/>
-          <a:p>
-            <a:pPr algn="ctr" indent="0" marL="0">
-              <a:buNone/>
-            </a:pPr>
-            <a:r>
-              <a:rPr lang="en-US" sz="900" b="1" dirty="0">
-                <a:solidFill>
-                  <a:srgbClr val="9D174D"/>
-                </a:solidFill>
-                <a:latin typeface="Trebuchet MS" pitchFamily="34" charset="0"/>
-                <a:ea typeface="Trebuchet MS" pitchFamily="34" charset="-122"/>
-                <a:cs typeface="Trebuchet MS" pitchFamily="34" charset="-120"/>
-              </a:rPr>
-              <a:t>e</a:t>
-            </a:r>
-            <a:endParaRPr lang="en-US" sz="900" dirty="0"/>
-          </a:p>
-        </p:txBody>
-      </p:sp>
-      <p:sp>
-        <p:nvSpPr>
-          <p:cNvPr id="52" name="Shape 50"/>
-          <p:cNvSpPr/>
-          <p:nvPr/>
-        </p:nvSpPr>
-        <p:spPr>
-          <a:xfrm>
-            <a:off x="7178871" y="4169664"/>
-            <a:ext cx="603504" cy="475488"/>
-          </a:xfrm>
-          <a:prstGeom prst="rect">
-            <a:avLst>
-              <a:gd name="adj" fmla="val 7692"/>
-            </a:avLst>
-          </a:prstGeom>
-          <a:solidFill>
-            <a:srgbClr val="FFFFFF"/>
-          </a:solidFill>
-          <a:ln w="12700">
-            <a:solidFill>
-              <a:srgbClr val="DB2777"/>
-            </a:solidFill>
-            <a:prstDash val="solid"/>
-          </a:ln>
-        </p:spPr>
-      </p:sp>
-      <p:sp>
-        <p:nvSpPr>
-          <p:cNvPr id="53" name="Text 51"/>
-          <p:cNvSpPr/>
-          <p:nvPr/>
-        </p:nvSpPr>
-        <p:spPr>
-          <a:xfrm>
-            <a:off x="7178871" y="4169664"/>
-            <a:ext cx="603504" cy="475488"/>
-          </a:xfrm>
-          <a:prstGeom prst="rect">
-            <a:avLst/>
-          </a:prstGeom>
-          <a:noFill/>
-          <a:ln/>
-        </p:spPr>
-        <p:txBody>
-          <a:bodyPr wrap="square" lIns="0" tIns="0" rIns="0" bIns="0" rtlCol="0" anchor="ctr"/>
-          <a:lstStyle/>
-          <a:p>
-            <a:pPr algn="ctr" indent="0" marL="0">
-              <a:buNone/>
-            </a:pPr>
-            <a:r>
-              <a:rPr lang="en-US" sz="900" b="1" dirty="0">
-                <a:solidFill>
-                  <a:srgbClr val="9D174D"/>
-                </a:solidFill>
-                <a:latin typeface="Trebuchet MS" pitchFamily="34" charset="0"/>
-                <a:ea typeface="Trebuchet MS" pitchFamily="34" charset="-122"/>
-                <a:cs typeface="Trebuchet MS" pitchFamily="34" charset="-120"/>
-              </a:rPr>
-              <a:t>n</a:t>
-            </a:r>
-            <a:endParaRPr lang="en-US" sz="900" dirty="0"/>
-          </a:p>
-        </p:txBody>
-      </p:sp>
-      <p:sp>
-        <p:nvSpPr>
-          <p:cNvPr id="54" name="Shape 52"/>
-          <p:cNvSpPr/>
-          <p:nvPr/>
-        </p:nvSpPr>
-        <p:spPr>
-          <a:xfrm>
-            <a:off x="7832252" y="4169664"/>
-            <a:ext cx="603504" cy="475488"/>
-          </a:xfrm>
-          <a:prstGeom prst="rect">
-            <a:avLst>
-              <a:gd name="adj" fmla="val 7692"/>
-            </a:avLst>
-          </a:prstGeom>
-          <a:solidFill>
-            <a:srgbClr val="FFFFFF"/>
-          </a:solidFill>
-          <a:ln w="12700">
-            <a:solidFill>
-              <a:srgbClr val="DB2777"/>
-            </a:solidFill>
-            <a:prstDash val="solid"/>
-          </a:ln>
-        </p:spPr>
-      </p:sp>
-      <p:sp>
-        <p:nvSpPr>
-          <p:cNvPr id="55" name="Text 53"/>
-          <p:cNvSpPr/>
-          <p:nvPr/>
-        </p:nvSpPr>
-        <p:spPr>
-          <a:xfrm>
-            <a:off x="7832252" y="4169664"/>
-            <a:ext cx="603504" cy="475488"/>
-          </a:xfrm>
-          <a:prstGeom prst="rect">
-            <a:avLst/>
-          </a:prstGeom>
-          <a:noFill/>
-          <a:ln/>
-        </p:spPr>
-        <p:txBody>
-          <a:bodyPr wrap="square" lIns="0" tIns="0" rIns="0" bIns="0" rtlCol="0" anchor="ctr"/>
-          <a:lstStyle/>
-          <a:p>
-            <a:pPr algn="ctr" indent="0" marL="0">
-              <a:buNone/>
-            </a:pPr>
-            <a:r>
-              <a:rPr lang="en-US" sz="900" b="1" dirty="0">
-                <a:solidFill>
-                  <a:srgbClr val="9D174D"/>
-                </a:solidFill>
-                <a:latin typeface="Trebuchet MS" pitchFamily="34" charset="0"/>
-                <a:ea typeface="Trebuchet MS" pitchFamily="34" charset="-122"/>
-                <a:cs typeface="Trebuchet MS" pitchFamily="34" charset="-120"/>
-              </a:rPr>
-              <a:t>t</a:t>
+              <a:t>or</a:t>
             </a:r>
             <a:endParaRPr lang="en-US" sz="900" dirty="0"/>
           </a:p>
@@ -11732,7 +11534,7 @@
                 <a:ea typeface="Trebuchet MS" pitchFamily="34" charset="-122"/>
                 <a:cs typeface="Trebuchet MS" pitchFamily="34" charset="-120"/>
               </a:rPr>
-              <a:t>investing</a:t>
+              <a:t>investment</a:t>
             </a:r>
             <a:endParaRPr lang="en-US" sz="2800" dirty="0"/>
           </a:p>
@@ -12559,7 +12361,7 @@
                 <a:ea typeface="Trebuchet MS" pitchFamily="34" charset="-122"/>
                 <a:cs typeface="Trebuchet MS" pitchFamily="34" charset="-120"/>
               </a:rPr>
-              <a:t>investing</a:t>
+              <a:t>investment</a:t>
             </a:r>
             <a:endParaRPr lang="en-US" sz="2800" dirty="0"/>
           </a:p>
@@ -12737,7 +12539,7 @@
                 <a:ea typeface="Calibri" pitchFamily="34" charset="-122"/>
                 <a:cs typeface="Calibri" pitchFamily="34" charset="-120"/>
               </a:rPr>
-              <a:t>to put in / to clothe</a:t>
+              <a:t>to put money or effort in</a:t>
             </a:r>
             <a:endParaRPr lang="en-US" sz="850" dirty="0"/>
           </a:p>
@@ -12810,7 +12612,7 @@
                 <a:ea typeface="Trebuchet MS" pitchFamily="34" charset="-122"/>
                 <a:cs typeface="Trebuchet MS" pitchFamily="34" charset="-120"/>
               </a:rPr>
-              <a:t>ing</a:t>
+              <a:t>ment</a:t>
             </a:r>
             <a:endParaRPr lang="en-US" sz="1300" dirty="0"/>
           </a:p>
@@ -12849,7 +12651,7 @@
                 <a:ea typeface="Calibri" pitchFamily="34" charset="-122"/>
                 <a:cs typeface="Calibri" pitchFamily="34" charset="-120"/>
               </a:rPr>
-              <a:t>ongoing action</a:t>
+              <a:t>result or action of</a:t>
             </a:r>
             <a:endParaRPr lang="en-US" sz="850" dirty="0"/>
           </a:p>
@@ -13544,7 +13346,7 @@
                 <a:ea typeface="Trebuchet MS" pitchFamily="34" charset="-122"/>
                 <a:cs typeface="Trebuchet MS" pitchFamily="34" charset="-120"/>
               </a:rPr>
-              <a:t>investing</a:t>
+              <a:t>investment</a:t>
             </a:r>
             <a:endParaRPr lang="en-US" sz="2800" dirty="0"/>
           </a:p>
@@ -13722,7 +13524,7 @@
                 <a:ea typeface="Calibri" pitchFamily="34" charset="-122"/>
                 <a:cs typeface="Calibri" pitchFamily="34" charset="-120"/>
               </a:rPr>
-              <a:t>to put in / to clothe</a:t>
+              <a:t>to put money or effort in</a:t>
             </a:r>
             <a:endParaRPr lang="en-US" sz="850" dirty="0"/>
           </a:p>
@@ -13795,7 +13597,7 @@
                 <a:ea typeface="Trebuchet MS" pitchFamily="34" charset="-122"/>
                 <a:cs typeface="Trebuchet MS" pitchFamily="34" charset="-120"/>
               </a:rPr>
-              <a:t>ing</a:t>
+              <a:t>ment</a:t>
             </a:r>
             <a:endParaRPr lang="en-US" sz="1300" dirty="0"/>
           </a:p>
@@ -13834,7 +13636,7 @@
                 <a:ea typeface="Calibri" pitchFamily="34" charset="-122"/>
                 <a:cs typeface="Calibri" pitchFamily="34" charset="-120"/>
               </a:rPr>
-              <a:t>ongoing action</a:t>
+              <a:t>result or action of</a:t>
             </a:r>
             <a:endParaRPr lang="en-US" sz="850" dirty="0"/>
           </a:p>
@@ -14203,7 +14005,7 @@
                 <a:ea typeface="Trebuchet MS" pitchFamily="34" charset="-122"/>
                 <a:cs typeface="Trebuchet MS" pitchFamily="34" charset="-120"/>
               </a:rPr>
-              <a:t>ing</a:t>
+              <a:t>ment</a:t>
             </a:r>
             <a:endParaRPr lang="en-US" sz="1400" dirty="0"/>
           </a:p>
@@ -15031,7 +14833,7 @@
                 <a:ea typeface="Trebuchet MS" pitchFamily="34" charset="-122"/>
                 <a:cs typeface="Trebuchet MS" pitchFamily="34" charset="-120"/>
               </a:rPr>
-              <a:t>investing</a:t>
+              <a:t>investment</a:t>
             </a:r>
             <a:endParaRPr lang="en-US" sz="2800" dirty="0"/>
           </a:p>
@@ -15209,7 +15011,7 @@
                 <a:ea typeface="Calibri" pitchFamily="34" charset="-122"/>
                 <a:cs typeface="Calibri" pitchFamily="34" charset="-120"/>
               </a:rPr>
-              <a:t>to put in / to clothe</a:t>
+              <a:t>to put money or effort in</a:t>
             </a:r>
             <a:endParaRPr lang="en-US" sz="850" dirty="0"/>
           </a:p>
@@ -15282,7 +15084,7 @@
                 <a:ea typeface="Trebuchet MS" pitchFamily="34" charset="-122"/>
                 <a:cs typeface="Trebuchet MS" pitchFamily="34" charset="-120"/>
               </a:rPr>
-              <a:t>ing</a:t>
+              <a:t>ment</a:t>
             </a:r>
             <a:endParaRPr lang="en-US" sz="1300" dirty="0"/>
           </a:p>
@@ -15321,7 +15123,7 @@
                 <a:ea typeface="Calibri" pitchFamily="34" charset="-122"/>
                 <a:cs typeface="Calibri" pitchFamily="34" charset="-120"/>
               </a:rPr>
-              <a:t>ongoing action</a:t>
+              <a:t>result or action of</a:t>
             </a:r>
             <a:endParaRPr lang="en-US" sz="850" dirty="0"/>
           </a:p>
@@ -15690,7 +15492,7 @@
                 <a:ea typeface="Trebuchet MS" pitchFamily="34" charset="-122"/>
                 <a:cs typeface="Trebuchet MS" pitchFamily="34" charset="-120"/>
               </a:rPr>
-              <a:t>ing</a:t>
+              <a:t>ment</a:t>
             </a:r>
             <a:endParaRPr lang="en-US" sz="1400" dirty="0"/>
           </a:p>
@@ -15797,8 +15599,8 @@
         </p:nvSpPr>
         <p:spPr>
           <a:xfrm>
-            <a:off x="2023872" y="4169664"/>
-            <a:ext cx="685800" cy="475488"/>
+            <a:off x="1951828" y="4169664"/>
+            <a:ext cx="603504" cy="475488"/>
           </a:xfrm>
           <a:prstGeom prst="rect">
             <a:avLst>
@@ -15824,8 +15626,8 @@
         </p:nvSpPr>
         <p:spPr>
           <a:xfrm>
-            <a:off x="2023872" y="4169664"/>
-            <a:ext cx="685800" cy="475488"/>
+            <a:off x="1951828" y="4169664"/>
+            <a:ext cx="603504" cy="475488"/>
           </a:xfrm>
           <a:prstGeom prst="rect">
             <a:avLst/>
@@ -15863,8 +15665,8 @@
         </p:nvSpPr>
         <p:spPr>
           <a:xfrm>
-            <a:off x="2831592" y="4169664"/>
-            <a:ext cx="685800" cy="475488"/>
+            <a:off x="2605209" y="4169664"/>
+            <a:ext cx="603504" cy="475488"/>
           </a:xfrm>
           <a:prstGeom prst="rect">
             <a:avLst>
@@ -15890,8 +15692,8 @@
         </p:nvSpPr>
         <p:spPr>
           <a:xfrm>
-            <a:off x="2831592" y="4169664"/>
-            <a:ext cx="685800" cy="475488"/>
+            <a:off x="2605209" y="4169664"/>
+            <a:ext cx="603504" cy="475488"/>
           </a:xfrm>
           <a:prstGeom prst="rect">
             <a:avLst/>
@@ -15929,8 +15731,8 @@
         </p:nvSpPr>
         <p:spPr>
           <a:xfrm>
-            <a:off x="3639312" y="4169664"/>
-            <a:ext cx="685800" cy="475488"/>
+            <a:off x="3258589" y="4169664"/>
+            <a:ext cx="603504" cy="475488"/>
           </a:xfrm>
           <a:prstGeom prst="rect">
             <a:avLst>
@@ -15956,8 +15758,8 @@
         </p:nvSpPr>
         <p:spPr>
           <a:xfrm>
-            <a:off x="3639312" y="4169664"/>
-            <a:ext cx="685800" cy="475488"/>
+            <a:off x="3258589" y="4169664"/>
+            <a:ext cx="603504" cy="475488"/>
           </a:xfrm>
           <a:prstGeom prst="rect">
             <a:avLst/>
@@ -15995,8 +15797,8 @@
         </p:nvSpPr>
         <p:spPr>
           <a:xfrm>
-            <a:off x="4447032" y="4169664"/>
-            <a:ext cx="685800" cy="475488"/>
+            <a:off x="3911969" y="4169664"/>
+            <a:ext cx="603504" cy="475488"/>
           </a:xfrm>
           <a:prstGeom prst="rect">
             <a:avLst>
@@ -16022,8 +15824,8 @@
         </p:nvSpPr>
         <p:spPr>
           <a:xfrm>
-            <a:off x="4447032" y="4169664"/>
-            <a:ext cx="685800" cy="475488"/>
+            <a:off x="3911969" y="4169664"/>
+            <a:ext cx="603504" cy="475488"/>
           </a:xfrm>
           <a:prstGeom prst="rect">
             <a:avLst/>
@@ -16061,8 +15863,8 @@
         </p:nvSpPr>
         <p:spPr>
           <a:xfrm>
-            <a:off x="5254752" y="4169664"/>
-            <a:ext cx="685800" cy="475488"/>
+            <a:off x="4565350" y="4169664"/>
+            <a:ext cx="603504" cy="475488"/>
           </a:xfrm>
           <a:prstGeom prst="rect">
             <a:avLst>
@@ -16088,8 +15890,8 @@
         </p:nvSpPr>
         <p:spPr>
           <a:xfrm>
-            <a:off x="5254752" y="4169664"/>
-            <a:ext cx="685800" cy="475488"/>
+            <a:off x="4565350" y="4169664"/>
+            <a:ext cx="603504" cy="475488"/>
           </a:xfrm>
           <a:prstGeom prst="rect">
             <a:avLst/>
@@ -16127,8 +15929,8 @@
         </p:nvSpPr>
         <p:spPr>
           <a:xfrm>
-            <a:off x="6062472" y="4169664"/>
-            <a:ext cx="685800" cy="475488"/>
+            <a:off x="5218730" y="4169664"/>
+            <a:ext cx="603504" cy="475488"/>
           </a:xfrm>
           <a:prstGeom prst="rect">
             <a:avLst>
@@ -16154,8 +15956,8 @@
         </p:nvSpPr>
         <p:spPr>
           <a:xfrm>
-            <a:off x="6062472" y="4169664"/>
-            <a:ext cx="685800" cy="475488"/>
+            <a:off x="5218730" y="4169664"/>
+            <a:ext cx="603504" cy="475488"/>
           </a:xfrm>
           <a:prstGeom prst="rect">
             <a:avLst/>
@@ -16193,8 +15995,8 @@
         </p:nvSpPr>
         <p:spPr>
           <a:xfrm>
-            <a:off x="6870192" y="4169664"/>
-            <a:ext cx="685800" cy="475488"/>
+            <a:off x="5872111" y="4169664"/>
+            <a:ext cx="603504" cy="475488"/>
           </a:xfrm>
           <a:prstGeom prst="rect">
             <a:avLst>
@@ -16220,8 +16022,8 @@
         </p:nvSpPr>
         <p:spPr>
           <a:xfrm>
-            <a:off x="6870192" y="4169664"/>
-            <a:ext cx="685800" cy="475488"/>
+            <a:off x="5872111" y="4169664"/>
+            <a:ext cx="603504" cy="475488"/>
           </a:xfrm>
           <a:prstGeom prst="rect">
             <a:avLst/>
@@ -16245,7 +16047,7 @@
                 <a:ea typeface="Trebuchet MS" pitchFamily="34" charset="-122"/>
                 <a:cs typeface="Trebuchet MS" pitchFamily="34" charset="-120"/>
               </a:rPr>
-              <a:t>i</a:t>
+              <a:t>m</a:t>
             </a:r>
             <a:endParaRPr lang="en-US" sz="900" dirty="0"/>
           </a:p>
@@ -16259,8 +16061,8 @@
         </p:nvSpPr>
         <p:spPr>
           <a:xfrm>
-            <a:off x="7677912" y="4169664"/>
-            <a:ext cx="685800" cy="475488"/>
+            <a:off x="6525491" y="4169664"/>
+            <a:ext cx="603504" cy="475488"/>
           </a:xfrm>
           <a:prstGeom prst="rect">
             <a:avLst>
@@ -16286,8 +16088,8 @@
         </p:nvSpPr>
         <p:spPr>
           <a:xfrm>
-            <a:off x="7677912" y="4169664"/>
-            <a:ext cx="685800" cy="475488"/>
+            <a:off x="6525491" y="4169664"/>
+            <a:ext cx="603504" cy="475488"/>
           </a:xfrm>
           <a:prstGeom prst="rect">
             <a:avLst/>
@@ -16311,7 +16113,139 @@
                 <a:ea typeface="Trebuchet MS" pitchFamily="34" charset="-122"/>
                 <a:cs typeface="Trebuchet MS" pitchFamily="34" charset="-120"/>
               </a:rPr>
-              <a:t>ng</a:t>
+              <a:t>e</a:t>
+            </a:r>
+            <a:endParaRPr lang="en-US" sz="900" dirty="0"/>
+          </a:p>
+        </p:txBody>
+      </p:sp>
+      <p:sp>
+        <p:nvSpPr>
+          <p:cNvPr id="52" name="Shape 50"/>
+          <p:cNvSpPr/>
+          <p:nvPr/>
+        </p:nvSpPr>
+        <p:spPr>
+          <a:xfrm>
+            <a:off x="7178871" y="4169664"/>
+            <a:ext cx="603504" cy="475488"/>
+          </a:xfrm>
+          <a:prstGeom prst="rect">
+            <a:avLst>
+              <a:gd name="adj" fmla="val 7692"/>
+            </a:avLst>
+          </a:prstGeom>
+          <a:solidFill>
+            <a:srgbClr val="FFFFFF"/>
+          </a:solidFill>
+          <a:ln w="12700">
+            <a:solidFill>
+              <a:srgbClr val="DB2777"/>
+            </a:solidFill>
+            <a:prstDash val="solid"/>
+          </a:ln>
+        </p:spPr>
+      </p:sp>
+      <p:sp>
+        <p:nvSpPr>
+          <p:cNvPr id="53" name="Text 51"/>
+          <p:cNvSpPr/>
+          <p:nvPr/>
+        </p:nvSpPr>
+        <p:spPr>
+          <a:xfrm>
+            <a:off x="7178871" y="4169664"/>
+            <a:ext cx="603504" cy="475488"/>
+          </a:xfrm>
+          <a:prstGeom prst="rect">
+            <a:avLst/>
+          </a:prstGeom>
+          <a:noFill/>
+          <a:ln/>
+        </p:spPr>
+        <p:txBody>
+          <a:bodyPr wrap="square" lIns="0" tIns="0" rIns="0" bIns="0" rtlCol="0" anchor="ctr"/>
+          <a:lstStyle/>
+          <a:p>
+            <a:pPr algn="ctr" indent="0" marL="0">
+              <a:buNone/>
+            </a:pPr>
+            <a:r>
+              <a:rPr lang="en-US" sz="900" b="1" dirty="0">
+                <a:solidFill>
+                  <a:srgbClr val="9D174D"/>
+                </a:solidFill>
+                <a:latin typeface="Trebuchet MS" pitchFamily="34" charset="0"/>
+                <a:ea typeface="Trebuchet MS" pitchFamily="34" charset="-122"/>
+                <a:cs typeface="Trebuchet MS" pitchFamily="34" charset="-120"/>
+              </a:rPr>
+              <a:t>n</a:t>
+            </a:r>
+            <a:endParaRPr lang="en-US" sz="900" dirty="0"/>
+          </a:p>
+        </p:txBody>
+      </p:sp>
+      <p:sp>
+        <p:nvSpPr>
+          <p:cNvPr id="54" name="Shape 52"/>
+          <p:cNvSpPr/>
+          <p:nvPr/>
+        </p:nvSpPr>
+        <p:spPr>
+          <a:xfrm>
+            <a:off x="7832252" y="4169664"/>
+            <a:ext cx="603504" cy="475488"/>
+          </a:xfrm>
+          <a:prstGeom prst="rect">
+            <a:avLst>
+              <a:gd name="adj" fmla="val 7692"/>
+            </a:avLst>
+          </a:prstGeom>
+          <a:solidFill>
+            <a:srgbClr val="FFFFFF"/>
+          </a:solidFill>
+          <a:ln w="12700">
+            <a:solidFill>
+              <a:srgbClr val="DB2777"/>
+            </a:solidFill>
+            <a:prstDash val="solid"/>
+          </a:ln>
+        </p:spPr>
+      </p:sp>
+      <p:sp>
+        <p:nvSpPr>
+          <p:cNvPr id="55" name="Text 53"/>
+          <p:cNvSpPr/>
+          <p:nvPr/>
+        </p:nvSpPr>
+        <p:spPr>
+          <a:xfrm>
+            <a:off x="7832252" y="4169664"/>
+            <a:ext cx="603504" cy="475488"/>
+          </a:xfrm>
+          <a:prstGeom prst="rect">
+            <a:avLst/>
+          </a:prstGeom>
+          <a:noFill/>
+          <a:ln/>
+        </p:spPr>
+        <p:txBody>
+          <a:bodyPr wrap="square" lIns="0" tIns="0" rIns="0" bIns="0" rtlCol="0" anchor="ctr"/>
+          <a:lstStyle/>
+          <a:p>
+            <a:pPr algn="ctr" indent="0" marL="0">
+              <a:buNone/>
+            </a:pPr>
+            <a:r>
+              <a:rPr lang="en-US" sz="900" b="1" dirty="0">
+                <a:solidFill>
+                  <a:srgbClr val="9D174D"/>
+                </a:solidFill>
+                <a:latin typeface="Trebuchet MS" pitchFamily="34" charset="0"/>
+                <a:ea typeface="Trebuchet MS" pitchFamily="34" charset="-122"/>
+                <a:cs typeface="Trebuchet MS" pitchFamily="34" charset="-120"/>
+              </a:rPr>
+              <a:t>t</a:t>
             </a:r>
             <a:endParaRPr lang="en-US" sz="900" dirty="0"/>
           </a:p>
@@ -17637,7 +17571,7 @@
                 <a:ea typeface="Calibri" pitchFamily="34" charset="-122"/>
                 <a:cs typeface="Calibri" pitchFamily="34" charset="-120"/>
               </a:rPr>
-              <a:t>The keen </a:t>
+              <a:t>The </a:t>
             </a:r>
             <a:pPr algn="l" indent="0" marL="0">
               <a:buNone/>
@@ -17654,7 +17588,7 @@
                 <a:ea typeface="Calibri" pitchFamily="34" charset="-122"/>
                 <a:cs typeface="Calibri" pitchFamily="34" charset="-120"/>
               </a:rPr>
-              <a:t>investor</a:t>
+              <a:t>investigator</a:t>
             </a:r>
             <a:pPr algn="l" indent="0" marL="0">
               <a:buNone/>
@@ -17668,7 +17602,7 @@
                 <a:ea typeface="Calibri" pitchFamily="34" charset="-122"/>
                 <a:cs typeface="Calibri" pitchFamily="34" charset="-120"/>
               </a:rPr>
-              <a:t> decided to </a:t>
+              <a:t> discovered that </a:t>
             </a:r>
             <a:pPr algn="l" indent="0" marL="0">
               <a:buNone/>
@@ -17685,7 +17619,7 @@
                 <a:ea typeface="Calibri" pitchFamily="34" charset="-122"/>
                 <a:cs typeface="Calibri" pitchFamily="34" charset="-120"/>
               </a:rPr>
-              <a:t>reinvest</a:t>
+              <a:t>reinvesting</a:t>
             </a:r>
             <a:pPr algn="l" indent="0" marL="0">
               <a:buNone/>
@@ -17699,7 +17633,7 @@
                 <a:ea typeface="Calibri" pitchFamily="34" charset="-122"/>
                 <a:cs typeface="Calibri" pitchFamily="34" charset="-120"/>
               </a:rPr>
-              <a:t> her profits wisely, knowing that each </a:t>
+              <a:t> profits was key, but </a:t>
             </a:r>
             <a:pPr algn="l" indent="0" marL="0">
               <a:buNone/>
@@ -17716,7 +17650,7 @@
                 <a:ea typeface="Calibri" pitchFamily="34" charset="-122"/>
                 <a:cs typeface="Calibri" pitchFamily="34" charset="-120"/>
               </a:rPr>
-              <a:t>investment</a:t>
+              <a:t>investing</a:t>
             </a:r>
             <a:pPr algn="l" indent="0" marL="0">
               <a:buNone/>
@@ -17730,7 +17664,7 @@
                 <a:ea typeface="Calibri" pitchFamily="34" charset="-122"/>
                 <a:cs typeface="Calibri" pitchFamily="34" charset="-120"/>
               </a:rPr>
-              <a:t> would help her school library grow.</a:t>
+              <a:t> in people mattered most.</a:t>
             </a:r>
             <a:endParaRPr lang="en-US" sz="1800" dirty="0"/>
           </a:p>
@@ -17885,7 +17819,7 @@
                 <a:ea typeface="Trebuchet MS" pitchFamily="34" charset="-122"/>
                 <a:cs typeface="Trebuchet MS" pitchFamily="34" charset="-120"/>
               </a:rPr>
-              <a:t>investor</a:t>
+              <a:t>investigator</a:t>
             </a:r>
             <a:endParaRPr lang="en-US" sz="1400" dirty="0"/>
           </a:p>
@@ -18013,7 +17947,7 @@
                 <a:ea typeface="Trebuchet MS" pitchFamily="34" charset="-122"/>
                 <a:cs typeface="Trebuchet MS" pitchFamily="34" charset="-120"/>
               </a:rPr>
-              <a:t>reinvest</a:t>
+              <a:t>reinvesting</a:t>
             </a:r>
             <a:endParaRPr lang="en-US" sz="1400" dirty="0"/>
           </a:p>
@@ -18141,7 +18075,7 @@
                 <a:ea typeface="Trebuchet MS" pitchFamily="34" charset="-122"/>
                 <a:cs typeface="Trebuchet MS" pitchFamily="34" charset="-120"/>
               </a:rPr>
-              <a:t>investment</a:t>
+              <a:t>investing</a:t>
             </a:r>
             <a:endParaRPr lang="en-US" sz="1400" dirty="0"/>
           </a:p>
@@ -18611,7 +18545,7 @@
                 <a:ea typeface="Trebuchet MS" pitchFamily="34" charset="-122"/>
                 <a:cs typeface="Trebuchet MS" pitchFamily="34" charset="-120"/>
               </a:rPr>
-              <a:t>investor</a:t>
+              <a:t>investigator</a:t>
             </a:r>
             <a:endParaRPr lang="en-US" sz="2800" dirty="0"/>
           </a:p>
@@ -19438,7 +19372,7 @@
                 <a:ea typeface="Trebuchet MS" pitchFamily="34" charset="-122"/>
                 <a:cs typeface="Trebuchet MS" pitchFamily="34" charset="-120"/>
               </a:rPr>
-              <a:t>investor</a:t>
+              <a:t>investigator</a:t>
             </a:r>
             <a:endParaRPr lang="en-US" sz="2800" dirty="0"/>
           </a:p>
@@ -19518,8 +19452,8 @@
         </p:nvSpPr>
         <p:spPr>
           <a:xfrm>
-            <a:off x="2938272" y="2258568"/>
-            <a:ext cx="1828800" cy="292608"/>
+            <a:off x="1989734" y="2258568"/>
+            <a:ext cx="1581912" cy="292608"/>
           </a:xfrm>
           <a:prstGeom prst="rect">
             <a:avLst>
@@ -19552,8 +19486,8 @@
         </p:nvSpPr>
         <p:spPr>
           <a:xfrm>
-            <a:off x="2938272" y="2258568"/>
-            <a:ext cx="1828800" cy="292608"/>
+            <a:off x="1989734" y="2258568"/>
+            <a:ext cx="1581912" cy="292608"/>
           </a:xfrm>
           <a:prstGeom prst="rect">
             <a:avLst/>
@@ -19591,8 +19525,8 @@
         </p:nvSpPr>
         <p:spPr>
           <a:xfrm>
-            <a:off x="2938272" y="2569464"/>
-            <a:ext cx="1828800" cy="201168"/>
+            <a:off x="1989734" y="2569464"/>
+            <a:ext cx="1581912" cy="201168"/>
           </a:xfrm>
           <a:prstGeom prst="rect">
             <a:avLst/>
@@ -19616,7 +19550,7 @@
                 <a:ea typeface="Calibri" pitchFamily="34" charset="-122"/>
                 <a:cs typeface="Calibri" pitchFamily="34" charset="-120"/>
               </a:rPr>
-              <a:t>to put in / to clothe</a:t>
+              <a:t>to put effort in / look into</a:t>
             </a:r>
             <a:endParaRPr lang="en-US" sz="850" dirty="0"/>
           </a:p>
@@ -19630,8 +19564,8 @@
         </p:nvSpPr>
         <p:spPr>
           <a:xfrm>
-            <a:off x="5803392" y="2258568"/>
-            <a:ext cx="1828800" cy="292608"/>
+            <a:off x="3659429" y="2258568"/>
+            <a:ext cx="1581912" cy="292608"/>
           </a:xfrm>
           <a:prstGeom prst="rect">
             <a:avLst>
@@ -19664,8 +19598,8 @@
         </p:nvSpPr>
         <p:spPr>
           <a:xfrm>
-            <a:off x="5803392" y="2258568"/>
-            <a:ext cx="1828800" cy="292608"/>
+            <a:off x="3659429" y="2258568"/>
+            <a:ext cx="1581912" cy="292608"/>
           </a:xfrm>
           <a:prstGeom prst="rect">
             <a:avLst/>
@@ -19689,7 +19623,7 @@
                 <a:ea typeface="Trebuchet MS" pitchFamily="34" charset="-122"/>
                 <a:cs typeface="Trebuchet MS" pitchFamily="34" charset="-120"/>
               </a:rPr>
-              <a:t>or</a:t>
+              <a:t>ig</a:t>
             </a:r>
             <a:endParaRPr lang="en-US" sz="1300" dirty="0"/>
           </a:p>
@@ -19703,8 +19637,8 @@
         </p:nvSpPr>
         <p:spPr>
           <a:xfrm>
-            <a:off x="5803392" y="2569464"/>
-            <a:ext cx="1828800" cy="201168"/>
+            <a:off x="3659429" y="2569464"/>
+            <a:ext cx="1581912" cy="201168"/>
           </a:xfrm>
           <a:prstGeom prst="rect">
             <a:avLst/>
@@ -19728,6 +19662,230 @@
                 <a:ea typeface="Calibri" pitchFamily="34" charset="-122"/>
                 <a:cs typeface="Calibri" pitchFamily="34" charset="-120"/>
               </a:rPr>
+              <a:t>connecting element</a:t>
+            </a:r>
+            <a:endParaRPr lang="en-US" sz="850" dirty="0"/>
+          </a:p>
+        </p:txBody>
+      </p:sp>
+      <p:sp>
+        <p:nvSpPr>
+          <p:cNvPr id="22" name="Shape 20"/>
+          <p:cNvSpPr/>
+          <p:nvPr/>
+        </p:nvSpPr>
+        <p:spPr>
+          <a:xfrm>
+            <a:off x="5329123" y="2258568"/>
+            <a:ext cx="1581912" cy="292608"/>
+          </a:xfrm>
+          <a:prstGeom prst="rect">
+            <a:avLst>
+              <a:gd name="adj" fmla="val 25000"/>
+            </a:avLst>
+          </a:prstGeom>
+          <a:solidFill>
+            <a:srgbClr val="FCE7F3"/>
+          </a:solidFill>
+          <a:ln w="19050">
+            <a:solidFill>
+              <a:srgbClr val="DB2777"/>
+            </a:solidFill>
+            <a:prstDash val="solid"/>
+          </a:ln>
+          <a:effectLst>
+            <a:outerShdw sx="100000" sy="100000" kx="0" ky="0" algn="bl" rotWithShape="0" blurRad="101600" dist="38100" dir="8100000">
+              <a:srgbClr val="000000">
+                <a:alpha val="12000"/>
+              </a:srgbClr>
+            </a:outerShdw>
+          </a:effectLst>
+        </p:spPr>
+      </p:sp>
+      <p:sp>
+        <p:nvSpPr>
+          <p:cNvPr id="23" name="Text 21"/>
+          <p:cNvSpPr/>
+          <p:nvPr/>
+        </p:nvSpPr>
+        <p:spPr>
+          <a:xfrm>
+            <a:off x="5329123" y="2258568"/>
+            <a:ext cx="1581912" cy="292608"/>
+          </a:xfrm>
+          <a:prstGeom prst="rect">
+            <a:avLst/>
+          </a:prstGeom>
+          <a:noFill/>
+          <a:ln/>
+        </p:spPr>
+        <p:txBody>
+          <a:bodyPr wrap="square" lIns="0" tIns="0" rIns="0" bIns="0" rtlCol="0" anchor="ctr"/>
+          <a:lstStyle/>
+          <a:p>
+            <a:pPr algn="ctr" indent="0" marL="0">
+              <a:buNone/>
+            </a:pPr>
+            <a:r>
+              <a:rPr lang="en-US" sz="1300" b="1" dirty="0">
+                <a:solidFill>
+                  <a:srgbClr val="9D174D"/>
+                </a:solidFill>
+                <a:latin typeface="Trebuchet MS" pitchFamily="34" charset="0"/>
+                <a:ea typeface="Trebuchet MS" pitchFamily="34" charset="-122"/>
+                <a:cs typeface="Trebuchet MS" pitchFamily="34" charset="-120"/>
+              </a:rPr>
+              <a:t>at</a:t>
+            </a:r>
+            <a:endParaRPr lang="en-US" sz="1300" dirty="0"/>
+          </a:p>
+        </p:txBody>
+      </p:sp>
+      <p:sp>
+        <p:nvSpPr>
+          <p:cNvPr id="24" name="Text 22"/>
+          <p:cNvSpPr/>
+          <p:nvPr/>
+        </p:nvSpPr>
+        <p:spPr>
+          <a:xfrm>
+            <a:off x="5329123" y="2569464"/>
+            <a:ext cx="1581912" cy="201168"/>
+          </a:xfrm>
+          <a:prstGeom prst="rect">
+            <a:avLst/>
+          </a:prstGeom>
+          <a:noFill/>
+          <a:ln/>
+        </p:spPr>
+        <p:txBody>
+          <a:bodyPr wrap="square" lIns="0" tIns="0" rIns="0" bIns="0" rtlCol="0" anchor="t"/>
+          <a:lstStyle/>
+          <a:p>
+            <a:pPr algn="ctr" indent="0" marL="0">
+              <a:buNone/>
+            </a:pPr>
+            <a:r>
+              <a:rPr lang="en-US" sz="850" dirty="0">
+                <a:solidFill>
+                  <a:srgbClr val="475569"/>
+                </a:solidFill>
+                <a:latin typeface="Calibri" pitchFamily="34" charset="0"/>
+                <a:ea typeface="Calibri" pitchFamily="34" charset="-122"/>
+                <a:cs typeface="Calibri" pitchFamily="34" charset="-120"/>
+              </a:rPr>
+              <a:t>to do</a:t>
+            </a:r>
+            <a:endParaRPr lang="en-US" sz="850" dirty="0"/>
+          </a:p>
+        </p:txBody>
+      </p:sp>
+      <p:sp>
+        <p:nvSpPr>
+          <p:cNvPr id="25" name="Shape 23"/>
+          <p:cNvSpPr/>
+          <p:nvPr/>
+        </p:nvSpPr>
+        <p:spPr>
+          <a:xfrm>
+            <a:off x="6998818" y="2258568"/>
+            <a:ext cx="1581912" cy="292608"/>
+          </a:xfrm>
+          <a:prstGeom prst="rect">
+            <a:avLst>
+              <a:gd name="adj" fmla="val 25000"/>
+            </a:avLst>
+          </a:prstGeom>
+          <a:solidFill>
+            <a:srgbClr val="FCE7F3"/>
+          </a:solidFill>
+          <a:ln w="19050">
+            <a:solidFill>
+              <a:srgbClr val="DB2777"/>
+            </a:solidFill>
+            <a:prstDash val="solid"/>
+          </a:ln>
+          <a:effectLst>
+            <a:outerShdw sx="100000" sy="100000" kx="0" ky="0" algn="bl" rotWithShape="0" blurRad="101600" dist="38100" dir="8100000">
+              <a:srgbClr val="000000">
+                <a:alpha val="12000"/>
+              </a:srgbClr>
+            </a:outerShdw>
+          </a:effectLst>
+        </p:spPr>
+      </p:sp>
+      <p:sp>
+        <p:nvSpPr>
+          <p:cNvPr id="26" name="Text 24"/>
+          <p:cNvSpPr/>
+          <p:nvPr/>
+        </p:nvSpPr>
+        <p:spPr>
+          <a:xfrm>
+            <a:off x="6998818" y="2258568"/>
+            <a:ext cx="1581912" cy="292608"/>
+          </a:xfrm>
+          <a:prstGeom prst="rect">
+            <a:avLst/>
+          </a:prstGeom>
+          <a:noFill/>
+          <a:ln/>
+        </p:spPr>
+        <p:txBody>
+          <a:bodyPr wrap="square" lIns="0" tIns="0" rIns="0" bIns="0" rtlCol="0" anchor="ctr"/>
+          <a:lstStyle/>
+          <a:p>
+            <a:pPr algn="ctr" indent="0" marL="0">
+              <a:buNone/>
+            </a:pPr>
+            <a:r>
+              <a:rPr lang="en-US" sz="1300" b="1" dirty="0">
+                <a:solidFill>
+                  <a:srgbClr val="9D174D"/>
+                </a:solidFill>
+                <a:latin typeface="Trebuchet MS" pitchFamily="34" charset="0"/>
+                <a:ea typeface="Trebuchet MS" pitchFamily="34" charset="-122"/>
+                <a:cs typeface="Trebuchet MS" pitchFamily="34" charset="-120"/>
+              </a:rPr>
+              <a:t>or</a:t>
+            </a:r>
+            <a:endParaRPr lang="en-US" sz="1300" dirty="0"/>
+          </a:p>
+        </p:txBody>
+      </p:sp>
+      <p:sp>
+        <p:nvSpPr>
+          <p:cNvPr id="27" name="Text 25"/>
+          <p:cNvSpPr/>
+          <p:nvPr/>
+        </p:nvSpPr>
+        <p:spPr>
+          <a:xfrm>
+            <a:off x="6998818" y="2569464"/>
+            <a:ext cx="1581912" cy="201168"/>
+          </a:xfrm>
+          <a:prstGeom prst="rect">
+            <a:avLst/>
+          </a:prstGeom>
+          <a:noFill/>
+          <a:ln/>
+        </p:spPr>
+        <p:txBody>
+          <a:bodyPr wrap="square" lIns="0" tIns="0" rIns="0" bIns="0" rtlCol="0" anchor="t"/>
+          <a:lstStyle/>
+          <a:p>
+            <a:pPr algn="ctr" indent="0" marL="0">
+              <a:buNone/>
+            </a:pPr>
+            <a:r>
+              <a:rPr lang="en-US" sz="850" dirty="0">
+                <a:solidFill>
+                  <a:srgbClr val="475569"/>
+                </a:solidFill>
+                <a:latin typeface="Calibri" pitchFamily="34" charset="0"/>
+                <a:ea typeface="Calibri" pitchFamily="34" charset="-122"/>
+                <a:cs typeface="Calibri" pitchFamily="34" charset="-120"/>
+              </a:rPr>
               <a:t>person who does something</a:t>
             </a:r>
             <a:endParaRPr lang="en-US" sz="850" dirty="0"/>
@@ -19736,7 +19894,7 @@
       </p:sp>
       <p:sp>
         <p:nvSpPr>
-          <p:cNvPr id="22" name="Shape 20"/>
+          <p:cNvPr id="28" name="Shape 26"/>
           <p:cNvSpPr/>
           <p:nvPr/>
         </p:nvSpPr>
@@ -19763,7 +19921,7 @@
       </p:sp>
       <p:sp>
         <p:nvSpPr>
-          <p:cNvPr id="23" name="Text 21"/>
+          <p:cNvPr id="29" name="Text 27"/>
           <p:cNvSpPr/>
           <p:nvPr/>
         </p:nvSpPr>
@@ -19802,7 +19960,7 @@
       </p:sp>
       <p:sp>
         <p:nvSpPr>
-          <p:cNvPr id="24" name="Shape 22"/>
+          <p:cNvPr id="30" name="Shape 28"/>
           <p:cNvSpPr/>
           <p:nvPr/>
         </p:nvSpPr>
@@ -19829,7 +19987,7 @@
       </p:sp>
       <p:sp>
         <p:nvSpPr>
-          <p:cNvPr id="25" name="Text 23"/>
+          <p:cNvPr id="31" name="Text 29"/>
           <p:cNvSpPr/>
           <p:nvPr/>
         </p:nvSpPr>
@@ -19868,7 +20026,7 @@
       </p:sp>
       <p:sp>
         <p:nvSpPr>
-          <p:cNvPr id="26" name="Shape 24"/>
+          <p:cNvPr id="32" name="Shape 30"/>
           <p:cNvSpPr/>
           <p:nvPr/>
         </p:nvSpPr>
@@ -19895,7 +20053,7 @@
       </p:sp>
       <p:sp>
         <p:nvSpPr>
-          <p:cNvPr id="27" name="Text 25"/>
+          <p:cNvPr id="33" name="Text 31"/>
           <p:cNvSpPr/>
           <p:nvPr/>
         </p:nvSpPr>
@@ -19934,7 +20092,7 @@
       </p:sp>
       <p:sp>
         <p:nvSpPr>
-          <p:cNvPr id="28" name="Shape 26"/>
+          <p:cNvPr id="34" name="Shape 32"/>
           <p:cNvSpPr/>
           <p:nvPr/>
         </p:nvSpPr>
@@ -19961,7 +20119,7 @@
       </p:sp>
       <p:sp>
         <p:nvSpPr>
-          <p:cNvPr id="29" name="Text 27"/>
+          <p:cNvPr id="35" name="Text 33"/>
           <p:cNvSpPr/>
           <p:nvPr/>
         </p:nvSpPr>
@@ -20423,7 +20581,7 @@
                 <a:ea typeface="Trebuchet MS" pitchFamily="34" charset="-122"/>
                 <a:cs typeface="Trebuchet MS" pitchFamily="34" charset="-120"/>
               </a:rPr>
-              <a:t>investor</a:t>
+              <a:t>investigator</a:t>
             </a:r>
             <a:endParaRPr lang="en-US" sz="2800" dirty="0"/>
           </a:p>
@@ -20503,8 +20661,8 @@
         </p:nvSpPr>
         <p:spPr>
           <a:xfrm>
-            <a:off x="2938272" y="2258568"/>
-            <a:ext cx="1828800" cy="292608"/>
+            <a:off x="1989734" y="2258568"/>
+            <a:ext cx="1581912" cy="292608"/>
           </a:xfrm>
           <a:prstGeom prst="rect">
             <a:avLst>
@@ -20537,8 +20695,8 @@
         </p:nvSpPr>
         <p:spPr>
           <a:xfrm>
-            <a:off x="2938272" y="2258568"/>
-            <a:ext cx="1828800" cy="292608"/>
+            <a:off x="1989734" y="2258568"/>
+            <a:ext cx="1581912" cy="292608"/>
           </a:xfrm>
           <a:prstGeom prst="rect">
             <a:avLst/>
@@ -20576,8 +20734,8 @@
         </p:nvSpPr>
         <p:spPr>
           <a:xfrm>
-            <a:off x="2938272" y="2569464"/>
-            <a:ext cx="1828800" cy="201168"/>
+            <a:off x="1989734" y="2569464"/>
+            <a:ext cx="1581912" cy="201168"/>
           </a:xfrm>
           <a:prstGeom prst="rect">
             <a:avLst/>
@@ -20601,7 +20759,7 @@
                 <a:ea typeface="Calibri" pitchFamily="34" charset="-122"/>
                 <a:cs typeface="Calibri" pitchFamily="34" charset="-120"/>
               </a:rPr>
-              <a:t>to put in / to clothe</a:t>
+              <a:t>to put effort in / look into</a:t>
             </a:r>
             <a:endParaRPr lang="en-US" sz="850" dirty="0"/>
           </a:p>
@@ -20615,8 +20773,8 @@
         </p:nvSpPr>
         <p:spPr>
           <a:xfrm>
-            <a:off x="5803392" y="2258568"/>
-            <a:ext cx="1828800" cy="292608"/>
+            <a:off x="3659429" y="2258568"/>
+            <a:ext cx="1581912" cy="292608"/>
           </a:xfrm>
           <a:prstGeom prst="rect">
             <a:avLst>
@@ -20649,8 +20807,8 @@
         </p:nvSpPr>
         <p:spPr>
           <a:xfrm>
-            <a:off x="5803392" y="2258568"/>
-            <a:ext cx="1828800" cy="292608"/>
+            <a:off x="3659429" y="2258568"/>
+            <a:ext cx="1581912" cy="292608"/>
           </a:xfrm>
           <a:prstGeom prst="rect">
             <a:avLst/>
@@ -20674,7 +20832,7 @@
                 <a:ea typeface="Trebuchet MS" pitchFamily="34" charset="-122"/>
                 <a:cs typeface="Trebuchet MS" pitchFamily="34" charset="-120"/>
               </a:rPr>
-              <a:t>or</a:t>
+              <a:t>ig</a:t>
             </a:r>
             <a:endParaRPr lang="en-US" sz="1300" dirty="0"/>
           </a:p>
@@ -20688,8 +20846,8 @@
         </p:nvSpPr>
         <p:spPr>
           <a:xfrm>
-            <a:off x="5803392" y="2569464"/>
-            <a:ext cx="1828800" cy="201168"/>
+            <a:off x="3659429" y="2569464"/>
+            <a:ext cx="1581912" cy="201168"/>
           </a:xfrm>
           <a:prstGeom prst="rect">
             <a:avLst/>
@@ -20713,6 +20871,230 @@
                 <a:ea typeface="Calibri" pitchFamily="34" charset="-122"/>
                 <a:cs typeface="Calibri" pitchFamily="34" charset="-120"/>
               </a:rPr>
+              <a:t>connecting element</a:t>
+            </a:r>
+            <a:endParaRPr lang="en-US" sz="850" dirty="0"/>
+          </a:p>
+        </p:txBody>
+      </p:sp>
+      <p:sp>
+        <p:nvSpPr>
+          <p:cNvPr id="22" name="Shape 20"/>
+          <p:cNvSpPr/>
+          <p:nvPr/>
+        </p:nvSpPr>
+        <p:spPr>
+          <a:xfrm>
+            <a:off x="5329123" y="2258568"/>
+            <a:ext cx="1581912" cy="292608"/>
+          </a:xfrm>
+          <a:prstGeom prst="rect">
+            <a:avLst>
+              <a:gd name="adj" fmla="val 25000"/>
+            </a:avLst>
+          </a:prstGeom>
+          <a:solidFill>
+            <a:srgbClr val="FCE7F3"/>
+          </a:solidFill>
+          <a:ln w="19050">
+            <a:solidFill>
+              <a:srgbClr val="DB2777"/>
+            </a:solidFill>
+            <a:prstDash val="solid"/>
+          </a:ln>
+          <a:effectLst>
+            <a:outerShdw sx="100000" sy="100000" kx="0" ky="0" algn="bl" rotWithShape="0" blurRad="101600" dist="38100" dir="8100000">
+              <a:srgbClr val="000000">
+                <a:alpha val="12000"/>
+              </a:srgbClr>
+            </a:outerShdw>
+          </a:effectLst>
+        </p:spPr>
+      </p:sp>
+      <p:sp>
+        <p:nvSpPr>
+          <p:cNvPr id="23" name="Text 21"/>
+          <p:cNvSpPr/>
+          <p:nvPr/>
+        </p:nvSpPr>
+        <p:spPr>
+          <a:xfrm>
+            <a:off x="5329123" y="2258568"/>
+            <a:ext cx="1581912" cy="292608"/>
+          </a:xfrm>
+          <a:prstGeom prst="rect">
+            <a:avLst/>
+          </a:prstGeom>
+          <a:noFill/>
+          <a:ln/>
+        </p:spPr>
+        <p:txBody>
+          <a:bodyPr wrap="square" lIns="0" tIns="0" rIns="0" bIns="0" rtlCol="0" anchor="ctr"/>
+          <a:lstStyle/>
+          <a:p>
+            <a:pPr algn="ctr" indent="0" marL="0">
+              <a:buNone/>
+            </a:pPr>
+            <a:r>
+              <a:rPr lang="en-US" sz="1300" b="1" dirty="0">
+                <a:solidFill>
+                  <a:srgbClr val="9D174D"/>
+                </a:solidFill>
+                <a:latin typeface="Trebuchet MS" pitchFamily="34" charset="0"/>
+                <a:ea typeface="Trebuchet MS" pitchFamily="34" charset="-122"/>
+                <a:cs typeface="Trebuchet MS" pitchFamily="34" charset="-120"/>
+              </a:rPr>
+              <a:t>at</a:t>
+            </a:r>
+            <a:endParaRPr lang="en-US" sz="1300" dirty="0"/>
+          </a:p>
+        </p:txBody>
+      </p:sp>
+      <p:sp>
+        <p:nvSpPr>
+          <p:cNvPr id="24" name="Text 22"/>
+          <p:cNvSpPr/>
+          <p:nvPr/>
+        </p:nvSpPr>
+        <p:spPr>
+          <a:xfrm>
+            <a:off x="5329123" y="2569464"/>
+            <a:ext cx="1581912" cy="201168"/>
+          </a:xfrm>
+          <a:prstGeom prst="rect">
+            <a:avLst/>
+          </a:prstGeom>
+          <a:noFill/>
+          <a:ln/>
+        </p:spPr>
+        <p:txBody>
+          <a:bodyPr wrap="square" lIns="0" tIns="0" rIns="0" bIns="0" rtlCol="0" anchor="t"/>
+          <a:lstStyle/>
+          <a:p>
+            <a:pPr algn="ctr" indent="0" marL="0">
+              <a:buNone/>
+            </a:pPr>
+            <a:r>
+              <a:rPr lang="en-US" sz="850" dirty="0">
+                <a:solidFill>
+                  <a:srgbClr val="475569"/>
+                </a:solidFill>
+                <a:latin typeface="Calibri" pitchFamily="34" charset="0"/>
+                <a:ea typeface="Calibri" pitchFamily="34" charset="-122"/>
+                <a:cs typeface="Calibri" pitchFamily="34" charset="-120"/>
+              </a:rPr>
+              <a:t>to do</a:t>
+            </a:r>
+            <a:endParaRPr lang="en-US" sz="850" dirty="0"/>
+          </a:p>
+        </p:txBody>
+      </p:sp>
+      <p:sp>
+        <p:nvSpPr>
+          <p:cNvPr id="25" name="Shape 23"/>
+          <p:cNvSpPr/>
+          <p:nvPr/>
+        </p:nvSpPr>
+        <p:spPr>
+          <a:xfrm>
+            <a:off x="6998818" y="2258568"/>
+            <a:ext cx="1581912" cy="292608"/>
+          </a:xfrm>
+          <a:prstGeom prst="rect">
+            <a:avLst>
+              <a:gd name="adj" fmla="val 25000"/>
+            </a:avLst>
+          </a:prstGeom>
+          <a:solidFill>
+            <a:srgbClr val="FCE7F3"/>
+          </a:solidFill>
+          <a:ln w="19050">
+            <a:solidFill>
+              <a:srgbClr val="DB2777"/>
+            </a:solidFill>
+            <a:prstDash val="solid"/>
+          </a:ln>
+          <a:effectLst>
+            <a:outerShdw sx="100000" sy="100000" kx="0" ky="0" algn="bl" rotWithShape="0" blurRad="101600" dist="38100" dir="8100000">
+              <a:srgbClr val="000000">
+                <a:alpha val="12000"/>
+              </a:srgbClr>
+            </a:outerShdw>
+          </a:effectLst>
+        </p:spPr>
+      </p:sp>
+      <p:sp>
+        <p:nvSpPr>
+          <p:cNvPr id="26" name="Text 24"/>
+          <p:cNvSpPr/>
+          <p:nvPr/>
+        </p:nvSpPr>
+        <p:spPr>
+          <a:xfrm>
+            <a:off x="6998818" y="2258568"/>
+            <a:ext cx="1581912" cy="292608"/>
+          </a:xfrm>
+          <a:prstGeom prst="rect">
+            <a:avLst/>
+          </a:prstGeom>
+          <a:noFill/>
+          <a:ln/>
+        </p:spPr>
+        <p:txBody>
+          <a:bodyPr wrap="square" lIns="0" tIns="0" rIns="0" bIns="0" rtlCol="0" anchor="ctr"/>
+          <a:lstStyle/>
+          <a:p>
+            <a:pPr algn="ctr" indent="0" marL="0">
+              <a:buNone/>
+            </a:pPr>
+            <a:r>
+              <a:rPr lang="en-US" sz="1300" b="1" dirty="0">
+                <a:solidFill>
+                  <a:srgbClr val="9D174D"/>
+                </a:solidFill>
+                <a:latin typeface="Trebuchet MS" pitchFamily="34" charset="0"/>
+                <a:ea typeface="Trebuchet MS" pitchFamily="34" charset="-122"/>
+                <a:cs typeface="Trebuchet MS" pitchFamily="34" charset="-120"/>
+              </a:rPr>
+              <a:t>or</a:t>
+            </a:r>
+            <a:endParaRPr lang="en-US" sz="1300" dirty="0"/>
+          </a:p>
+        </p:txBody>
+      </p:sp>
+      <p:sp>
+        <p:nvSpPr>
+          <p:cNvPr id="27" name="Text 25"/>
+          <p:cNvSpPr/>
+          <p:nvPr/>
+        </p:nvSpPr>
+        <p:spPr>
+          <a:xfrm>
+            <a:off x="6998818" y="2569464"/>
+            <a:ext cx="1581912" cy="201168"/>
+          </a:xfrm>
+          <a:prstGeom prst="rect">
+            <a:avLst/>
+          </a:prstGeom>
+          <a:noFill/>
+          <a:ln/>
+        </p:spPr>
+        <p:txBody>
+          <a:bodyPr wrap="square" lIns="0" tIns="0" rIns="0" bIns="0" rtlCol="0" anchor="t"/>
+          <a:lstStyle/>
+          <a:p>
+            <a:pPr algn="ctr" indent="0" marL="0">
+              <a:buNone/>
+            </a:pPr>
+            <a:r>
+              <a:rPr lang="en-US" sz="850" dirty="0">
+                <a:solidFill>
+                  <a:srgbClr val="475569"/>
+                </a:solidFill>
+                <a:latin typeface="Calibri" pitchFamily="34" charset="0"/>
+                <a:ea typeface="Calibri" pitchFamily="34" charset="-122"/>
+                <a:cs typeface="Calibri" pitchFamily="34" charset="-120"/>
+              </a:rPr>
               <a:t>person who does something</a:t>
             </a:r>
             <a:endParaRPr lang="en-US" sz="850" dirty="0"/>
@@ -20721,7 +21103,7 @@
       </p:sp>
       <p:sp>
         <p:nvSpPr>
-          <p:cNvPr id="22" name="Shape 20"/>
+          <p:cNvPr id="28" name="Shape 26"/>
           <p:cNvSpPr/>
           <p:nvPr/>
         </p:nvSpPr>
@@ -20748,7 +21130,7 @@
       </p:sp>
       <p:sp>
         <p:nvSpPr>
-          <p:cNvPr id="23" name="Text 21"/>
+          <p:cNvPr id="29" name="Text 27"/>
           <p:cNvSpPr/>
           <p:nvPr/>
         </p:nvSpPr>
@@ -20787,7 +21169,7 @@
       </p:sp>
       <p:sp>
         <p:nvSpPr>
-          <p:cNvPr id="24" name="Shape 22"/>
+          <p:cNvPr id="30" name="Shape 28"/>
           <p:cNvSpPr/>
           <p:nvPr/>
         </p:nvSpPr>
@@ -20814,14 +21196,14 @@
       </p:sp>
       <p:sp>
         <p:nvSpPr>
-          <p:cNvPr id="25" name="Shape 23"/>
-          <p:cNvSpPr/>
-          <p:nvPr/>
-        </p:nvSpPr>
-        <p:spPr>
-          <a:xfrm>
-            <a:off x="2313432" y="3364992"/>
-            <a:ext cx="1645920" cy="475488"/>
+          <p:cNvPr id="31" name="Shape 29"/>
+          <p:cNvSpPr/>
+          <p:nvPr/>
+        </p:nvSpPr>
+        <p:spPr>
+          <a:xfrm>
+            <a:off x="1978152" y="3364992"/>
+            <a:ext cx="1225296" cy="475488"/>
           </a:xfrm>
           <a:prstGeom prst="rect">
             <a:avLst>
@@ -20841,14 +21223,14 @@
       </p:sp>
       <p:sp>
         <p:nvSpPr>
-          <p:cNvPr id="26" name="Text 24"/>
-          <p:cNvSpPr/>
-          <p:nvPr/>
-        </p:nvSpPr>
-        <p:spPr>
-          <a:xfrm>
-            <a:off x="2313432" y="3364992"/>
-            <a:ext cx="1645920" cy="475488"/>
+          <p:cNvPr id="32" name="Text 30"/>
+          <p:cNvSpPr/>
+          <p:nvPr/>
+        </p:nvSpPr>
+        <p:spPr>
+          <a:xfrm>
+            <a:off x="1978152" y="3364992"/>
+            <a:ext cx="1225296" cy="475488"/>
           </a:xfrm>
           <a:prstGeom prst="rect">
             <a:avLst/>
@@ -20880,14 +21262,14 @@
       </p:sp>
       <p:sp>
         <p:nvSpPr>
-          <p:cNvPr id="27" name="Text 25"/>
-          <p:cNvSpPr/>
-          <p:nvPr/>
-        </p:nvSpPr>
-        <p:spPr>
-          <a:xfrm>
-            <a:off x="3959352" y="3364992"/>
-            <a:ext cx="411480" cy="475488"/>
+          <p:cNvPr id="33" name="Text 31"/>
+          <p:cNvSpPr/>
+          <p:nvPr/>
+        </p:nvSpPr>
+        <p:spPr>
+          <a:xfrm>
+            <a:off x="3203448" y="3364992"/>
+            <a:ext cx="76200" cy="475488"/>
           </a:xfrm>
           <a:prstGeom prst="rect">
             <a:avLst/>
@@ -20919,14 +21301,14 @@
       </p:sp>
       <p:sp>
         <p:nvSpPr>
-          <p:cNvPr id="28" name="Shape 26"/>
-          <p:cNvSpPr/>
-          <p:nvPr/>
-        </p:nvSpPr>
-        <p:spPr>
-          <a:xfrm>
-            <a:off x="4370832" y="3364992"/>
-            <a:ext cx="1645920" cy="475488"/>
+          <p:cNvPr id="34" name="Shape 32"/>
+          <p:cNvSpPr/>
+          <p:nvPr/>
+        </p:nvSpPr>
+        <p:spPr>
+          <a:xfrm>
+            <a:off x="3279648" y="3364992"/>
+            <a:ext cx="1225296" cy="475488"/>
           </a:xfrm>
           <a:prstGeom prst="rect">
             <a:avLst>
@@ -20946,14 +21328,14 @@
       </p:sp>
       <p:sp>
         <p:nvSpPr>
-          <p:cNvPr id="29" name="Text 27"/>
-          <p:cNvSpPr/>
-          <p:nvPr/>
-        </p:nvSpPr>
-        <p:spPr>
-          <a:xfrm>
-            <a:off x="4370832" y="3364992"/>
-            <a:ext cx="1645920" cy="475488"/>
+          <p:cNvPr id="35" name="Text 33"/>
+          <p:cNvSpPr/>
+          <p:nvPr/>
+        </p:nvSpPr>
+        <p:spPr>
+          <a:xfrm>
+            <a:off x="3279648" y="3364992"/>
+            <a:ext cx="1225296" cy="475488"/>
           </a:xfrm>
           <a:prstGeom prst="rect">
             <a:avLst/>
@@ -20977,7 +21359,7 @@
                 <a:ea typeface="Trebuchet MS" pitchFamily="34" charset="-122"/>
                 <a:cs typeface="Trebuchet MS" pitchFamily="34" charset="-120"/>
               </a:rPr>
-              <a:t>vest</a:t>
+              <a:t>ves</a:t>
             </a:r>
             <a:endParaRPr lang="en-US" sz="1400" dirty="0"/>
           </a:p>
@@ -20985,14 +21367,14 @@
       </p:sp>
       <p:sp>
         <p:nvSpPr>
-          <p:cNvPr id="30" name="Text 28"/>
-          <p:cNvSpPr/>
-          <p:nvPr/>
-        </p:nvSpPr>
-        <p:spPr>
-          <a:xfrm>
-            <a:off x="6016752" y="3364992"/>
-            <a:ext cx="411480" cy="475488"/>
+          <p:cNvPr id="36" name="Text 34"/>
+          <p:cNvSpPr/>
+          <p:nvPr/>
+        </p:nvSpPr>
+        <p:spPr>
+          <a:xfrm>
+            <a:off x="4504944" y="3364992"/>
+            <a:ext cx="76200" cy="475488"/>
           </a:xfrm>
           <a:prstGeom prst="rect">
             <a:avLst/>
@@ -21024,14 +21406,14 @@
       </p:sp>
       <p:sp>
         <p:nvSpPr>
-          <p:cNvPr id="31" name="Shape 29"/>
-          <p:cNvSpPr/>
-          <p:nvPr/>
-        </p:nvSpPr>
-        <p:spPr>
-          <a:xfrm>
-            <a:off x="6428232" y="3364992"/>
-            <a:ext cx="1645920" cy="475488"/>
+          <p:cNvPr id="37" name="Shape 35"/>
+          <p:cNvSpPr/>
+          <p:nvPr/>
+        </p:nvSpPr>
+        <p:spPr>
+          <a:xfrm>
+            <a:off x="4581144" y="3364992"/>
+            <a:ext cx="1225296" cy="475488"/>
           </a:xfrm>
           <a:prstGeom prst="rect">
             <a:avLst>
@@ -21051,14 +21433,14 @@
       </p:sp>
       <p:sp>
         <p:nvSpPr>
-          <p:cNvPr id="32" name="Text 30"/>
-          <p:cNvSpPr/>
-          <p:nvPr/>
-        </p:nvSpPr>
-        <p:spPr>
-          <a:xfrm>
-            <a:off x="6428232" y="3364992"/>
-            <a:ext cx="1645920" cy="475488"/>
+          <p:cNvPr id="38" name="Text 36"/>
+          <p:cNvSpPr/>
+          <p:nvPr/>
+        </p:nvSpPr>
+        <p:spPr>
+          <a:xfrm>
+            <a:off x="4581144" y="3364992"/>
+            <a:ext cx="1225296" cy="475488"/>
           </a:xfrm>
           <a:prstGeom prst="rect">
             <a:avLst/>
@@ -21082,7 +21464,7 @@
                 <a:ea typeface="Trebuchet MS" pitchFamily="34" charset="-122"/>
                 <a:cs typeface="Trebuchet MS" pitchFamily="34" charset="-120"/>
               </a:rPr>
-              <a:t>or</a:t>
+              <a:t>ti</a:t>
             </a:r>
             <a:endParaRPr lang="en-US" sz="1400" dirty="0"/>
           </a:p>
@@ -21090,7 +21472,217 @@
       </p:sp>
       <p:sp>
         <p:nvSpPr>
-          <p:cNvPr id="33" name="Shape 31"/>
+          <p:cNvPr id="39" name="Text 37"/>
+          <p:cNvSpPr/>
+          <p:nvPr/>
+        </p:nvSpPr>
+        <p:spPr>
+          <a:xfrm>
+            <a:off x="5806440" y="3364992"/>
+            <a:ext cx="76200" cy="475488"/>
+          </a:xfrm>
+          <a:prstGeom prst="rect">
+            <a:avLst/>
+          </a:prstGeom>
+          <a:noFill/>
+          <a:ln/>
+        </p:spPr>
+        <p:txBody>
+          <a:bodyPr wrap="square" lIns="0" tIns="0" rIns="0" bIns="0" rtlCol="0" anchor="ctr"/>
+          <a:lstStyle/>
+          <a:p>
+            <a:pPr algn="ctr" indent="0" marL="0">
+              <a:buNone/>
+            </a:pPr>
+            <a:r>
+              <a:rPr lang="en-US" sz="1600" b="1" dirty="0">
+                <a:solidFill>
+                  <a:srgbClr val="0D9488"/>
+                </a:solidFill>
+                <a:latin typeface="Trebuchet MS" pitchFamily="34" charset="0"/>
+                <a:ea typeface="Trebuchet MS" pitchFamily="34" charset="-122"/>
+                <a:cs typeface="Trebuchet MS" pitchFamily="34" charset="-120"/>
+              </a:rPr>
+              <a:t>·</a:t>
+            </a:r>
+            <a:endParaRPr lang="en-US" sz="1600" dirty="0"/>
+          </a:p>
+        </p:txBody>
+      </p:sp>
+      <p:sp>
+        <p:nvSpPr>
+          <p:cNvPr id="40" name="Shape 38"/>
+          <p:cNvSpPr/>
+          <p:nvPr/>
+        </p:nvSpPr>
+        <p:spPr>
+          <a:xfrm>
+            <a:off x="5882640" y="3364992"/>
+            <a:ext cx="1225296" cy="475488"/>
+          </a:xfrm>
+          <a:prstGeom prst="rect">
+            <a:avLst>
+              <a:gd name="adj" fmla="val 9615"/>
+            </a:avLst>
+          </a:prstGeom>
+          <a:solidFill>
+            <a:srgbClr val="FFFFFF"/>
+          </a:solidFill>
+          <a:ln w="12700">
+            <a:solidFill>
+              <a:srgbClr val="0D9488"/>
+            </a:solidFill>
+            <a:prstDash val="solid"/>
+          </a:ln>
+        </p:spPr>
+      </p:sp>
+      <p:sp>
+        <p:nvSpPr>
+          <p:cNvPr id="41" name="Text 39"/>
+          <p:cNvSpPr/>
+          <p:nvPr/>
+        </p:nvSpPr>
+        <p:spPr>
+          <a:xfrm>
+            <a:off x="5882640" y="3364992"/>
+            <a:ext cx="1225296" cy="475488"/>
+          </a:xfrm>
+          <a:prstGeom prst="rect">
+            <a:avLst/>
+          </a:prstGeom>
+          <a:noFill/>
+          <a:ln/>
+        </p:spPr>
+        <p:txBody>
+          <a:bodyPr wrap="square" lIns="0" tIns="0" rIns="0" bIns="0" rtlCol="0" anchor="ctr"/>
+          <a:lstStyle/>
+          <a:p>
+            <a:pPr algn="ctr" indent="0" marL="0">
+              <a:buNone/>
+            </a:pPr>
+            <a:r>
+              <a:rPr lang="en-US" sz="1400" b="1" dirty="0">
+                <a:solidFill>
+                  <a:srgbClr val="0D9488"/>
+                </a:solidFill>
+                <a:latin typeface="Trebuchet MS" pitchFamily="34" charset="0"/>
+                <a:ea typeface="Trebuchet MS" pitchFamily="34" charset="-122"/>
+                <a:cs typeface="Trebuchet MS" pitchFamily="34" charset="-120"/>
+              </a:rPr>
+              <a:t>ga</a:t>
+            </a:r>
+            <a:endParaRPr lang="en-US" sz="1400" dirty="0"/>
+          </a:p>
+        </p:txBody>
+      </p:sp>
+      <p:sp>
+        <p:nvSpPr>
+          <p:cNvPr id="42" name="Text 40"/>
+          <p:cNvSpPr/>
+          <p:nvPr/>
+        </p:nvSpPr>
+        <p:spPr>
+          <a:xfrm>
+            <a:off x="7107936" y="3364992"/>
+            <a:ext cx="76200" cy="475488"/>
+          </a:xfrm>
+          <a:prstGeom prst="rect">
+            <a:avLst/>
+          </a:prstGeom>
+          <a:noFill/>
+          <a:ln/>
+        </p:spPr>
+        <p:txBody>
+          <a:bodyPr wrap="square" lIns="0" tIns="0" rIns="0" bIns="0" rtlCol="0" anchor="ctr"/>
+          <a:lstStyle/>
+          <a:p>
+            <a:pPr algn="ctr" indent="0" marL="0">
+              <a:buNone/>
+            </a:pPr>
+            <a:r>
+              <a:rPr lang="en-US" sz="1600" b="1" dirty="0">
+                <a:solidFill>
+                  <a:srgbClr val="0D9488"/>
+                </a:solidFill>
+                <a:latin typeface="Trebuchet MS" pitchFamily="34" charset="0"/>
+                <a:ea typeface="Trebuchet MS" pitchFamily="34" charset="-122"/>
+                <a:cs typeface="Trebuchet MS" pitchFamily="34" charset="-120"/>
+              </a:rPr>
+              <a:t>·</a:t>
+            </a:r>
+            <a:endParaRPr lang="en-US" sz="1600" dirty="0"/>
+          </a:p>
+        </p:txBody>
+      </p:sp>
+      <p:sp>
+        <p:nvSpPr>
+          <p:cNvPr id="43" name="Shape 41"/>
+          <p:cNvSpPr/>
+          <p:nvPr/>
+        </p:nvSpPr>
+        <p:spPr>
+          <a:xfrm>
+            <a:off x="7184136" y="3364992"/>
+            <a:ext cx="1225296" cy="475488"/>
+          </a:xfrm>
+          <a:prstGeom prst="rect">
+            <a:avLst>
+              <a:gd name="adj" fmla="val 9615"/>
+            </a:avLst>
+          </a:prstGeom>
+          <a:solidFill>
+            <a:srgbClr val="FFFFFF"/>
+          </a:solidFill>
+          <a:ln w="12700">
+            <a:solidFill>
+              <a:srgbClr val="0D9488"/>
+            </a:solidFill>
+            <a:prstDash val="solid"/>
+          </a:ln>
+        </p:spPr>
+      </p:sp>
+      <p:sp>
+        <p:nvSpPr>
+          <p:cNvPr id="44" name="Text 42"/>
+          <p:cNvSpPr/>
+          <p:nvPr/>
+        </p:nvSpPr>
+        <p:spPr>
+          <a:xfrm>
+            <a:off x="7184136" y="3364992"/>
+            <a:ext cx="1225296" cy="475488"/>
+          </a:xfrm>
+          <a:prstGeom prst="rect">
+            <a:avLst/>
+          </a:prstGeom>
+          <a:noFill/>
+          <a:ln/>
+        </p:spPr>
+        <p:txBody>
+          <a:bodyPr wrap="square" lIns="0" tIns="0" rIns="0" bIns="0" rtlCol="0" anchor="ctr"/>
+          <a:lstStyle/>
+          <a:p>
+            <a:pPr algn="ctr" indent="0" marL="0">
+              <a:buNone/>
+            </a:pPr>
+            <a:r>
+              <a:rPr lang="en-US" sz="1400" b="1" dirty="0">
+                <a:solidFill>
+                  <a:srgbClr val="0D9488"/>
+                </a:solidFill>
+                <a:latin typeface="Trebuchet MS" pitchFamily="34" charset="0"/>
+                <a:ea typeface="Trebuchet MS" pitchFamily="34" charset="-122"/>
+                <a:cs typeface="Trebuchet MS" pitchFamily="34" charset="-120"/>
+              </a:rPr>
+              <a:t>tor</a:t>
+            </a:r>
+            <a:endParaRPr lang="en-US" sz="1400" dirty="0"/>
+          </a:p>
+        </p:txBody>
+      </p:sp>
+      <p:sp>
+        <p:nvSpPr>
+          <p:cNvPr id="45" name="Shape 43"/>
           <p:cNvSpPr/>
           <p:nvPr/>
         </p:nvSpPr>
@@ -21117,7 +21709,7 @@
       </p:sp>
       <p:sp>
         <p:nvSpPr>
-          <p:cNvPr id="34" name="Text 32"/>
+          <p:cNvPr id="46" name="Text 44"/>
           <p:cNvSpPr/>
           <p:nvPr/>
         </p:nvSpPr>
@@ -21156,7 +21748,7 @@
       </p:sp>
       <p:sp>
         <p:nvSpPr>
-          <p:cNvPr id="35" name="Shape 33"/>
+          <p:cNvPr id="47" name="Shape 45"/>
           <p:cNvSpPr/>
           <p:nvPr/>
         </p:nvSpPr>
@@ -21183,7 +21775,7 @@
       </p:sp>
       <p:sp>
         <p:nvSpPr>
-          <p:cNvPr id="36" name="Text 34"/>
+          <p:cNvPr id="48" name="Text 46"/>
           <p:cNvSpPr/>
           <p:nvPr/>
         </p:nvSpPr>
@@ -21645,7 +22237,7 @@
                 <a:ea typeface="Trebuchet MS" pitchFamily="34" charset="-122"/>
                 <a:cs typeface="Trebuchet MS" pitchFamily="34" charset="-120"/>
               </a:rPr>
-              <a:t>investor</a:t>
+              <a:t>investigator</a:t>
             </a:r>
             <a:endParaRPr lang="en-US" sz="2800" dirty="0"/>
           </a:p>
@@ -21725,8 +22317,8 @@
         </p:nvSpPr>
         <p:spPr>
           <a:xfrm>
-            <a:off x="2938272" y="2258568"/>
-            <a:ext cx="1828800" cy="292608"/>
+            <a:off x="1989734" y="2258568"/>
+            <a:ext cx="1581912" cy="292608"/>
           </a:xfrm>
           <a:prstGeom prst="rect">
             <a:avLst>
@@ -21759,8 +22351,8 @@
         </p:nvSpPr>
         <p:spPr>
           <a:xfrm>
-            <a:off x="2938272" y="2258568"/>
-            <a:ext cx="1828800" cy="292608"/>
+            <a:off x="1989734" y="2258568"/>
+            <a:ext cx="1581912" cy="292608"/>
           </a:xfrm>
           <a:prstGeom prst="rect">
             <a:avLst/>
@@ -21798,8 +22390,8 @@
         </p:nvSpPr>
         <p:spPr>
           <a:xfrm>
-            <a:off x="2938272" y="2569464"/>
-            <a:ext cx="1828800" cy="201168"/>
+            <a:off x="1989734" y="2569464"/>
+            <a:ext cx="1581912" cy="201168"/>
           </a:xfrm>
           <a:prstGeom prst="rect">
             <a:avLst/>
@@ -21823,7 +22415,7 @@
                 <a:ea typeface="Calibri" pitchFamily="34" charset="-122"/>
                 <a:cs typeface="Calibri" pitchFamily="34" charset="-120"/>
               </a:rPr>
-              <a:t>to put in / to clothe</a:t>
+              <a:t>to put effort in / look into</a:t>
             </a:r>
             <a:endParaRPr lang="en-US" sz="850" dirty="0"/>
           </a:p>
@@ -21837,8 +22429,8 @@
         </p:nvSpPr>
         <p:spPr>
           <a:xfrm>
-            <a:off x="5803392" y="2258568"/>
-            <a:ext cx="1828800" cy="292608"/>
+            <a:off x="3659429" y="2258568"/>
+            <a:ext cx="1581912" cy="292608"/>
           </a:xfrm>
           <a:prstGeom prst="rect">
             <a:avLst>
@@ -21871,8 +22463,8 @@
         </p:nvSpPr>
         <p:spPr>
           <a:xfrm>
-            <a:off x="5803392" y="2258568"/>
-            <a:ext cx="1828800" cy="292608"/>
+            <a:off x="3659429" y="2258568"/>
+            <a:ext cx="1581912" cy="292608"/>
           </a:xfrm>
           <a:prstGeom prst="rect">
             <a:avLst/>
@@ -21896,7 +22488,7 @@
                 <a:ea typeface="Trebuchet MS" pitchFamily="34" charset="-122"/>
                 <a:cs typeface="Trebuchet MS" pitchFamily="34" charset="-120"/>
               </a:rPr>
-              <a:t>or</a:t>
+              <a:t>ig</a:t>
             </a:r>
             <a:endParaRPr lang="en-US" sz="1300" dirty="0"/>
           </a:p>
@@ -21910,8 +22502,8 @@
         </p:nvSpPr>
         <p:spPr>
           <a:xfrm>
-            <a:off x="5803392" y="2569464"/>
-            <a:ext cx="1828800" cy="201168"/>
+            <a:off x="3659429" y="2569464"/>
+            <a:ext cx="1581912" cy="201168"/>
           </a:xfrm>
           <a:prstGeom prst="rect">
             <a:avLst/>
@@ -21935,6 +22527,230 @@
                 <a:ea typeface="Calibri" pitchFamily="34" charset="-122"/>
                 <a:cs typeface="Calibri" pitchFamily="34" charset="-120"/>
               </a:rPr>
+              <a:t>connecting element</a:t>
+            </a:r>
+            <a:endParaRPr lang="en-US" sz="850" dirty="0"/>
+          </a:p>
+        </p:txBody>
+      </p:sp>
+      <p:sp>
+        <p:nvSpPr>
+          <p:cNvPr id="22" name="Shape 20"/>
+          <p:cNvSpPr/>
+          <p:nvPr/>
+        </p:nvSpPr>
+        <p:spPr>
+          <a:xfrm>
+            <a:off x="5329123" y="2258568"/>
+            <a:ext cx="1581912" cy="292608"/>
+          </a:xfrm>
+          <a:prstGeom prst="rect">
+            <a:avLst>
+              <a:gd name="adj" fmla="val 25000"/>
+            </a:avLst>
+          </a:prstGeom>
+          <a:solidFill>
+            <a:srgbClr val="FCE7F3"/>
+          </a:solidFill>
+          <a:ln w="19050">
+            <a:solidFill>
+              <a:srgbClr val="DB2777"/>
+            </a:solidFill>
+            <a:prstDash val="solid"/>
+          </a:ln>
+          <a:effectLst>
+            <a:outerShdw sx="100000" sy="100000" kx="0" ky="0" algn="bl" rotWithShape="0" blurRad="101600" dist="38100" dir="8100000">
+              <a:srgbClr val="000000">
+                <a:alpha val="12000"/>
+              </a:srgbClr>
+            </a:outerShdw>
+          </a:effectLst>
+        </p:spPr>
+      </p:sp>
+      <p:sp>
+        <p:nvSpPr>
+          <p:cNvPr id="23" name="Text 21"/>
+          <p:cNvSpPr/>
+          <p:nvPr/>
+        </p:nvSpPr>
+        <p:spPr>
+          <a:xfrm>
+            <a:off x="5329123" y="2258568"/>
+            <a:ext cx="1581912" cy="292608"/>
+          </a:xfrm>
+          <a:prstGeom prst="rect">
+            <a:avLst/>
+          </a:prstGeom>
+          <a:noFill/>
+          <a:ln/>
+        </p:spPr>
+        <p:txBody>
+          <a:bodyPr wrap="square" lIns="0" tIns="0" rIns="0" bIns="0" rtlCol="0" anchor="ctr"/>
+          <a:lstStyle/>
+          <a:p>
+            <a:pPr algn="ctr" indent="0" marL="0">
+              <a:buNone/>
+            </a:pPr>
+            <a:r>
+              <a:rPr lang="en-US" sz="1300" b="1" dirty="0">
+                <a:solidFill>
+                  <a:srgbClr val="9D174D"/>
+                </a:solidFill>
+                <a:latin typeface="Trebuchet MS" pitchFamily="34" charset="0"/>
+                <a:ea typeface="Trebuchet MS" pitchFamily="34" charset="-122"/>
+                <a:cs typeface="Trebuchet MS" pitchFamily="34" charset="-120"/>
+              </a:rPr>
+              <a:t>at</a:t>
+            </a:r>
+            <a:endParaRPr lang="en-US" sz="1300" dirty="0"/>
+          </a:p>
+        </p:txBody>
+      </p:sp>
+      <p:sp>
+        <p:nvSpPr>
+          <p:cNvPr id="24" name="Text 22"/>
+          <p:cNvSpPr/>
+          <p:nvPr/>
+        </p:nvSpPr>
+        <p:spPr>
+          <a:xfrm>
+            <a:off x="5329123" y="2569464"/>
+            <a:ext cx="1581912" cy="201168"/>
+          </a:xfrm>
+          <a:prstGeom prst="rect">
+            <a:avLst/>
+          </a:prstGeom>
+          <a:noFill/>
+          <a:ln/>
+        </p:spPr>
+        <p:txBody>
+          <a:bodyPr wrap="square" lIns="0" tIns="0" rIns="0" bIns="0" rtlCol="0" anchor="t"/>
+          <a:lstStyle/>
+          <a:p>
+            <a:pPr algn="ctr" indent="0" marL="0">
+              <a:buNone/>
+            </a:pPr>
+            <a:r>
+              <a:rPr lang="en-US" sz="850" dirty="0">
+                <a:solidFill>
+                  <a:srgbClr val="475569"/>
+                </a:solidFill>
+                <a:latin typeface="Calibri" pitchFamily="34" charset="0"/>
+                <a:ea typeface="Calibri" pitchFamily="34" charset="-122"/>
+                <a:cs typeface="Calibri" pitchFamily="34" charset="-120"/>
+              </a:rPr>
+              <a:t>to do</a:t>
+            </a:r>
+            <a:endParaRPr lang="en-US" sz="850" dirty="0"/>
+          </a:p>
+        </p:txBody>
+      </p:sp>
+      <p:sp>
+        <p:nvSpPr>
+          <p:cNvPr id="25" name="Shape 23"/>
+          <p:cNvSpPr/>
+          <p:nvPr/>
+        </p:nvSpPr>
+        <p:spPr>
+          <a:xfrm>
+            <a:off x="6998818" y="2258568"/>
+            <a:ext cx="1581912" cy="292608"/>
+          </a:xfrm>
+          <a:prstGeom prst="rect">
+            <a:avLst>
+              <a:gd name="adj" fmla="val 25000"/>
+            </a:avLst>
+          </a:prstGeom>
+          <a:solidFill>
+            <a:srgbClr val="FCE7F3"/>
+          </a:solidFill>
+          <a:ln w="19050">
+            <a:solidFill>
+              <a:srgbClr val="DB2777"/>
+            </a:solidFill>
+            <a:prstDash val="solid"/>
+          </a:ln>
+          <a:effectLst>
+            <a:outerShdw sx="100000" sy="100000" kx="0" ky="0" algn="bl" rotWithShape="0" blurRad="101600" dist="38100" dir="8100000">
+              <a:srgbClr val="000000">
+                <a:alpha val="12000"/>
+              </a:srgbClr>
+            </a:outerShdw>
+          </a:effectLst>
+        </p:spPr>
+      </p:sp>
+      <p:sp>
+        <p:nvSpPr>
+          <p:cNvPr id="26" name="Text 24"/>
+          <p:cNvSpPr/>
+          <p:nvPr/>
+        </p:nvSpPr>
+        <p:spPr>
+          <a:xfrm>
+            <a:off x="6998818" y="2258568"/>
+            <a:ext cx="1581912" cy="292608"/>
+          </a:xfrm>
+          <a:prstGeom prst="rect">
+            <a:avLst/>
+          </a:prstGeom>
+          <a:noFill/>
+          <a:ln/>
+        </p:spPr>
+        <p:txBody>
+          <a:bodyPr wrap="square" lIns="0" tIns="0" rIns="0" bIns="0" rtlCol="0" anchor="ctr"/>
+          <a:lstStyle/>
+          <a:p>
+            <a:pPr algn="ctr" indent="0" marL="0">
+              <a:buNone/>
+            </a:pPr>
+            <a:r>
+              <a:rPr lang="en-US" sz="1300" b="1" dirty="0">
+                <a:solidFill>
+                  <a:srgbClr val="9D174D"/>
+                </a:solidFill>
+                <a:latin typeface="Trebuchet MS" pitchFamily="34" charset="0"/>
+                <a:ea typeface="Trebuchet MS" pitchFamily="34" charset="-122"/>
+                <a:cs typeface="Trebuchet MS" pitchFamily="34" charset="-120"/>
+              </a:rPr>
+              <a:t>or</a:t>
+            </a:r>
+            <a:endParaRPr lang="en-US" sz="1300" dirty="0"/>
+          </a:p>
+        </p:txBody>
+      </p:sp>
+      <p:sp>
+        <p:nvSpPr>
+          <p:cNvPr id="27" name="Text 25"/>
+          <p:cNvSpPr/>
+          <p:nvPr/>
+        </p:nvSpPr>
+        <p:spPr>
+          <a:xfrm>
+            <a:off x="6998818" y="2569464"/>
+            <a:ext cx="1581912" cy="201168"/>
+          </a:xfrm>
+          <a:prstGeom prst="rect">
+            <a:avLst/>
+          </a:prstGeom>
+          <a:noFill/>
+          <a:ln/>
+        </p:spPr>
+        <p:txBody>
+          <a:bodyPr wrap="square" lIns="0" tIns="0" rIns="0" bIns="0" rtlCol="0" anchor="t"/>
+          <a:lstStyle/>
+          <a:p>
+            <a:pPr algn="ctr" indent="0" marL="0">
+              <a:buNone/>
+            </a:pPr>
+            <a:r>
+              <a:rPr lang="en-US" sz="850" dirty="0">
+                <a:solidFill>
+                  <a:srgbClr val="475569"/>
+                </a:solidFill>
+                <a:latin typeface="Calibri" pitchFamily="34" charset="0"/>
+                <a:ea typeface="Calibri" pitchFamily="34" charset="-122"/>
+                <a:cs typeface="Calibri" pitchFamily="34" charset="-120"/>
+              </a:rPr>
               <a:t>person who does something</a:t>
             </a:r>
             <a:endParaRPr lang="en-US" sz="850" dirty="0"/>
@@ -21943,7 +22759,7 @@
       </p:sp>
       <p:sp>
         <p:nvSpPr>
-          <p:cNvPr id="22" name="Shape 20"/>
+          <p:cNvPr id="28" name="Shape 26"/>
           <p:cNvSpPr/>
           <p:nvPr/>
         </p:nvSpPr>
@@ -21970,7 +22786,7 @@
       </p:sp>
       <p:sp>
         <p:nvSpPr>
-          <p:cNvPr id="23" name="Text 21"/>
+          <p:cNvPr id="29" name="Text 27"/>
           <p:cNvSpPr/>
           <p:nvPr/>
         </p:nvSpPr>
@@ -22009,7 +22825,7 @@
       </p:sp>
       <p:sp>
         <p:nvSpPr>
-          <p:cNvPr id="24" name="Shape 22"/>
+          <p:cNvPr id="30" name="Shape 28"/>
           <p:cNvSpPr/>
           <p:nvPr/>
         </p:nvSpPr>
@@ -22036,14 +22852,14 @@
       </p:sp>
       <p:sp>
         <p:nvSpPr>
-          <p:cNvPr id="25" name="Shape 23"/>
-          <p:cNvSpPr/>
-          <p:nvPr/>
-        </p:nvSpPr>
-        <p:spPr>
-          <a:xfrm>
-            <a:off x="2313432" y="3364992"/>
-            <a:ext cx="1645920" cy="475488"/>
+          <p:cNvPr id="31" name="Shape 29"/>
+          <p:cNvSpPr/>
+          <p:nvPr/>
+        </p:nvSpPr>
+        <p:spPr>
+          <a:xfrm>
+            <a:off x="1978152" y="3364992"/>
+            <a:ext cx="1225296" cy="475488"/>
           </a:xfrm>
           <a:prstGeom prst="rect">
             <a:avLst>
@@ -22063,14 +22879,14 @@
       </p:sp>
       <p:sp>
         <p:nvSpPr>
-          <p:cNvPr id="26" name="Text 24"/>
-          <p:cNvSpPr/>
-          <p:nvPr/>
-        </p:nvSpPr>
-        <p:spPr>
-          <a:xfrm>
-            <a:off x="2313432" y="3364992"/>
-            <a:ext cx="1645920" cy="475488"/>
+          <p:cNvPr id="32" name="Text 30"/>
+          <p:cNvSpPr/>
+          <p:nvPr/>
+        </p:nvSpPr>
+        <p:spPr>
+          <a:xfrm>
+            <a:off x="1978152" y="3364992"/>
+            <a:ext cx="1225296" cy="475488"/>
           </a:xfrm>
           <a:prstGeom prst="rect">
             <a:avLst/>
@@ -22102,14 +22918,14 @@
       </p:sp>
       <p:sp>
         <p:nvSpPr>
-          <p:cNvPr id="27" name="Text 25"/>
-          <p:cNvSpPr/>
-          <p:nvPr/>
-        </p:nvSpPr>
-        <p:spPr>
-          <a:xfrm>
-            <a:off x="3959352" y="3364992"/>
-            <a:ext cx="411480" cy="475488"/>
+          <p:cNvPr id="33" name="Text 31"/>
+          <p:cNvSpPr/>
+          <p:nvPr/>
+        </p:nvSpPr>
+        <p:spPr>
+          <a:xfrm>
+            <a:off x="3203448" y="3364992"/>
+            <a:ext cx="76200" cy="475488"/>
           </a:xfrm>
           <a:prstGeom prst="rect">
             <a:avLst/>
@@ -22141,14 +22957,14 @@
       </p:sp>
       <p:sp>
         <p:nvSpPr>
-          <p:cNvPr id="28" name="Shape 26"/>
-          <p:cNvSpPr/>
-          <p:nvPr/>
-        </p:nvSpPr>
-        <p:spPr>
-          <a:xfrm>
-            <a:off x="4370832" y="3364992"/>
-            <a:ext cx="1645920" cy="475488"/>
+          <p:cNvPr id="34" name="Shape 32"/>
+          <p:cNvSpPr/>
+          <p:nvPr/>
+        </p:nvSpPr>
+        <p:spPr>
+          <a:xfrm>
+            <a:off x="3279648" y="3364992"/>
+            <a:ext cx="1225296" cy="475488"/>
           </a:xfrm>
           <a:prstGeom prst="rect">
             <a:avLst>
@@ -22168,14 +22984,14 @@
       </p:sp>
       <p:sp>
         <p:nvSpPr>
-          <p:cNvPr id="29" name="Text 27"/>
-          <p:cNvSpPr/>
-          <p:nvPr/>
-        </p:nvSpPr>
-        <p:spPr>
-          <a:xfrm>
-            <a:off x="4370832" y="3364992"/>
-            <a:ext cx="1645920" cy="475488"/>
+          <p:cNvPr id="35" name="Text 33"/>
+          <p:cNvSpPr/>
+          <p:nvPr/>
+        </p:nvSpPr>
+        <p:spPr>
+          <a:xfrm>
+            <a:off x="3279648" y="3364992"/>
+            <a:ext cx="1225296" cy="475488"/>
           </a:xfrm>
           <a:prstGeom prst="rect">
             <a:avLst/>
@@ -22199,7 +23015,7 @@
                 <a:ea typeface="Trebuchet MS" pitchFamily="34" charset="-122"/>
                 <a:cs typeface="Trebuchet MS" pitchFamily="34" charset="-120"/>
               </a:rPr>
-              <a:t>vest</a:t>
+              <a:t>ves</a:t>
             </a:r>
             <a:endParaRPr lang="en-US" sz="1400" dirty="0"/>
           </a:p>
@@ -22207,14 +23023,14 @@
       </p:sp>
       <p:sp>
         <p:nvSpPr>
-          <p:cNvPr id="30" name="Text 28"/>
-          <p:cNvSpPr/>
-          <p:nvPr/>
-        </p:nvSpPr>
-        <p:spPr>
-          <a:xfrm>
-            <a:off x="6016752" y="3364992"/>
-            <a:ext cx="411480" cy="475488"/>
+          <p:cNvPr id="36" name="Text 34"/>
+          <p:cNvSpPr/>
+          <p:nvPr/>
+        </p:nvSpPr>
+        <p:spPr>
+          <a:xfrm>
+            <a:off x="4504944" y="3364992"/>
+            <a:ext cx="76200" cy="475488"/>
           </a:xfrm>
           <a:prstGeom prst="rect">
             <a:avLst/>
@@ -22246,14 +23062,14 @@
       </p:sp>
       <p:sp>
         <p:nvSpPr>
-          <p:cNvPr id="31" name="Shape 29"/>
-          <p:cNvSpPr/>
-          <p:nvPr/>
-        </p:nvSpPr>
-        <p:spPr>
-          <a:xfrm>
-            <a:off x="6428232" y="3364992"/>
-            <a:ext cx="1645920" cy="475488"/>
+          <p:cNvPr id="37" name="Shape 35"/>
+          <p:cNvSpPr/>
+          <p:nvPr/>
+        </p:nvSpPr>
+        <p:spPr>
+          <a:xfrm>
+            <a:off x="4581144" y="3364992"/>
+            <a:ext cx="1225296" cy="475488"/>
           </a:xfrm>
           <a:prstGeom prst="rect">
             <a:avLst>
@@ -22273,14 +23089,14 @@
       </p:sp>
       <p:sp>
         <p:nvSpPr>
-          <p:cNvPr id="32" name="Text 30"/>
-          <p:cNvSpPr/>
-          <p:nvPr/>
-        </p:nvSpPr>
-        <p:spPr>
-          <a:xfrm>
-            <a:off x="6428232" y="3364992"/>
-            <a:ext cx="1645920" cy="475488"/>
+          <p:cNvPr id="38" name="Text 36"/>
+          <p:cNvSpPr/>
+          <p:nvPr/>
+        </p:nvSpPr>
+        <p:spPr>
+          <a:xfrm>
+            <a:off x="4581144" y="3364992"/>
+            <a:ext cx="1225296" cy="475488"/>
           </a:xfrm>
           <a:prstGeom prst="rect">
             <a:avLst/>
@@ -22304,7 +23120,7 @@
                 <a:ea typeface="Trebuchet MS" pitchFamily="34" charset="-122"/>
                 <a:cs typeface="Trebuchet MS" pitchFamily="34" charset="-120"/>
               </a:rPr>
-              <a:t>or</a:t>
+              <a:t>ti</a:t>
             </a:r>
             <a:endParaRPr lang="en-US" sz="1400" dirty="0"/>
           </a:p>
@@ -22312,7 +23128,217 @@
       </p:sp>
       <p:sp>
         <p:nvSpPr>
-          <p:cNvPr id="33" name="Shape 31"/>
+          <p:cNvPr id="39" name="Text 37"/>
+          <p:cNvSpPr/>
+          <p:nvPr/>
+        </p:nvSpPr>
+        <p:spPr>
+          <a:xfrm>
+            <a:off x="5806440" y="3364992"/>
+            <a:ext cx="76200" cy="475488"/>
+          </a:xfrm>
+          <a:prstGeom prst="rect">
+            <a:avLst/>
+          </a:prstGeom>
+          <a:noFill/>
+          <a:ln/>
+        </p:spPr>
+        <p:txBody>
+          <a:bodyPr wrap="square" lIns="0" tIns="0" rIns="0" bIns="0" rtlCol="0" anchor="ctr"/>
+          <a:lstStyle/>
+          <a:p>
+            <a:pPr algn="ctr" indent="0" marL="0">
+              <a:buNone/>
+            </a:pPr>
+            <a:r>
+              <a:rPr lang="en-US" sz="1600" b="1" dirty="0">
+                <a:solidFill>
+                  <a:srgbClr val="0D9488"/>
+                </a:solidFill>
+                <a:latin typeface="Trebuchet MS" pitchFamily="34" charset="0"/>
+                <a:ea typeface="Trebuchet MS" pitchFamily="34" charset="-122"/>
+                <a:cs typeface="Trebuchet MS" pitchFamily="34" charset="-120"/>
+              </a:rPr>
+              <a:t>·</a:t>
+            </a:r>
+            <a:endParaRPr lang="en-US" sz="1600" dirty="0"/>
+          </a:p>
+        </p:txBody>
+      </p:sp>
+      <p:sp>
+        <p:nvSpPr>
+          <p:cNvPr id="40" name="Shape 38"/>
+          <p:cNvSpPr/>
+          <p:nvPr/>
+        </p:nvSpPr>
+        <p:spPr>
+          <a:xfrm>
+            <a:off x="5882640" y="3364992"/>
+            <a:ext cx="1225296" cy="475488"/>
+          </a:xfrm>
+          <a:prstGeom prst="rect">
+            <a:avLst>
+              <a:gd name="adj" fmla="val 9615"/>
+            </a:avLst>
+          </a:prstGeom>
+          <a:solidFill>
+            <a:srgbClr val="FFFFFF"/>
+          </a:solidFill>
+          <a:ln w="12700">
+            <a:solidFill>
+              <a:srgbClr val="0D9488"/>
+            </a:solidFill>
+            <a:prstDash val="solid"/>
+          </a:ln>
+        </p:spPr>
+      </p:sp>
+      <p:sp>
+        <p:nvSpPr>
+          <p:cNvPr id="41" name="Text 39"/>
+          <p:cNvSpPr/>
+          <p:nvPr/>
+        </p:nvSpPr>
+        <p:spPr>
+          <a:xfrm>
+            <a:off x="5882640" y="3364992"/>
+            <a:ext cx="1225296" cy="475488"/>
+          </a:xfrm>
+          <a:prstGeom prst="rect">
+            <a:avLst/>
+          </a:prstGeom>
+          <a:noFill/>
+          <a:ln/>
+        </p:spPr>
+        <p:txBody>
+          <a:bodyPr wrap="square" lIns="0" tIns="0" rIns="0" bIns="0" rtlCol="0" anchor="ctr"/>
+          <a:lstStyle/>
+          <a:p>
+            <a:pPr algn="ctr" indent="0" marL="0">
+              <a:buNone/>
+            </a:pPr>
+            <a:r>
+              <a:rPr lang="en-US" sz="1400" b="1" dirty="0">
+                <a:solidFill>
+                  <a:srgbClr val="0D9488"/>
+                </a:solidFill>
+                <a:latin typeface="Trebuchet MS" pitchFamily="34" charset="0"/>
+                <a:ea typeface="Trebuchet MS" pitchFamily="34" charset="-122"/>
+                <a:cs typeface="Trebuchet MS" pitchFamily="34" charset="-120"/>
+              </a:rPr>
+              <a:t>ga</a:t>
+            </a:r>
+            <a:endParaRPr lang="en-US" sz="1400" dirty="0"/>
+          </a:p>
+        </p:txBody>
+      </p:sp>
+      <p:sp>
+        <p:nvSpPr>
+          <p:cNvPr id="42" name="Text 40"/>
+          <p:cNvSpPr/>
+          <p:nvPr/>
+        </p:nvSpPr>
+        <p:spPr>
+          <a:xfrm>
+            <a:off x="7107936" y="3364992"/>
+            <a:ext cx="76200" cy="475488"/>
+          </a:xfrm>
+          <a:prstGeom prst="rect">
+            <a:avLst/>
+          </a:prstGeom>
+          <a:noFill/>
+          <a:ln/>
+        </p:spPr>
+        <p:txBody>
+          <a:bodyPr wrap="square" lIns="0" tIns="0" rIns="0" bIns="0" rtlCol="0" anchor="ctr"/>
+          <a:lstStyle/>
+          <a:p>
+            <a:pPr algn="ctr" indent="0" marL="0">
+              <a:buNone/>
+            </a:pPr>
+            <a:r>
+              <a:rPr lang="en-US" sz="1600" b="1" dirty="0">
+                <a:solidFill>
+                  <a:srgbClr val="0D9488"/>
+                </a:solidFill>
+                <a:latin typeface="Trebuchet MS" pitchFamily="34" charset="0"/>
+                <a:ea typeface="Trebuchet MS" pitchFamily="34" charset="-122"/>
+                <a:cs typeface="Trebuchet MS" pitchFamily="34" charset="-120"/>
+              </a:rPr>
+              <a:t>·</a:t>
+            </a:r>
+            <a:endParaRPr lang="en-US" sz="1600" dirty="0"/>
+          </a:p>
+        </p:txBody>
+      </p:sp>
+      <p:sp>
+        <p:nvSpPr>
+          <p:cNvPr id="43" name="Shape 41"/>
+          <p:cNvSpPr/>
+          <p:nvPr/>
+        </p:nvSpPr>
+        <p:spPr>
+          <a:xfrm>
+            <a:off x="7184136" y="3364992"/>
+            <a:ext cx="1225296" cy="475488"/>
+          </a:xfrm>
+          <a:prstGeom prst="rect">
+            <a:avLst>
+              <a:gd name="adj" fmla="val 9615"/>
+            </a:avLst>
+          </a:prstGeom>
+          <a:solidFill>
+            <a:srgbClr val="FFFFFF"/>
+          </a:solidFill>
+          <a:ln w="12700">
+            <a:solidFill>
+              <a:srgbClr val="0D9488"/>
+            </a:solidFill>
+            <a:prstDash val="solid"/>
+          </a:ln>
+        </p:spPr>
+      </p:sp>
+      <p:sp>
+        <p:nvSpPr>
+          <p:cNvPr id="44" name="Text 42"/>
+          <p:cNvSpPr/>
+          <p:nvPr/>
+        </p:nvSpPr>
+        <p:spPr>
+          <a:xfrm>
+            <a:off x="7184136" y="3364992"/>
+            <a:ext cx="1225296" cy="475488"/>
+          </a:xfrm>
+          <a:prstGeom prst="rect">
+            <a:avLst/>
+          </a:prstGeom>
+          <a:noFill/>
+          <a:ln/>
+        </p:spPr>
+        <p:txBody>
+          <a:bodyPr wrap="square" lIns="0" tIns="0" rIns="0" bIns="0" rtlCol="0" anchor="ctr"/>
+          <a:lstStyle/>
+          <a:p>
+            <a:pPr algn="ctr" indent="0" marL="0">
+              <a:buNone/>
+            </a:pPr>
+            <a:r>
+              <a:rPr lang="en-US" sz="1400" b="1" dirty="0">
+                <a:solidFill>
+                  <a:srgbClr val="0D9488"/>
+                </a:solidFill>
+                <a:latin typeface="Trebuchet MS" pitchFamily="34" charset="0"/>
+                <a:ea typeface="Trebuchet MS" pitchFamily="34" charset="-122"/>
+                <a:cs typeface="Trebuchet MS" pitchFamily="34" charset="-120"/>
+              </a:rPr>
+              <a:t>tor</a:t>
+            </a:r>
+            <a:endParaRPr lang="en-US" sz="1400" dirty="0"/>
+          </a:p>
+        </p:txBody>
+      </p:sp>
+      <p:sp>
+        <p:nvSpPr>
+          <p:cNvPr id="45" name="Shape 43"/>
           <p:cNvSpPr/>
           <p:nvPr/>
         </p:nvSpPr>
@@ -22339,7 +23365,7 @@
       </p:sp>
       <p:sp>
         <p:nvSpPr>
-          <p:cNvPr id="34" name="Text 32"/>
+          <p:cNvPr id="46" name="Text 44"/>
           <p:cNvSpPr/>
           <p:nvPr/>
         </p:nvSpPr>
@@ -22378,7 +23404,7 @@
       </p:sp>
       <p:sp>
         <p:nvSpPr>
-          <p:cNvPr id="35" name="Shape 33"/>
+          <p:cNvPr id="47" name="Shape 45"/>
           <p:cNvSpPr/>
           <p:nvPr/>
         </p:nvSpPr>
@@ -22405,14 +23431,14 @@
       </p:sp>
       <p:sp>
         <p:nvSpPr>
-          <p:cNvPr id="36" name="Shape 34"/>
-          <p:cNvSpPr/>
-          <p:nvPr/>
-        </p:nvSpPr>
-        <p:spPr>
-          <a:xfrm>
-            <a:off x="2124837" y="4169664"/>
-            <a:ext cx="685800" cy="475488"/>
+          <p:cNvPr id="48" name="Shape 46"/>
+          <p:cNvSpPr/>
+          <p:nvPr/>
+        </p:nvSpPr>
+        <p:spPr>
+          <a:xfrm>
+            <a:off x="1952244" y="4169664"/>
+            <a:ext cx="543652" cy="475488"/>
           </a:xfrm>
           <a:prstGeom prst="rect">
             <a:avLst>
@@ -22432,14 +23458,14 @@
       </p:sp>
       <p:sp>
         <p:nvSpPr>
-          <p:cNvPr id="37" name="Text 35"/>
-          <p:cNvSpPr/>
-          <p:nvPr/>
-        </p:nvSpPr>
-        <p:spPr>
-          <a:xfrm>
-            <a:off x="2124837" y="4169664"/>
-            <a:ext cx="685800" cy="475488"/>
+          <p:cNvPr id="49" name="Text 47"/>
+          <p:cNvSpPr/>
+          <p:nvPr/>
+        </p:nvSpPr>
+        <p:spPr>
+          <a:xfrm>
+            <a:off x="1952244" y="4169664"/>
+            <a:ext cx="543652" cy="475488"/>
           </a:xfrm>
           <a:prstGeom prst="rect">
             <a:avLst/>
@@ -22471,14 +23497,14 @@
       </p:sp>
       <p:sp>
         <p:nvSpPr>
-          <p:cNvPr id="38" name="Shape 36"/>
-          <p:cNvSpPr/>
-          <p:nvPr/>
-        </p:nvSpPr>
-        <p:spPr>
-          <a:xfrm>
-            <a:off x="3033522" y="4169664"/>
-            <a:ext cx="685800" cy="475488"/>
+          <p:cNvPr id="50" name="Shape 48"/>
+          <p:cNvSpPr/>
+          <p:nvPr/>
+        </p:nvSpPr>
+        <p:spPr>
+          <a:xfrm>
+            <a:off x="2546188" y="4169664"/>
+            <a:ext cx="543652" cy="475488"/>
           </a:xfrm>
           <a:prstGeom prst="rect">
             <a:avLst>
@@ -22498,14 +23524,14 @@
       </p:sp>
       <p:sp>
         <p:nvSpPr>
-          <p:cNvPr id="39" name="Text 37"/>
-          <p:cNvSpPr/>
-          <p:nvPr/>
-        </p:nvSpPr>
-        <p:spPr>
-          <a:xfrm>
-            <a:off x="3033522" y="4169664"/>
-            <a:ext cx="685800" cy="475488"/>
+          <p:cNvPr id="51" name="Text 49"/>
+          <p:cNvSpPr/>
+          <p:nvPr/>
+        </p:nvSpPr>
+        <p:spPr>
+          <a:xfrm>
+            <a:off x="2546188" y="4169664"/>
+            <a:ext cx="543652" cy="475488"/>
           </a:xfrm>
           <a:prstGeom prst="rect">
             <a:avLst/>
@@ -22537,14 +23563,14 @@
       </p:sp>
       <p:sp>
         <p:nvSpPr>
-          <p:cNvPr id="40" name="Shape 38"/>
-          <p:cNvSpPr/>
-          <p:nvPr/>
-        </p:nvSpPr>
-        <p:spPr>
-          <a:xfrm>
-            <a:off x="3942207" y="4169664"/>
-            <a:ext cx="685800" cy="475488"/>
+          <p:cNvPr id="52" name="Shape 50"/>
+          <p:cNvSpPr/>
+          <p:nvPr/>
+        </p:nvSpPr>
+        <p:spPr>
+          <a:xfrm>
+            <a:off x="3140133" y="4169664"/>
+            <a:ext cx="543652" cy="475488"/>
           </a:xfrm>
           <a:prstGeom prst="rect">
             <a:avLst>
@@ -22564,14 +23590,14 @@
       </p:sp>
       <p:sp>
         <p:nvSpPr>
-          <p:cNvPr id="41" name="Text 39"/>
-          <p:cNvSpPr/>
-          <p:nvPr/>
-        </p:nvSpPr>
-        <p:spPr>
-          <a:xfrm>
-            <a:off x="3942207" y="4169664"/>
-            <a:ext cx="685800" cy="475488"/>
+          <p:cNvPr id="53" name="Text 51"/>
+          <p:cNvSpPr/>
+          <p:nvPr/>
+        </p:nvSpPr>
+        <p:spPr>
+          <a:xfrm>
+            <a:off x="3140133" y="4169664"/>
+            <a:ext cx="543652" cy="475488"/>
           </a:xfrm>
           <a:prstGeom prst="rect">
             <a:avLst/>
@@ -22603,14 +23629,14 @@
       </p:sp>
       <p:sp>
         <p:nvSpPr>
-          <p:cNvPr id="42" name="Shape 40"/>
-          <p:cNvSpPr/>
-          <p:nvPr/>
-        </p:nvSpPr>
-        <p:spPr>
-          <a:xfrm>
-            <a:off x="4850892" y="4169664"/>
-            <a:ext cx="685800" cy="475488"/>
+          <p:cNvPr id="54" name="Shape 52"/>
+          <p:cNvSpPr/>
+          <p:nvPr/>
+        </p:nvSpPr>
+        <p:spPr>
+          <a:xfrm>
+            <a:off x="3734077" y="4169664"/>
+            <a:ext cx="543652" cy="475488"/>
           </a:xfrm>
           <a:prstGeom prst="rect">
             <a:avLst>
@@ -22630,14 +23656,14 @@
       </p:sp>
       <p:sp>
         <p:nvSpPr>
-          <p:cNvPr id="43" name="Text 41"/>
-          <p:cNvSpPr/>
-          <p:nvPr/>
-        </p:nvSpPr>
-        <p:spPr>
-          <a:xfrm>
-            <a:off x="4850892" y="4169664"/>
-            <a:ext cx="685800" cy="475488"/>
+          <p:cNvPr id="55" name="Text 53"/>
+          <p:cNvSpPr/>
+          <p:nvPr/>
+        </p:nvSpPr>
+        <p:spPr>
+          <a:xfrm>
+            <a:off x="3734077" y="4169664"/>
+            <a:ext cx="543652" cy="475488"/>
           </a:xfrm>
           <a:prstGeom prst="rect">
             <a:avLst/>
@@ -22669,14 +23695,14 @@
       </p:sp>
       <p:sp>
         <p:nvSpPr>
-          <p:cNvPr id="44" name="Shape 42"/>
-          <p:cNvSpPr/>
-          <p:nvPr/>
-        </p:nvSpPr>
-        <p:spPr>
-          <a:xfrm>
-            <a:off x="5759577" y="4169664"/>
-            <a:ext cx="685800" cy="475488"/>
+          <p:cNvPr id="56" name="Shape 54"/>
+          <p:cNvSpPr/>
+          <p:nvPr/>
+        </p:nvSpPr>
+        <p:spPr>
+          <a:xfrm>
+            <a:off x="4328021" y="4169664"/>
+            <a:ext cx="543652" cy="475488"/>
           </a:xfrm>
           <a:prstGeom prst="rect">
             <a:avLst>
@@ -22696,14 +23722,14 @@
       </p:sp>
       <p:sp>
         <p:nvSpPr>
-          <p:cNvPr id="45" name="Text 43"/>
-          <p:cNvSpPr/>
-          <p:nvPr/>
-        </p:nvSpPr>
-        <p:spPr>
-          <a:xfrm>
-            <a:off x="5759577" y="4169664"/>
-            <a:ext cx="685800" cy="475488"/>
+          <p:cNvPr id="57" name="Text 55"/>
+          <p:cNvSpPr/>
+          <p:nvPr/>
+        </p:nvSpPr>
+        <p:spPr>
+          <a:xfrm>
+            <a:off x="4328021" y="4169664"/>
+            <a:ext cx="543652" cy="475488"/>
           </a:xfrm>
           <a:prstGeom prst="rect">
             <a:avLst/>
@@ -22735,14 +23761,14 @@
       </p:sp>
       <p:sp>
         <p:nvSpPr>
-          <p:cNvPr id="46" name="Shape 44"/>
-          <p:cNvSpPr/>
-          <p:nvPr/>
-        </p:nvSpPr>
-        <p:spPr>
-          <a:xfrm>
-            <a:off x="6668262" y="4169664"/>
-            <a:ext cx="685800" cy="475488"/>
+          <p:cNvPr id="58" name="Shape 56"/>
+          <p:cNvSpPr/>
+          <p:nvPr/>
+        </p:nvSpPr>
+        <p:spPr>
+          <a:xfrm>
+            <a:off x="4921966" y="4169664"/>
+            <a:ext cx="543652" cy="475488"/>
           </a:xfrm>
           <a:prstGeom prst="rect">
             <a:avLst>
@@ -22762,14 +23788,14 @@
       </p:sp>
       <p:sp>
         <p:nvSpPr>
-          <p:cNvPr id="47" name="Text 45"/>
-          <p:cNvSpPr/>
-          <p:nvPr/>
-        </p:nvSpPr>
-        <p:spPr>
-          <a:xfrm>
-            <a:off x="6668262" y="4169664"/>
-            <a:ext cx="685800" cy="475488"/>
+          <p:cNvPr id="59" name="Text 57"/>
+          <p:cNvSpPr/>
+          <p:nvPr/>
+        </p:nvSpPr>
+        <p:spPr>
+          <a:xfrm>
+            <a:off x="4921966" y="4169664"/>
+            <a:ext cx="543652" cy="475488"/>
           </a:xfrm>
           <a:prstGeom prst="rect">
             <a:avLst/>
@@ -22801,14 +23827,14 @@
       </p:sp>
       <p:sp>
         <p:nvSpPr>
-          <p:cNvPr id="48" name="Shape 46"/>
-          <p:cNvSpPr/>
-          <p:nvPr/>
-        </p:nvSpPr>
-        <p:spPr>
-          <a:xfrm>
-            <a:off x="7576947" y="4169664"/>
-            <a:ext cx="685800" cy="475488"/>
+          <p:cNvPr id="60" name="Shape 58"/>
+          <p:cNvSpPr/>
+          <p:nvPr/>
+        </p:nvSpPr>
+        <p:spPr>
+          <a:xfrm>
+            <a:off x="5515910" y="4169664"/>
+            <a:ext cx="543652" cy="475488"/>
           </a:xfrm>
           <a:prstGeom prst="rect">
             <a:avLst>
@@ -22828,14 +23854,278 @@
       </p:sp>
       <p:sp>
         <p:nvSpPr>
-          <p:cNvPr id="49" name="Text 47"/>
-          <p:cNvSpPr/>
-          <p:nvPr/>
-        </p:nvSpPr>
-        <p:spPr>
-          <a:xfrm>
-            <a:off x="7576947" y="4169664"/>
-            <a:ext cx="685800" cy="475488"/>
+          <p:cNvPr id="61" name="Text 59"/>
+          <p:cNvSpPr/>
+          <p:nvPr/>
+        </p:nvSpPr>
+        <p:spPr>
+          <a:xfrm>
+            <a:off x="5515910" y="4169664"/>
+            <a:ext cx="543652" cy="475488"/>
+          </a:xfrm>
+          <a:prstGeom prst="rect">
+            <a:avLst/>
+          </a:prstGeom>
+          <a:noFill/>
+          <a:ln/>
+        </p:spPr>
+        <p:txBody>
+          <a:bodyPr wrap="square" lIns="0" tIns="0" rIns="0" bIns="0" rtlCol="0" anchor="ctr"/>
+          <a:lstStyle/>
+          <a:p>
+            <a:pPr algn="ctr" indent="0" marL="0">
+              <a:buNone/>
+            </a:pPr>
+            <a:r>
+              <a:rPr lang="en-US" sz="900" b="1" dirty="0">
+                <a:solidFill>
+                  <a:srgbClr val="9D174D"/>
+                </a:solidFill>
+                <a:latin typeface="Trebuchet MS" pitchFamily="34" charset="0"/>
+                <a:ea typeface="Trebuchet MS" pitchFamily="34" charset="-122"/>
+                <a:cs typeface="Trebuchet MS" pitchFamily="34" charset="-120"/>
+              </a:rPr>
+              <a:t>i</a:t>
+            </a:r>
+            <a:endParaRPr lang="en-US" sz="900" dirty="0"/>
+          </a:p>
+        </p:txBody>
+      </p:sp>
+      <p:sp>
+        <p:nvSpPr>
+          <p:cNvPr id="62" name="Shape 60"/>
+          <p:cNvSpPr/>
+          <p:nvPr/>
+        </p:nvSpPr>
+        <p:spPr>
+          <a:xfrm>
+            <a:off x="6109855" y="4169664"/>
+            <a:ext cx="543652" cy="475488"/>
+          </a:xfrm>
+          <a:prstGeom prst="rect">
+            <a:avLst>
+              <a:gd name="adj" fmla="val 7692"/>
+            </a:avLst>
+          </a:prstGeom>
+          <a:solidFill>
+            <a:srgbClr val="FFFFFF"/>
+          </a:solidFill>
+          <a:ln w="12700">
+            <a:solidFill>
+              <a:srgbClr val="DB2777"/>
+            </a:solidFill>
+            <a:prstDash val="solid"/>
+          </a:ln>
+        </p:spPr>
+      </p:sp>
+      <p:sp>
+        <p:nvSpPr>
+          <p:cNvPr id="63" name="Text 61"/>
+          <p:cNvSpPr/>
+          <p:nvPr/>
+        </p:nvSpPr>
+        <p:spPr>
+          <a:xfrm>
+            <a:off x="6109855" y="4169664"/>
+            <a:ext cx="543652" cy="475488"/>
+          </a:xfrm>
+          <a:prstGeom prst="rect">
+            <a:avLst/>
+          </a:prstGeom>
+          <a:noFill/>
+          <a:ln/>
+        </p:spPr>
+        <p:txBody>
+          <a:bodyPr wrap="square" lIns="0" tIns="0" rIns="0" bIns="0" rtlCol="0" anchor="ctr"/>
+          <a:lstStyle/>
+          <a:p>
+            <a:pPr algn="ctr" indent="0" marL="0">
+              <a:buNone/>
+            </a:pPr>
+            <a:r>
+              <a:rPr lang="en-US" sz="900" b="1" dirty="0">
+                <a:solidFill>
+                  <a:srgbClr val="9D174D"/>
+                </a:solidFill>
+                <a:latin typeface="Trebuchet MS" pitchFamily="34" charset="0"/>
+                <a:ea typeface="Trebuchet MS" pitchFamily="34" charset="-122"/>
+                <a:cs typeface="Trebuchet MS" pitchFamily="34" charset="-120"/>
+              </a:rPr>
+              <a:t>g</a:t>
+            </a:r>
+            <a:endParaRPr lang="en-US" sz="900" dirty="0"/>
+          </a:p>
+        </p:txBody>
+      </p:sp>
+      <p:sp>
+        <p:nvSpPr>
+          <p:cNvPr id="64" name="Shape 62"/>
+          <p:cNvSpPr/>
+          <p:nvPr/>
+        </p:nvSpPr>
+        <p:spPr>
+          <a:xfrm>
+            <a:off x="6703799" y="4169664"/>
+            <a:ext cx="543652" cy="475488"/>
+          </a:xfrm>
+          <a:prstGeom prst="rect">
+            <a:avLst>
+              <a:gd name="adj" fmla="val 7692"/>
+            </a:avLst>
+          </a:prstGeom>
+          <a:solidFill>
+            <a:srgbClr val="FFFFFF"/>
+          </a:solidFill>
+          <a:ln w="12700">
+            <a:solidFill>
+              <a:srgbClr val="DB2777"/>
+            </a:solidFill>
+            <a:prstDash val="solid"/>
+          </a:ln>
+        </p:spPr>
+      </p:sp>
+      <p:sp>
+        <p:nvSpPr>
+          <p:cNvPr id="65" name="Text 63"/>
+          <p:cNvSpPr/>
+          <p:nvPr/>
+        </p:nvSpPr>
+        <p:spPr>
+          <a:xfrm>
+            <a:off x="6703799" y="4169664"/>
+            <a:ext cx="543652" cy="475488"/>
+          </a:xfrm>
+          <a:prstGeom prst="rect">
+            <a:avLst/>
+          </a:prstGeom>
+          <a:noFill/>
+          <a:ln/>
+        </p:spPr>
+        <p:txBody>
+          <a:bodyPr wrap="square" lIns="0" tIns="0" rIns="0" bIns="0" rtlCol="0" anchor="ctr"/>
+          <a:lstStyle/>
+          <a:p>
+            <a:pPr algn="ctr" indent="0" marL="0">
+              <a:buNone/>
+            </a:pPr>
+            <a:r>
+              <a:rPr lang="en-US" sz="900" b="1" dirty="0">
+                <a:solidFill>
+                  <a:srgbClr val="9D174D"/>
+                </a:solidFill>
+                <a:latin typeface="Trebuchet MS" pitchFamily="34" charset="0"/>
+                <a:ea typeface="Trebuchet MS" pitchFamily="34" charset="-122"/>
+                <a:cs typeface="Trebuchet MS" pitchFamily="34" charset="-120"/>
+              </a:rPr>
+              <a:t>a</a:t>
+            </a:r>
+            <a:endParaRPr lang="en-US" sz="900" dirty="0"/>
+          </a:p>
+        </p:txBody>
+      </p:sp>
+      <p:sp>
+        <p:nvSpPr>
+          <p:cNvPr id="66" name="Shape 64"/>
+          <p:cNvSpPr/>
+          <p:nvPr/>
+        </p:nvSpPr>
+        <p:spPr>
+          <a:xfrm>
+            <a:off x="7297743" y="4169664"/>
+            <a:ext cx="543652" cy="475488"/>
+          </a:xfrm>
+          <a:prstGeom prst="rect">
+            <a:avLst>
+              <a:gd name="adj" fmla="val 7692"/>
+            </a:avLst>
+          </a:prstGeom>
+          <a:solidFill>
+            <a:srgbClr val="FFFFFF"/>
+          </a:solidFill>
+          <a:ln w="12700">
+            <a:solidFill>
+              <a:srgbClr val="DB2777"/>
+            </a:solidFill>
+            <a:prstDash val="solid"/>
+          </a:ln>
+        </p:spPr>
+      </p:sp>
+      <p:sp>
+        <p:nvSpPr>
+          <p:cNvPr id="67" name="Text 65"/>
+          <p:cNvSpPr/>
+          <p:nvPr/>
+        </p:nvSpPr>
+        <p:spPr>
+          <a:xfrm>
+            <a:off x="7297743" y="4169664"/>
+            <a:ext cx="543652" cy="475488"/>
+          </a:xfrm>
+          <a:prstGeom prst="rect">
+            <a:avLst/>
+          </a:prstGeom>
+          <a:noFill/>
+          <a:ln/>
+        </p:spPr>
+        <p:txBody>
+          <a:bodyPr wrap="square" lIns="0" tIns="0" rIns="0" bIns="0" rtlCol="0" anchor="ctr"/>
+          <a:lstStyle/>
+          <a:p>
+            <a:pPr algn="ctr" indent="0" marL="0">
+              <a:buNone/>
+            </a:pPr>
+            <a:r>
+              <a:rPr lang="en-US" sz="900" b="1" dirty="0">
+                <a:solidFill>
+                  <a:srgbClr val="9D174D"/>
+                </a:solidFill>
+                <a:latin typeface="Trebuchet MS" pitchFamily="34" charset="0"/>
+                <a:ea typeface="Trebuchet MS" pitchFamily="34" charset="-122"/>
+                <a:cs typeface="Trebuchet MS" pitchFamily="34" charset="-120"/>
+              </a:rPr>
+              <a:t>t</a:t>
+            </a:r>
+            <a:endParaRPr lang="en-US" sz="900" dirty="0"/>
+          </a:p>
+        </p:txBody>
+      </p:sp>
+      <p:sp>
+        <p:nvSpPr>
+          <p:cNvPr id="68" name="Shape 66"/>
+          <p:cNvSpPr/>
+          <p:nvPr/>
+        </p:nvSpPr>
+        <p:spPr>
+          <a:xfrm>
+            <a:off x="7891688" y="4169664"/>
+            <a:ext cx="543652" cy="475488"/>
+          </a:xfrm>
+          <a:prstGeom prst="rect">
+            <a:avLst>
+              <a:gd name="adj" fmla="val 7692"/>
+            </a:avLst>
+          </a:prstGeom>
+          <a:solidFill>
+            <a:srgbClr val="FFFFFF"/>
+          </a:solidFill>
+          <a:ln w="12700">
+            <a:solidFill>
+              <a:srgbClr val="DB2777"/>
+            </a:solidFill>
+            <a:prstDash val="solid"/>
+          </a:ln>
+        </p:spPr>
+      </p:sp>
+      <p:sp>
+        <p:nvSpPr>
+          <p:cNvPr id="69" name="Text 67"/>
+          <p:cNvSpPr/>
+          <p:nvPr/>
+        </p:nvSpPr>
+        <p:spPr>
+          <a:xfrm>
+            <a:off x="7891688" y="4169664"/>
+            <a:ext cx="543652" cy="475488"/>
           </a:xfrm>
           <a:prstGeom prst="rect">
             <a:avLst/>
@@ -23290,7 +24580,7 @@
                 <a:ea typeface="Trebuchet MS" pitchFamily="34" charset="-122"/>
                 <a:cs typeface="Trebuchet MS" pitchFamily="34" charset="-120"/>
               </a:rPr>
-              <a:t>reinvest</a:t>
+              <a:t>reinvesting</a:t>
             </a:r>
             <a:endParaRPr lang="en-US" sz="2800" dirty="0"/>
           </a:p>
@@ -24117,7 +25407,7 @@
                 <a:ea typeface="Trebuchet MS" pitchFamily="34" charset="-122"/>
                 <a:cs typeface="Trebuchet MS" pitchFamily="34" charset="-120"/>
               </a:rPr>
-              <a:t>reinvest</a:t>
+              <a:t>reinvesting</a:t>
             </a:r>
             <a:endParaRPr lang="en-US" sz="2800" dirty="0"/>
           </a:p>
@@ -24197,7 +25487,7 @@
         </p:nvSpPr>
         <p:spPr>
           <a:xfrm>
-            <a:off x="2938272" y="2258568"/>
+            <a:off x="2221992" y="2258568"/>
             <a:ext cx="1828800" cy="292608"/>
           </a:xfrm>
           <a:prstGeom prst="rect">
@@ -24231,7 +25521,7 @@
         </p:nvSpPr>
         <p:spPr>
           <a:xfrm>
-            <a:off x="2938272" y="2258568"/>
+            <a:off x="2221992" y="2258568"/>
             <a:ext cx="1828800" cy="292608"/>
           </a:xfrm>
           <a:prstGeom prst="rect">
@@ -24270,7 +25560,7 @@
         </p:nvSpPr>
         <p:spPr>
           <a:xfrm>
-            <a:off x="2938272" y="2569464"/>
+            <a:off x="2221992" y="2569464"/>
             <a:ext cx="1828800" cy="201168"/>
           </a:xfrm>
           <a:prstGeom prst="rect">
@@ -24309,7 +25599,7 @@
         </p:nvSpPr>
         <p:spPr>
           <a:xfrm>
-            <a:off x="5803392" y="2258568"/>
+            <a:off x="4370832" y="2258568"/>
             <a:ext cx="1828800" cy="292608"/>
           </a:xfrm>
           <a:prstGeom prst="rect">
@@ -24343,7 +25633,7 @@
         </p:nvSpPr>
         <p:spPr>
           <a:xfrm>
-            <a:off x="5803392" y="2258568"/>
+            <a:off x="4370832" y="2258568"/>
             <a:ext cx="1828800" cy="292608"/>
           </a:xfrm>
           <a:prstGeom prst="rect">
@@ -24382,7 +25672,7 @@
         </p:nvSpPr>
         <p:spPr>
           <a:xfrm>
-            <a:off x="5803392" y="2569464"/>
+            <a:off x="4370832" y="2569464"/>
             <a:ext cx="1828800" cy="201168"/>
           </a:xfrm>
           <a:prstGeom prst="rect">
@@ -24407,7 +25697,7 @@
                 <a:ea typeface="Calibri" pitchFamily="34" charset="-122"/>
                 <a:cs typeface="Calibri" pitchFamily="34" charset="-120"/>
               </a:rPr>
-              <a:t>to put in / to clothe</a:t>
+              <a:t>to put money or effort in</a:t>
             </a:r>
             <a:endParaRPr lang="en-US" sz="850" dirty="0"/>
           </a:p>
@@ -24416,6 +25706,118 @@
       <p:sp>
         <p:nvSpPr>
           <p:cNvPr id="22" name="Shape 20"/>
+          <p:cNvSpPr/>
+          <p:nvPr/>
+        </p:nvSpPr>
+        <p:spPr>
+          <a:xfrm>
+            <a:off x="6519672" y="2258568"/>
+            <a:ext cx="1828800" cy="292608"/>
+          </a:xfrm>
+          <a:prstGeom prst="rect">
+            <a:avLst>
+              <a:gd name="adj" fmla="val 25000"/>
+            </a:avLst>
+          </a:prstGeom>
+          <a:solidFill>
+            <a:srgbClr val="FCE7F3"/>
+          </a:solidFill>
+          <a:ln w="19050">
+            <a:solidFill>
+              <a:srgbClr val="DB2777"/>
+            </a:solidFill>
+            <a:prstDash val="solid"/>
+          </a:ln>
+          <a:effectLst>
+            <a:outerShdw sx="100000" sy="100000" kx="0" ky="0" algn="bl" rotWithShape="0" blurRad="101600" dist="38100" dir="8100000">
+              <a:srgbClr val="000000">
+                <a:alpha val="12000"/>
+              </a:srgbClr>
+            </a:outerShdw>
+          </a:effectLst>
+        </p:spPr>
+      </p:sp>
+      <p:sp>
+        <p:nvSpPr>
+          <p:cNvPr id="23" name="Text 21"/>
+          <p:cNvSpPr/>
+          <p:nvPr/>
+        </p:nvSpPr>
+        <p:spPr>
+          <a:xfrm>
+            <a:off x="6519672" y="2258568"/>
+            <a:ext cx="1828800" cy="292608"/>
+          </a:xfrm>
+          <a:prstGeom prst="rect">
+            <a:avLst/>
+          </a:prstGeom>
+          <a:noFill/>
+          <a:ln/>
+        </p:spPr>
+        <p:txBody>
+          <a:bodyPr wrap="square" lIns="0" tIns="0" rIns="0" bIns="0" rtlCol="0" anchor="ctr"/>
+          <a:lstStyle/>
+          <a:p>
+            <a:pPr algn="ctr" indent="0" marL="0">
+              <a:buNone/>
+            </a:pPr>
+            <a:r>
+              <a:rPr lang="en-US" sz="1300" b="1" dirty="0">
+                <a:solidFill>
+                  <a:srgbClr val="9D174D"/>
+                </a:solidFill>
+                <a:latin typeface="Trebuchet MS" pitchFamily="34" charset="0"/>
+                <a:ea typeface="Trebuchet MS" pitchFamily="34" charset="-122"/>
+                <a:cs typeface="Trebuchet MS" pitchFamily="34" charset="-120"/>
+              </a:rPr>
+              <a:t>ing</a:t>
+            </a:r>
+            <a:endParaRPr lang="en-US" sz="1300" dirty="0"/>
+          </a:p>
+        </p:txBody>
+      </p:sp>
+      <p:sp>
+        <p:nvSpPr>
+          <p:cNvPr id="24" name="Text 22"/>
+          <p:cNvSpPr/>
+          <p:nvPr/>
+        </p:nvSpPr>
+        <p:spPr>
+          <a:xfrm>
+            <a:off x="6519672" y="2569464"/>
+            <a:ext cx="1828800" cy="201168"/>
+          </a:xfrm>
+          <a:prstGeom prst="rect">
+            <a:avLst/>
+          </a:prstGeom>
+          <a:noFill/>
+          <a:ln/>
+        </p:spPr>
+        <p:txBody>
+          <a:bodyPr wrap="square" lIns="0" tIns="0" rIns="0" bIns="0" rtlCol="0" anchor="t"/>
+          <a:lstStyle/>
+          <a:p>
+            <a:pPr algn="ctr" indent="0" marL="0">
+              <a:buNone/>
+            </a:pPr>
+            <a:r>
+              <a:rPr lang="en-US" sz="850" dirty="0">
+                <a:solidFill>
+                  <a:srgbClr val="475569"/>
+                </a:solidFill>
+                <a:latin typeface="Calibri" pitchFamily="34" charset="0"/>
+                <a:ea typeface="Calibri" pitchFamily="34" charset="-122"/>
+                <a:cs typeface="Calibri" pitchFamily="34" charset="-120"/>
+              </a:rPr>
+              <a:t>action happening now</a:t>
+            </a:r>
+            <a:endParaRPr lang="en-US" sz="850" dirty="0"/>
+          </a:p>
+        </p:txBody>
+      </p:sp>
+      <p:sp>
+        <p:nvSpPr>
+          <p:cNvPr id="25" name="Shape 23"/>
           <p:cNvSpPr/>
           <p:nvPr/>
         </p:nvSpPr>
@@ -24442,7 +25844,7 @@
       </p:sp>
       <p:sp>
         <p:nvSpPr>
-          <p:cNvPr id="23" name="Text 21"/>
+          <p:cNvPr id="26" name="Text 24"/>
           <p:cNvSpPr/>
           <p:nvPr/>
         </p:nvSpPr>
@@ -24481,7 +25883,7 @@
       </p:sp>
       <p:sp>
         <p:nvSpPr>
-          <p:cNvPr id="24" name="Shape 22"/>
+          <p:cNvPr id="27" name="Shape 25"/>
           <p:cNvSpPr/>
           <p:nvPr/>
         </p:nvSpPr>
@@ -24508,7 +25910,7 @@
       </p:sp>
       <p:sp>
         <p:nvSpPr>
-          <p:cNvPr id="25" name="Text 23"/>
+          <p:cNvPr id="28" name="Text 26"/>
           <p:cNvSpPr/>
           <p:nvPr/>
         </p:nvSpPr>
@@ -24547,7 +25949,7 @@
       </p:sp>
       <p:sp>
         <p:nvSpPr>
-          <p:cNvPr id="26" name="Shape 24"/>
+          <p:cNvPr id="29" name="Shape 27"/>
           <p:cNvSpPr/>
           <p:nvPr/>
         </p:nvSpPr>
@@ -24574,7 +25976,7 @@
       </p:sp>
       <p:sp>
         <p:nvSpPr>
-          <p:cNvPr id="27" name="Text 25"/>
+          <p:cNvPr id="30" name="Text 28"/>
           <p:cNvSpPr/>
           <p:nvPr/>
         </p:nvSpPr>
@@ -24613,7 +26015,7 @@
       </p:sp>
       <p:sp>
         <p:nvSpPr>
-          <p:cNvPr id="28" name="Shape 26"/>
+          <p:cNvPr id="31" name="Shape 29"/>
           <p:cNvSpPr/>
           <p:nvPr/>
         </p:nvSpPr>
@@ -24640,7 +26042,7 @@
       </p:sp>
       <p:sp>
         <p:nvSpPr>
-          <p:cNvPr id="29" name="Text 27"/>
+          <p:cNvPr id="32" name="Text 30"/>
           <p:cNvSpPr/>
           <p:nvPr/>
         </p:nvSpPr>
@@ -25821,7 +27223,7 @@
                 <a:ea typeface="Trebuchet MS" pitchFamily="34" charset="-122"/>
                 <a:cs typeface="Trebuchet MS" pitchFamily="34" charset="-120"/>
               </a:rPr>
-              <a:t>reinvest</a:t>
+              <a:t>reinvesting</a:t>
             </a:r>
             <a:endParaRPr lang="en-US" sz="2800" dirty="0"/>
           </a:p>
@@ -25901,7 +27303,7 @@
         </p:nvSpPr>
         <p:spPr>
           <a:xfrm>
-            <a:off x="2938272" y="2258568"/>
+            <a:off x="2221992" y="2258568"/>
             <a:ext cx="1828800" cy="292608"/>
           </a:xfrm>
           <a:prstGeom prst="rect">
@@ -25935,7 +27337,7 @@
         </p:nvSpPr>
         <p:spPr>
           <a:xfrm>
-            <a:off x="2938272" y="2258568"/>
+            <a:off x="2221992" y="2258568"/>
             <a:ext cx="1828800" cy="292608"/>
           </a:xfrm>
           <a:prstGeom prst="rect">
@@ -25974,7 +27376,7 @@
         </p:nvSpPr>
         <p:spPr>
           <a:xfrm>
-            <a:off x="2938272" y="2569464"/>
+            <a:off x="2221992" y="2569464"/>
             <a:ext cx="1828800" cy="201168"/>
           </a:xfrm>
           <a:prstGeom prst="rect">
@@ -26013,7 +27415,7 @@
         </p:nvSpPr>
         <p:spPr>
           <a:xfrm>
-            <a:off x="5803392" y="2258568"/>
+            <a:off x="4370832" y="2258568"/>
             <a:ext cx="1828800" cy="292608"/>
           </a:xfrm>
           <a:prstGeom prst="rect">
@@ -26047,7 +27449,7 @@
         </p:nvSpPr>
         <p:spPr>
           <a:xfrm>
-            <a:off x="5803392" y="2258568"/>
+            <a:off x="4370832" y="2258568"/>
             <a:ext cx="1828800" cy="292608"/>
           </a:xfrm>
           <a:prstGeom prst="rect">
@@ -26086,7 +27488,7 @@
         </p:nvSpPr>
         <p:spPr>
           <a:xfrm>
-            <a:off x="5803392" y="2569464"/>
+            <a:off x="4370832" y="2569464"/>
             <a:ext cx="1828800" cy="201168"/>
           </a:xfrm>
           <a:prstGeom prst="rect">
@@ -26111,7 +27513,7 @@
                 <a:ea typeface="Calibri" pitchFamily="34" charset="-122"/>
                 <a:cs typeface="Calibri" pitchFamily="34" charset="-120"/>
               </a:rPr>
-              <a:t>to put in / to clothe</a:t>
+              <a:t>to put money or effort in</a:t>
             </a:r>
             <a:endParaRPr lang="en-US" sz="850" dirty="0"/>
           </a:p>
@@ -26120,6 +27522,118 @@
       <p:sp>
         <p:nvSpPr>
           <p:cNvPr id="22" name="Shape 20"/>
+          <p:cNvSpPr/>
+          <p:nvPr/>
+        </p:nvSpPr>
+        <p:spPr>
+          <a:xfrm>
+            <a:off x="6519672" y="2258568"/>
+            <a:ext cx="1828800" cy="292608"/>
+          </a:xfrm>
+          <a:prstGeom prst="rect">
+            <a:avLst>
+              <a:gd name="adj" fmla="val 25000"/>
+            </a:avLst>
+          </a:prstGeom>
+          <a:solidFill>
+            <a:srgbClr val="FCE7F3"/>
+          </a:solidFill>
+          <a:ln w="19050">
+            <a:solidFill>
+              <a:srgbClr val="DB2777"/>
+            </a:solidFill>
+            <a:prstDash val="solid"/>
+          </a:ln>
+          <a:effectLst>
+            <a:outerShdw sx="100000" sy="100000" kx="0" ky="0" algn="bl" rotWithShape="0" blurRad="101600" dist="38100" dir="8100000">
+              <a:srgbClr val="000000">
+                <a:alpha val="12000"/>
+              </a:srgbClr>
+            </a:outerShdw>
+          </a:effectLst>
+        </p:spPr>
+      </p:sp>
+      <p:sp>
+        <p:nvSpPr>
+          <p:cNvPr id="23" name="Text 21"/>
+          <p:cNvSpPr/>
+          <p:nvPr/>
+        </p:nvSpPr>
+        <p:spPr>
+          <a:xfrm>
+            <a:off x="6519672" y="2258568"/>
+            <a:ext cx="1828800" cy="292608"/>
+          </a:xfrm>
+          <a:prstGeom prst="rect">
+            <a:avLst/>
+          </a:prstGeom>
+          <a:noFill/>
+          <a:ln/>
+        </p:spPr>
+        <p:txBody>
+          <a:bodyPr wrap="square" lIns="0" tIns="0" rIns="0" bIns="0" rtlCol="0" anchor="ctr"/>
+          <a:lstStyle/>
+          <a:p>
+            <a:pPr algn="ctr" indent="0" marL="0">
+              <a:buNone/>
+            </a:pPr>
+            <a:r>
+              <a:rPr lang="en-US" sz="1300" b="1" dirty="0">
+                <a:solidFill>
+                  <a:srgbClr val="9D174D"/>
+                </a:solidFill>
+                <a:latin typeface="Trebuchet MS" pitchFamily="34" charset="0"/>
+                <a:ea typeface="Trebuchet MS" pitchFamily="34" charset="-122"/>
+                <a:cs typeface="Trebuchet MS" pitchFamily="34" charset="-120"/>
+              </a:rPr>
+              <a:t>ing</a:t>
+            </a:r>
+            <a:endParaRPr lang="en-US" sz="1300" dirty="0"/>
+          </a:p>
+        </p:txBody>
+      </p:sp>
+      <p:sp>
+        <p:nvSpPr>
+          <p:cNvPr id="24" name="Text 22"/>
+          <p:cNvSpPr/>
+          <p:nvPr/>
+        </p:nvSpPr>
+        <p:spPr>
+          <a:xfrm>
+            <a:off x="6519672" y="2569464"/>
+            <a:ext cx="1828800" cy="201168"/>
+          </a:xfrm>
+          <a:prstGeom prst="rect">
+            <a:avLst/>
+          </a:prstGeom>
+          <a:noFill/>
+          <a:ln/>
+        </p:spPr>
+        <p:txBody>
+          <a:bodyPr wrap="square" lIns="0" tIns="0" rIns="0" bIns="0" rtlCol="0" anchor="t"/>
+          <a:lstStyle/>
+          <a:p>
+            <a:pPr algn="ctr" indent="0" marL="0">
+              <a:buNone/>
+            </a:pPr>
+            <a:r>
+              <a:rPr lang="en-US" sz="850" dirty="0">
+                <a:solidFill>
+                  <a:srgbClr val="475569"/>
+                </a:solidFill>
+                <a:latin typeface="Calibri" pitchFamily="34" charset="0"/>
+                <a:ea typeface="Calibri" pitchFamily="34" charset="-122"/>
+                <a:cs typeface="Calibri" pitchFamily="34" charset="-120"/>
+              </a:rPr>
+              <a:t>action happening now</a:t>
+            </a:r>
+            <a:endParaRPr lang="en-US" sz="850" dirty="0"/>
+          </a:p>
+        </p:txBody>
+      </p:sp>
+      <p:sp>
+        <p:nvSpPr>
+          <p:cNvPr id="25" name="Shape 23"/>
           <p:cNvSpPr/>
           <p:nvPr/>
         </p:nvSpPr>
@@ -26146,7 +27660,7 @@
       </p:sp>
       <p:sp>
         <p:nvSpPr>
-          <p:cNvPr id="23" name="Text 21"/>
+          <p:cNvPr id="26" name="Text 24"/>
           <p:cNvSpPr/>
           <p:nvPr/>
         </p:nvSpPr>
@@ -26185,7 +27699,7 @@
       </p:sp>
       <p:sp>
         <p:nvSpPr>
-          <p:cNvPr id="24" name="Shape 22"/>
+          <p:cNvPr id="27" name="Shape 25"/>
           <p:cNvSpPr/>
           <p:nvPr/>
         </p:nvSpPr>
@@ -26212,14 +27726,14 @@
       </p:sp>
       <p:sp>
         <p:nvSpPr>
-          <p:cNvPr id="25" name="Shape 23"/>
-          <p:cNvSpPr/>
-          <p:nvPr/>
-        </p:nvSpPr>
-        <p:spPr>
-          <a:xfrm>
-            <a:off x="2313432" y="3364992"/>
-            <a:ext cx="1645920" cy="475488"/>
+          <p:cNvPr id="28" name="Shape 26"/>
+          <p:cNvSpPr/>
+          <p:nvPr/>
+        </p:nvSpPr>
+        <p:spPr>
+          <a:xfrm>
+            <a:off x="1975104" y="3364992"/>
+            <a:ext cx="1554480" cy="475488"/>
           </a:xfrm>
           <a:prstGeom prst="rect">
             <a:avLst>
@@ -26239,14 +27753,14 @@
       </p:sp>
       <p:sp>
         <p:nvSpPr>
-          <p:cNvPr id="26" name="Text 24"/>
-          <p:cNvSpPr/>
-          <p:nvPr/>
-        </p:nvSpPr>
-        <p:spPr>
-          <a:xfrm>
-            <a:off x="2313432" y="3364992"/>
-            <a:ext cx="1645920" cy="475488"/>
+          <p:cNvPr id="29" name="Text 27"/>
+          <p:cNvSpPr/>
+          <p:nvPr/>
+        </p:nvSpPr>
+        <p:spPr>
+          <a:xfrm>
+            <a:off x="1975104" y="3364992"/>
+            <a:ext cx="1554480" cy="475488"/>
           </a:xfrm>
           <a:prstGeom prst="rect">
             <a:avLst/>
@@ -26278,14 +27792,14 @@
       </p:sp>
       <p:sp>
         <p:nvSpPr>
-          <p:cNvPr id="27" name="Text 25"/>
-          <p:cNvSpPr/>
-          <p:nvPr/>
-        </p:nvSpPr>
-        <p:spPr>
-          <a:xfrm>
-            <a:off x="3959352" y="3364992"/>
-            <a:ext cx="411480" cy="475488"/>
+          <p:cNvPr id="30" name="Text 28"/>
+          <p:cNvSpPr/>
+          <p:nvPr/>
+        </p:nvSpPr>
+        <p:spPr>
+          <a:xfrm>
+            <a:off x="3529584" y="3364992"/>
+            <a:ext cx="73152" cy="475488"/>
           </a:xfrm>
           <a:prstGeom prst="rect">
             <a:avLst/>
@@ -26317,14 +27831,14 @@
       </p:sp>
       <p:sp>
         <p:nvSpPr>
-          <p:cNvPr id="28" name="Shape 26"/>
-          <p:cNvSpPr/>
-          <p:nvPr/>
-        </p:nvSpPr>
-        <p:spPr>
-          <a:xfrm>
-            <a:off x="4370832" y="3364992"/>
-            <a:ext cx="1645920" cy="475488"/>
+          <p:cNvPr id="31" name="Shape 29"/>
+          <p:cNvSpPr/>
+          <p:nvPr/>
+        </p:nvSpPr>
+        <p:spPr>
+          <a:xfrm>
+            <a:off x="3602736" y="3364992"/>
+            <a:ext cx="1554480" cy="475488"/>
           </a:xfrm>
           <a:prstGeom prst="rect">
             <a:avLst>
@@ -26344,14 +27858,14 @@
       </p:sp>
       <p:sp>
         <p:nvSpPr>
-          <p:cNvPr id="29" name="Text 27"/>
-          <p:cNvSpPr/>
-          <p:nvPr/>
-        </p:nvSpPr>
-        <p:spPr>
-          <a:xfrm>
-            <a:off x="4370832" y="3364992"/>
-            <a:ext cx="1645920" cy="475488"/>
+          <p:cNvPr id="32" name="Text 30"/>
+          <p:cNvSpPr/>
+          <p:nvPr/>
+        </p:nvSpPr>
+        <p:spPr>
+          <a:xfrm>
+            <a:off x="3602736" y="3364992"/>
+            <a:ext cx="1554480" cy="475488"/>
           </a:xfrm>
           <a:prstGeom prst="rect">
             <a:avLst/>
@@ -26383,14 +27897,14 @@
       </p:sp>
       <p:sp>
         <p:nvSpPr>
-          <p:cNvPr id="30" name="Text 28"/>
-          <p:cNvSpPr/>
-          <p:nvPr/>
-        </p:nvSpPr>
-        <p:spPr>
-          <a:xfrm>
-            <a:off x="6016752" y="3364992"/>
-            <a:ext cx="411480" cy="475488"/>
+          <p:cNvPr id="33" name="Text 31"/>
+          <p:cNvSpPr/>
+          <p:nvPr/>
+        </p:nvSpPr>
+        <p:spPr>
+          <a:xfrm>
+            <a:off x="5157216" y="3364992"/>
+            <a:ext cx="73152" cy="475488"/>
           </a:xfrm>
           <a:prstGeom prst="rect">
             <a:avLst/>
@@ -26422,14 +27936,14 @@
       </p:sp>
       <p:sp>
         <p:nvSpPr>
-          <p:cNvPr id="31" name="Shape 29"/>
-          <p:cNvSpPr/>
-          <p:nvPr/>
-        </p:nvSpPr>
-        <p:spPr>
-          <a:xfrm>
-            <a:off x="6428232" y="3364992"/>
-            <a:ext cx="1645920" cy="475488"/>
+          <p:cNvPr id="34" name="Shape 32"/>
+          <p:cNvSpPr/>
+          <p:nvPr/>
+        </p:nvSpPr>
+        <p:spPr>
+          <a:xfrm>
+            <a:off x="5230368" y="3364992"/>
+            <a:ext cx="1554480" cy="475488"/>
           </a:xfrm>
           <a:prstGeom prst="rect">
             <a:avLst>
@@ -26449,14 +27963,14 @@
       </p:sp>
       <p:sp>
         <p:nvSpPr>
-          <p:cNvPr id="32" name="Text 30"/>
-          <p:cNvSpPr/>
-          <p:nvPr/>
-        </p:nvSpPr>
-        <p:spPr>
-          <a:xfrm>
-            <a:off x="6428232" y="3364992"/>
-            <a:ext cx="1645920" cy="475488"/>
+          <p:cNvPr id="35" name="Text 33"/>
+          <p:cNvSpPr/>
+          <p:nvPr/>
+        </p:nvSpPr>
+        <p:spPr>
+          <a:xfrm>
+            <a:off x="5230368" y="3364992"/>
+            <a:ext cx="1554480" cy="475488"/>
           </a:xfrm>
           <a:prstGeom prst="rect">
             <a:avLst/>
@@ -26488,7 +28002,112 @@
       </p:sp>
       <p:sp>
         <p:nvSpPr>
-          <p:cNvPr id="33" name="Shape 31"/>
+          <p:cNvPr id="36" name="Text 34"/>
+          <p:cNvSpPr/>
+          <p:nvPr/>
+        </p:nvSpPr>
+        <p:spPr>
+          <a:xfrm>
+            <a:off x="6784848" y="3364992"/>
+            <a:ext cx="73152" cy="475488"/>
+          </a:xfrm>
+          <a:prstGeom prst="rect">
+            <a:avLst/>
+          </a:prstGeom>
+          <a:noFill/>
+          <a:ln/>
+        </p:spPr>
+        <p:txBody>
+          <a:bodyPr wrap="square" lIns="0" tIns="0" rIns="0" bIns="0" rtlCol="0" anchor="ctr"/>
+          <a:lstStyle/>
+          <a:p>
+            <a:pPr algn="ctr" indent="0" marL="0">
+              <a:buNone/>
+            </a:pPr>
+            <a:r>
+              <a:rPr lang="en-US" sz="1600" b="1" dirty="0">
+                <a:solidFill>
+                  <a:srgbClr val="0D9488"/>
+                </a:solidFill>
+                <a:latin typeface="Trebuchet MS" pitchFamily="34" charset="0"/>
+                <a:ea typeface="Trebuchet MS" pitchFamily="34" charset="-122"/>
+                <a:cs typeface="Trebuchet MS" pitchFamily="34" charset="-120"/>
+              </a:rPr>
+              <a:t>·</a:t>
+            </a:r>
+            <a:endParaRPr lang="en-US" sz="1600" dirty="0"/>
+          </a:p>
+        </p:txBody>
+      </p:sp>
+      <p:sp>
+        <p:nvSpPr>
+          <p:cNvPr id="37" name="Shape 35"/>
+          <p:cNvSpPr/>
+          <p:nvPr/>
+        </p:nvSpPr>
+        <p:spPr>
+          <a:xfrm>
+            <a:off x="6858000" y="3364992"/>
+            <a:ext cx="1554480" cy="475488"/>
+          </a:xfrm>
+          <a:prstGeom prst="rect">
+            <a:avLst>
+              <a:gd name="adj" fmla="val 9615"/>
+            </a:avLst>
+          </a:prstGeom>
+          <a:solidFill>
+            <a:srgbClr val="FFFFFF"/>
+          </a:solidFill>
+          <a:ln w="12700">
+            <a:solidFill>
+              <a:srgbClr val="0D9488"/>
+            </a:solidFill>
+            <a:prstDash val="solid"/>
+          </a:ln>
+        </p:spPr>
+      </p:sp>
+      <p:sp>
+        <p:nvSpPr>
+          <p:cNvPr id="38" name="Text 36"/>
+          <p:cNvSpPr/>
+          <p:nvPr/>
+        </p:nvSpPr>
+        <p:spPr>
+          <a:xfrm>
+            <a:off x="6858000" y="3364992"/>
+            <a:ext cx="1554480" cy="475488"/>
+          </a:xfrm>
+          <a:prstGeom prst="rect">
+            <a:avLst/>
+          </a:prstGeom>
+          <a:noFill/>
+          <a:ln/>
+        </p:spPr>
+        <p:txBody>
+          <a:bodyPr wrap="square" lIns="0" tIns="0" rIns="0" bIns="0" rtlCol="0" anchor="ctr"/>
+          <a:lstStyle/>
+          <a:p>
+            <a:pPr algn="ctr" indent="0" marL="0">
+              <a:buNone/>
+            </a:pPr>
+            <a:r>
+              <a:rPr lang="en-US" sz="1400" b="1" dirty="0">
+                <a:solidFill>
+                  <a:srgbClr val="0D9488"/>
+                </a:solidFill>
+                <a:latin typeface="Trebuchet MS" pitchFamily="34" charset="0"/>
+                <a:ea typeface="Trebuchet MS" pitchFamily="34" charset="-122"/>
+                <a:cs typeface="Trebuchet MS" pitchFamily="34" charset="-120"/>
+              </a:rPr>
+              <a:t>ing</a:t>
+            </a:r>
+            <a:endParaRPr lang="en-US" sz="1400" dirty="0"/>
+          </a:p>
+        </p:txBody>
+      </p:sp>
+      <p:sp>
+        <p:nvSpPr>
+          <p:cNvPr id="39" name="Shape 37"/>
           <p:cNvSpPr/>
           <p:nvPr/>
         </p:nvSpPr>
@@ -26515,7 +28134,7 @@
       </p:sp>
       <p:sp>
         <p:nvSpPr>
-          <p:cNvPr id="34" name="Text 32"/>
+          <p:cNvPr id="40" name="Text 38"/>
           <p:cNvSpPr/>
           <p:nvPr/>
         </p:nvSpPr>
@@ -26554,7 +28173,7 @@
       </p:sp>
       <p:sp>
         <p:nvSpPr>
-          <p:cNvPr id="35" name="Shape 33"/>
+          <p:cNvPr id="41" name="Shape 39"/>
           <p:cNvSpPr/>
           <p:nvPr/>
         </p:nvSpPr>
@@ -26581,7 +28200,7 @@
       </p:sp>
       <p:sp>
         <p:nvSpPr>
-          <p:cNvPr id="36" name="Text 34"/>
+          <p:cNvPr id="42" name="Text 40"/>
           <p:cNvSpPr/>
           <p:nvPr/>
         </p:nvSpPr>
@@ -27043,7 +28662,7 @@
                 <a:ea typeface="Trebuchet MS" pitchFamily="34" charset="-122"/>
                 <a:cs typeface="Trebuchet MS" pitchFamily="34" charset="-120"/>
               </a:rPr>
-              <a:t>reinvest</a:t>
+              <a:t>reinvesting</a:t>
             </a:r>
             <a:endParaRPr lang="en-US" sz="2800" dirty="0"/>
           </a:p>
@@ -27123,7 +28742,7 @@
         </p:nvSpPr>
         <p:spPr>
           <a:xfrm>
-            <a:off x="2938272" y="2258568"/>
+            <a:off x="2221992" y="2258568"/>
             <a:ext cx="1828800" cy="292608"/>
           </a:xfrm>
           <a:prstGeom prst="rect">
@@ -27157,7 +28776,7 @@
         </p:nvSpPr>
         <p:spPr>
           <a:xfrm>
-            <a:off x="2938272" y="2258568"/>
+            <a:off x="2221992" y="2258568"/>
             <a:ext cx="1828800" cy="292608"/>
           </a:xfrm>
           <a:prstGeom prst="rect">
@@ -27196,7 +28815,7 @@
         </p:nvSpPr>
         <p:spPr>
           <a:xfrm>
-            <a:off x="2938272" y="2569464"/>
+            <a:off x="2221992" y="2569464"/>
             <a:ext cx="1828800" cy="201168"/>
           </a:xfrm>
           <a:prstGeom prst="rect">
@@ -27235,7 +28854,7 @@
         </p:nvSpPr>
         <p:spPr>
           <a:xfrm>
-            <a:off x="5803392" y="2258568"/>
+            <a:off x="4370832" y="2258568"/>
             <a:ext cx="1828800" cy="292608"/>
           </a:xfrm>
           <a:prstGeom prst="rect">
@@ -27269,7 +28888,7 @@
         </p:nvSpPr>
         <p:spPr>
           <a:xfrm>
-            <a:off x="5803392" y="2258568"/>
+            <a:off x="4370832" y="2258568"/>
             <a:ext cx="1828800" cy="292608"/>
           </a:xfrm>
           <a:prstGeom prst="rect">
@@ -27308,7 +28927,7 @@
         </p:nvSpPr>
         <p:spPr>
           <a:xfrm>
-            <a:off x="5803392" y="2569464"/>
+            <a:off x="4370832" y="2569464"/>
             <a:ext cx="1828800" cy="201168"/>
           </a:xfrm>
           <a:prstGeom prst="rect">
@@ -27333,7 +28952,7 @@
                 <a:ea typeface="Calibri" pitchFamily="34" charset="-122"/>
                 <a:cs typeface="Calibri" pitchFamily="34" charset="-120"/>
               </a:rPr>
-              <a:t>to put in / to clothe</a:t>
+              <a:t>to put money or effort in</a:t>
             </a:r>
             <a:endParaRPr lang="en-US" sz="850" dirty="0"/>
           </a:p>
@@ -27342,6 +28961,118 @@
       <p:sp>
         <p:nvSpPr>
           <p:cNvPr id="22" name="Shape 20"/>
+          <p:cNvSpPr/>
+          <p:nvPr/>
+        </p:nvSpPr>
+        <p:spPr>
+          <a:xfrm>
+            <a:off x="6519672" y="2258568"/>
+            <a:ext cx="1828800" cy="292608"/>
+          </a:xfrm>
+          <a:prstGeom prst="rect">
+            <a:avLst>
+              <a:gd name="adj" fmla="val 25000"/>
+            </a:avLst>
+          </a:prstGeom>
+          <a:solidFill>
+            <a:srgbClr val="FCE7F3"/>
+          </a:solidFill>
+          <a:ln w="19050">
+            <a:solidFill>
+              <a:srgbClr val="DB2777"/>
+            </a:solidFill>
+            <a:prstDash val="solid"/>
+          </a:ln>
+          <a:effectLst>
+            <a:outerShdw sx="100000" sy="100000" kx="0" ky="0" algn="bl" rotWithShape="0" blurRad="101600" dist="38100" dir="8100000">
+              <a:srgbClr val="000000">
+                <a:alpha val="12000"/>
+              </a:srgbClr>
+            </a:outerShdw>
+          </a:effectLst>
+        </p:spPr>
+      </p:sp>
+      <p:sp>
+        <p:nvSpPr>
+          <p:cNvPr id="23" name="Text 21"/>
+          <p:cNvSpPr/>
+          <p:nvPr/>
+        </p:nvSpPr>
+        <p:spPr>
+          <a:xfrm>
+            <a:off x="6519672" y="2258568"/>
+            <a:ext cx="1828800" cy="292608"/>
+          </a:xfrm>
+          <a:prstGeom prst="rect">
+            <a:avLst/>
+          </a:prstGeom>
+          <a:noFill/>
+          <a:ln/>
+        </p:spPr>
+        <p:txBody>
+          <a:bodyPr wrap="square" lIns="0" tIns="0" rIns="0" bIns="0" rtlCol="0" anchor="ctr"/>
+          <a:lstStyle/>
+          <a:p>
+            <a:pPr algn="ctr" indent="0" marL="0">
+              <a:buNone/>
+            </a:pPr>
+            <a:r>
+              <a:rPr lang="en-US" sz="1300" b="1" dirty="0">
+                <a:solidFill>
+                  <a:srgbClr val="9D174D"/>
+                </a:solidFill>
+                <a:latin typeface="Trebuchet MS" pitchFamily="34" charset="0"/>
+                <a:ea typeface="Trebuchet MS" pitchFamily="34" charset="-122"/>
+                <a:cs typeface="Trebuchet MS" pitchFamily="34" charset="-120"/>
+              </a:rPr>
+              <a:t>ing</a:t>
+            </a:r>
+            <a:endParaRPr lang="en-US" sz="1300" dirty="0"/>
+          </a:p>
+        </p:txBody>
+      </p:sp>
+      <p:sp>
+        <p:nvSpPr>
+          <p:cNvPr id="24" name="Text 22"/>
+          <p:cNvSpPr/>
+          <p:nvPr/>
+        </p:nvSpPr>
+        <p:spPr>
+          <a:xfrm>
+            <a:off x="6519672" y="2569464"/>
+            <a:ext cx="1828800" cy="201168"/>
+          </a:xfrm>
+          <a:prstGeom prst="rect">
+            <a:avLst/>
+          </a:prstGeom>
+          <a:noFill/>
+          <a:ln/>
+        </p:spPr>
+        <p:txBody>
+          <a:bodyPr wrap="square" lIns="0" tIns="0" rIns="0" bIns="0" rtlCol="0" anchor="t"/>
+          <a:lstStyle/>
+          <a:p>
+            <a:pPr algn="ctr" indent="0" marL="0">
+              <a:buNone/>
+            </a:pPr>
+            <a:r>
+              <a:rPr lang="en-US" sz="850" dirty="0">
+                <a:solidFill>
+                  <a:srgbClr val="475569"/>
+                </a:solidFill>
+                <a:latin typeface="Calibri" pitchFamily="34" charset="0"/>
+                <a:ea typeface="Calibri" pitchFamily="34" charset="-122"/>
+                <a:cs typeface="Calibri" pitchFamily="34" charset="-120"/>
+              </a:rPr>
+              <a:t>action happening now</a:t>
+            </a:r>
+            <a:endParaRPr lang="en-US" sz="850" dirty="0"/>
+          </a:p>
+        </p:txBody>
+      </p:sp>
+      <p:sp>
+        <p:nvSpPr>
+          <p:cNvPr id="25" name="Shape 23"/>
           <p:cNvSpPr/>
           <p:nvPr/>
         </p:nvSpPr>
@@ -27368,7 +29099,7 @@
       </p:sp>
       <p:sp>
         <p:nvSpPr>
-          <p:cNvPr id="23" name="Text 21"/>
+          <p:cNvPr id="26" name="Text 24"/>
           <p:cNvSpPr/>
           <p:nvPr/>
         </p:nvSpPr>
@@ -27407,7 +29138,7 @@
       </p:sp>
       <p:sp>
         <p:nvSpPr>
-          <p:cNvPr id="24" name="Shape 22"/>
+          <p:cNvPr id="27" name="Shape 25"/>
           <p:cNvSpPr/>
           <p:nvPr/>
         </p:nvSpPr>
@@ -27434,14 +29165,14 @@
       </p:sp>
       <p:sp>
         <p:nvSpPr>
-          <p:cNvPr id="25" name="Shape 23"/>
-          <p:cNvSpPr/>
-          <p:nvPr/>
-        </p:nvSpPr>
-        <p:spPr>
-          <a:xfrm>
-            <a:off x="2313432" y="3364992"/>
-            <a:ext cx="1645920" cy="475488"/>
+          <p:cNvPr id="28" name="Shape 26"/>
+          <p:cNvSpPr/>
+          <p:nvPr/>
+        </p:nvSpPr>
+        <p:spPr>
+          <a:xfrm>
+            <a:off x="1975104" y="3364992"/>
+            <a:ext cx="1554480" cy="475488"/>
           </a:xfrm>
           <a:prstGeom prst="rect">
             <a:avLst>
@@ -27461,14 +29192,14 @@
       </p:sp>
       <p:sp>
         <p:nvSpPr>
-          <p:cNvPr id="26" name="Text 24"/>
-          <p:cNvSpPr/>
-          <p:nvPr/>
-        </p:nvSpPr>
-        <p:spPr>
-          <a:xfrm>
-            <a:off x="2313432" y="3364992"/>
-            <a:ext cx="1645920" cy="475488"/>
+          <p:cNvPr id="29" name="Text 27"/>
+          <p:cNvSpPr/>
+          <p:nvPr/>
+        </p:nvSpPr>
+        <p:spPr>
+          <a:xfrm>
+            <a:off x="1975104" y="3364992"/>
+            <a:ext cx="1554480" cy="475488"/>
           </a:xfrm>
           <a:prstGeom prst="rect">
             <a:avLst/>
@@ -27500,14 +29231,14 @@
       </p:sp>
       <p:sp>
         <p:nvSpPr>
-          <p:cNvPr id="27" name="Text 25"/>
-          <p:cNvSpPr/>
-          <p:nvPr/>
-        </p:nvSpPr>
-        <p:spPr>
-          <a:xfrm>
-            <a:off x="3959352" y="3364992"/>
-            <a:ext cx="411480" cy="475488"/>
+          <p:cNvPr id="30" name="Text 28"/>
+          <p:cNvSpPr/>
+          <p:nvPr/>
+        </p:nvSpPr>
+        <p:spPr>
+          <a:xfrm>
+            <a:off x="3529584" y="3364992"/>
+            <a:ext cx="73152" cy="475488"/>
           </a:xfrm>
           <a:prstGeom prst="rect">
             <a:avLst/>
@@ -27539,14 +29270,14 @@
       </p:sp>
       <p:sp>
         <p:nvSpPr>
-          <p:cNvPr id="28" name="Shape 26"/>
-          <p:cNvSpPr/>
-          <p:nvPr/>
-        </p:nvSpPr>
-        <p:spPr>
-          <a:xfrm>
-            <a:off x="4370832" y="3364992"/>
-            <a:ext cx="1645920" cy="475488"/>
+          <p:cNvPr id="31" name="Shape 29"/>
+          <p:cNvSpPr/>
+          <p:nvPr/>
+        </p:nvSpPr>
+        <p:spPr>
+          <a:xfrm>
+            <a:off x="3602736" y="3364992"/>
+            <a:ext cx="1554480" cy="475488"/>
           </a:xfrm>
           <a:prstGeom prst="rect">
             <a:avLst>
@@ -27566,14 +29297,14 @@
       </p:sp>
       <p:sp>
         <p:nvSpPr>
-          <p:cNvPr id="29" name="Text 27"/>
-          <p:cNvSpPr/>
-          <p:nvPr/>
-        </p:nvSpPr>
-        <p:spPr>
-          <a:xfrm>
-            <a:off x="4370832" y="3364992"/>
-            <a:ext cx="1645920" cy="475488"/>
+          <p:cNvPr id="32" name="Text 30"/>
+          <p:cNvSpPr/>
+          <p:nvPr/>
+        </p:nvSpPr>
+        <p:spPr>
+          <a:xfrm>
+            <a:off x="3602736" y="3364992"/>
+            <a:ext cx="1554480" cy="475488"/>
           </a:xfrm>
           <a:prstGeom prst="rect">
             <a:avLst/>
@@ -27605,14 +29336,14 @@
       </p:sp>
       <p:sp>
         <p:nvSpPr>
-          <p:cNvPr id="30" name="Text 28"/>
-          <p:cNvSpPr/>
-          <p:nvPr/>
-        </p:nvSpPr>
-        <p:spPr>
-          <a:xfrm>
-            <a:off x="6016752" y="3364992"/>
-            <a:ext cx="411480" cy="475488"/>
+          <p:cNvPr id="33" name="Text 31"/>
+          <p:cNvSpPr/>
+          <p:nvPr/>
+        </p:nvSpPr>
+        <p:spPr>
+          <a:xfrm>
+            <a:off x="5157216" y="3364992"/>
+            <a:ext cx="73152" cy="475488"/>
           </a:xfrm>
           <a:prstGeom prst="rect">
             <a:avLst/>
@@ -27644,14 +29375,14 @@
       </p:sp>
       <p:sp>
         <p:nvSpPr>
-          <p:cNvPr id="31" name="Shape 29"/>
-          <p:cNvSpPr/>
-          <p:nvPr/>
-        </p:nvSpPr>
-        <p:spPr>
-          <a:xfrm>
-            <a:off x="6428232" y="3364992"/>
-            <a:ext cx="1645920" cy="475488"/>
+          <p:cNvPr id="34" name="Shape 32"/>
+          <p:cNvSpPr/>
+          <p:nvPr/>
+        </p:nvSpPr>
+        <p:spPr>
+          <a:xfrm>
+            <a:off x="5230368" y="3364992"/>
+            <a:ext cx="1554480" cy="475488"/>
           </a:xfrm>
           <a:prstGeom prst="rect">
             <a:avLst>
@@ -27671,14 +29402,14 @@
       </p:sp>
       <p:sp>
         <p:nvSpPr>
-          <p:cNvPr id="32" name="Text 30"/>
-          <p:cNvSpPr/>
-          <p:nvPr/>
-        </p:nvSpPr>
-        <p:spPr>
-          <a:xfrm>
-            <a:off x="6428232" y="3364992"/>
-            <a:ext cx="1645920" cy="475488"/>
+          <p:cNvPr id="35" name="Text 33"/>
+          <p:cNvSpPr/>
+          <p:nvPr/>
+        </p:nvSpPr>
+        <p:spPr>
+          <a:xfrm>
+            <a:off x="5230368" y="3364992"/>
+            <a:ext cx="1554480" cy="475488"/>
           </a:xfrm>
           <a:prstGeom prst="rect">
             <a:avLst/>
@@ -27710,7 +29441,112 @@
       </p:sp>
       <p:sp>
         <p:nvSpPr>
-          <p:cNvPr id="33" name="Shape 31"/>
+          <p:cNvPr id="36" name="Text 34"/>
+          <p:cNvSpPr/>
+          <p:nvPr/>
+        </p:nvSpPr>
+        <p:spPr>
+          <a:xfrm>
+            <a:off x="6784848" y="3364992"/>
+            <a:ext cx="73152" cy="475488"/>
+          </a:xfrm>
+          <a:prstGeom prst="rect">
+            <a:avLst/>
+          </a:prstGeom>
+          <a:noFill/>
+          <a:ln/>
+        </p:spPr>
+        <p:txBody>
+          <a:bodyPr wrap="square" lIns="0" tIns="0" rIns="0" bIns="0" rtlCol="0" anchor="ctr"/>
+          <a:lstStyle/>
+          <a:p>
+            <a:pPr algn="ctr" indent="0" marL="0">
+              <a:buNone/>
+            </a:pPr>
+            <a:r>
+              <a:rPr lang="en-US" sz="1600" b="1" dirty="0">
+                <a:solidFill>
+                  <a:srgbClr val="0D9488"/>
+                </a:solidFill>
+                <a:latin typeface="Trebuchet MS" pitchFamily="34" charset="0"/>
+                <a:ea typeface="Trebuchet MS" pitchFamily="34" charset="-122"/>
+                <a:cs typeface="Trebuchet MS" pitchFamily="34" charset="-120"/>
+              </a:rPr>
+              <a:t>·</a:t>
+            </a:r>
+            <a:endParaRPr lang="en-US" sz="1600" dirty="0"/>
+          </a:p>
+        </p:txBody>
+      </p:sp>
+      <p:sp>
+        <p:nvSpPr>
+          <p:cNvPr id="37" name="Shape 35"/>
+          <p:cNvSpPr/>
+          <p:nvPr/>
+        </p:nvSpPr>
+        <p:spPr>
+          <a:xfrm>
+            <a:off x="6858000" y="3364992"/>
+            <a:ext cx="1554480" cy="475488"/>
+          </a:xfrm>
+          <a:prstGeom prst="rect">
+            <a:avLst>
+              <a:gd name="adj" fmla="val 9615"/>
+            </a:avLst>
+          </a:prstGeom>
+          <a:solidFill>
+            <a:srgbClr val="FFFFFF"/>
+          </a:solidFill>
+          <a:ln w="12700">
+            <a:solidFill>
+              <a:srgbClr val="0D9488"/>
+            </a:solidFill>
+            <a:prstDash val="solid"/>
+          </a:ln>
+        </p:spPr>
+      </p:sp>
+      <p:sp>
+        <p:nvSpPr>
+          <p:cNvPr id="38" name="Text 36"/>
+          <p:cNvSpPr/>
+          <p:nvPr/>
+        </p:nvSpPr>
+        <p:spPr>
+          <a:xfrm>
+            <a:off x="6858000" y="3364992"/>
+            <a:ext cx="1554480" cy="475488"/>
+          </a:xfrm>
+          <a:prstGeom prst="rect">
+            <a:avLst/>
+          </a:prstGeom>
+          <a:noFill/>
+          <a:ln/>
+        </p:spPr>
+        <p:txBody>
+          <a:bodyPr wrap="square" lIns="0" tIns="0" rIns="0" bIns="0" rtlCol="0" anchor="ctr"/>
+          <a:lstStyle/>
+          <a:p>
+            <a:pPr algn="ctr" indent="0" marL="0">
+              <a:buNone/>
+            </a:pPr>
+            <a:r>
+              <a:rPr lang="en-US" sz="1400" b="1" dirty="0">
+                <a:solidFill>
+                  <a:srgbClr val="0D9488"/>
+                </a:solidFill>
+                <a:latin typeface="Trebuchet MS" pitchFamily="34" charset="0"/>
+                <a:ea typeface="Trebuchet MS" pitchFamily="34" charset="-122"/>
+                <a:cs typeface="Trebuchet MS" pitchFamily="34" charset="-120"/>
+              </a:rPr>
+              <a:t>ing</a:t>
+            </a:r>
+            <a:endParaRPr lang="en-US" sz="1400" dirty="0"/>
+          </a:p>
+        </p:txBody>
+      </p:sp>
+      <p:sp>
+        <p:nvSpPr>
+          <p:cNvPr id="39" name="Shape 37"/>
           <p:cNvSpPr/>
           <p:nvPr/>
         </p:nvSpPr>
@@ -27737,7 +29573,7 @@
       </p:sp>
       <p:sp>
         <p:nvSpPr>
-          <p:cNvPr id="34" name="Text 32"/>
+          <p:cNvPr id="40" name="Text 38"/>
           <p:cNvSpPr/>
           <p:nvPr/>
         </p:nvSpPr>
@@ -27776,7 +29612,7 @@
       </p:sp>
       <p:sp>
         <p:nvSpPr>
-          <p:cNvPr id="35" name="Shape 33"/>
+          <p:cNvPr id="41" name="Shape 39"/>
           <p:cNvSpPr/>
           <p:nvPr/>
         </p:nvSpPr>
@@ -27803,14 +29639,14 @@
       </p:sp>
       <p:sp>
         <p:nvSpPr>
-          <p:cNvPr id="36" name="Shape 34"/>
-          <p:cNvSpPr/>
-          <p:nvPr/>
-        </p:nvSpPr>
-        <p:spPr>
-          <a:xfrm>
-            <a:off x="2023872" y="4169664"/>
-            <a:ext cx="685800" cy="475488"/>
+          <p:cNvPr id="42" name="Shape 40"/>
+          <p:cNvSpPr/>
+          <p:nvPr/>
+        </p:nvSpPr>
+        <p:spPr>
+          <a:xfrm>
+            <a:off x="1951828" y="4169664"/>
+            <a:ext cx="603504" cy="475488"/>
           </a:xfrm>
           <a:prstGeom prst="rect">
             <a:avLst>
@@ -27830,14 +29666,14 @@
       </p:sp>
       <p:sp>
         <p:nvSpPr>
-          <p:cNvPr id="37" name="Text 35"/>
-          <p:cNvSpPr/>
-          <p:nvPr/>
-        </p:nvSpPr>
-        <p:spPr>
-          <a:xfrm>
-            <a:off x="2023872" y="4169664"/>
-            <a:ext cx="685800" cy="475488"/>
+          <p:cNvPr id="43" name="Text 41"/>
+          <p:cNvSpPr/>
+          <p:nvPr/>
+        </p:nvSpPr>
+        <p:spPr>
+          <a:xfrm>
+            <a:off x="1951828" y="4169664"/>
+            <a:ext cx="603504" cy="475488"/>
           </a:xfrm>
           <a:prstGeom prst="rect">
             <a:avLst/>
@@ -27869,14 +29705,14 @@
       </p:sp>
       <p:sp>
         <p:nvSpPr>
-          <p:cNvPr id="38" name="Shape 36"/>
-          <p:cNvSpPr/>
-          <p:nvPr/>
-        </p:nvSpPr>
-        <p:spPr>
-          <a:xfrm>
-            <a:off x="2831592" y="4169664"/>
-            <a:ext cx="685800" cy="475488"/>
+          <p:cNvPr id="44" name="Shape 42"/>
+          <p:cNvSpPr/>
+          <p:nvPr/>
+        </p:nvSpPr>
+        <p:spPr>
+          <a:xfrm>
+            <a:off x="2605209" y="4169664"/>
+            <a:ext cx="603504" cy="475488"/>
           </a:xfrm>
           <a:prstGeom prst="rect">
             <a:avLst>
@@ -27896,14 +29732,14 @@
       </p:sp>
       <p:sp>
         <p:nvSpPr>
-          <p:cNvPr id="39" name="Text 37"/>
-          <p:cNvSpPr/>
-          <p:nvPr/>
-        </p:nvSpPr>
-        <p:spPr>
-          <a:xfrm>
-            <a:off x="2831592" y="4169664"/>
-            <a:ext cx="685800" cy="475488"/>
+          <p:cNvPr id="45" name="Text 43"/>
+          <p:cNvSpPr/>
+          <p:nvPr/>
+        </p:nvSpPr>
+        <p:spPr>
+          <a:xfrm>
+            <a:off x="2605209" y="4169664"/>
+            <a:ext cx="603504" cy="475488"/>
           </a:xfrm>
           <a:prstGeom prst="rect">
             <a:avLst/>
@@ -27935,14 +29771,14 @@
       </p:sp>
       <p:sp>
         <p:nvSpPr>
-          <p:cNvPr id="40" name="Shape 38"/>
-          <p:cNvSpPr/>
-          <p:nvPr/>
-        </p:nvSpPr>
-        <p:spPr>
-          <a:xfrm>
-            <a:off x="3639312" y="4169664"/>
-            <a:ext cx="685800" cy="475488"/>
+          <p:cNvPr id="46" name="Shape 44"/>
+          <p:cNvSpPr/>
+          <p:nvPr/>
+        </p:nvSpPr>
+        <p:spPr>
+          <a:xfrm>
+            <a:off x="3258589" y="4169664"/>
+            <a:ext cx="603504" cy="475488"/>
           </a:xfrm>
           <a:prstGeom prst="rect">
             <a:avLst>
@@ -27962,14 +29798,14 @@
       </p:sp>
       <p:sp>
         <p:nvSpPr>
-          <p:cNvPr id="41" name="Text 39"/>
-          <p:cNvSpPr/>
-          <p:nvPr/>
-        </p:nvSpPr>
-        <p:spPr>
-          <a:xfrm>
-            <a:off x="3639312" y="4169664"/>
-            <a:ext cx="685800" cy="475488"/>
+          <p:cNvPr id="47" name="Text 45"/>
+          <p:cNvSpPr/>
+          <p:nvPr/>
+        </p:nvSpPr>
+        <p:spPr>
+          <a:xfrm>
+            <a:off x="3258589" y="4169664"/>
+            <a:ext cx="603504" cy="475488"/>
           </a:xfrm>
           <a:prstGeom prst="rect">
             <a:avLst/>
@@ -28001,14 +29837,14 @@
       </p:sp>
       <p:sp>
         <p:nvSpPr>
-          <p:cNvPr id="42" name="Shape 40"/>
-          <p:cNvSpPr/>
-          <p:nvPr/>
-        </p:nvSpPr>
-        <p:spPr>
-          <a:xfrm>
-            <a:off x="4447032" y="4169664"/>
-            <a:ext cx="685800" cy="475488"/>
+          <p:cNvPr id="48" name="Shape 46"/>
+          <p:cNvSpPr/>
+          <p:nvPr/>
+        </p:nvSpPr>
+        <p:spPr>
+          <a:xfrm>
+            <a:off x="3911969" y="4169664"/>
+            <a:ext cx="603504" cy="475488"/>
           </a:xfrm>
           <a:prstGeom prst="rect">
             <a:avLst>
@@ -28028,14 +29864,14 @@
       </p:sp>
       <p:sp>
         <p:nvSpPr>
-          <p:cNvPr id="43" name="Text 41"/>
-          <p:cNvSpPr/>
-          <p:nvPr/>
-        </p:nvSpPr>
-        <p:spPr>
-          <a:xfrm>
-            <a:off x="4447032" y="4169664"/>
-            <a:ext cx="685800" cy="475488"/>
+          <p:cNvPr id="49" name="Text 47"/>
+          <p:cNvSpPr/>
+          <p:nvPr/>
+        </p:nvSpPr>
+        <p:spPr>
+          <a:xfrm>
+            <a:off x="3911969" y="4169664"/>
+            <a:ext cx="603504" cy="475488"/>
           </a:xfrm>
           <a:prstGeom prst="rect">
             <a:avLst/>
@@ -28067,14 +29903,14 @@
       </p:sp>
       <p:sp>
         <p:nvSpPr>
-          <p:cNvPr id="44" name="Shape 42"/>
-          <p:cNvSpPr/>
-          <p:nvPr/>
-        </p:nvSpPr>
-        <p:spPr>
-          <a:xfrm>
-            <a:off x="5254752" y="4169664"/>
-            <a:ext cx="685800" cy="475488"/>
+          <p:cNvPr id="50" name="Shape 48"/>
+          <p:cNvSpPr/>
+          <p:nvPr/>
+        </p:nvSpPr>
+        <p:spPr>
+          <a:xfrm>
+            <a:off x="4565350" y="4169664"/>
+            <a:ext cx="603504" cy="475488"/>
           </a:xfrm>
           <a:prstGeom prst="rect">
             <a:avLst>
@@ -28094,14 +29930,14 @@
       </p:sp>
       <p:sp>
         <p:nvSpPr>
-          <p:cNvPr id="45" name="Text 43"/>
-          <p:cNvSpPr/>
-          <p:nvPr/>
-        </p:nvSpPr>
-        <p:spPr>
-          <a:xfrm>
-            <a:off x="5254752" y="4169664"/>
-            <a:ext cx="685800" cy="475488"/>
+          <p:cNvPr id="51" name="Text 49"/>
+          <p:cNvSpPr/>
+          <p:nvPr/>
+        </p:nvSpPr>
+        <p:spPr>
+          <a:xfrm>
+            <a:off x="4565350" y="4169664"/>
+            <a:ext cx="603504" cy="475488"/>
           </a:xfrm>
           <a:prstGeom prst="rect">
             <a:avLst/>
@@ -28133,14 +29969,14 @@
       </p:sp>
       <p:sp>
         <p:nvSpPr>
-          <p:cNvPr id="46" name="Shape 44"/>
-          <p:cNvSpPr/>
-          <p:nvPr/>
-        </p:nvSpPr>
-        <p:spPr>
-          <a:xfrm>
-            <a:off x="6062472" y="4169664"/>
-            <a:ext cx="685800" cy="475488"/>
+          <p:cNvPr id="52" name="Shape 50"/>
+          <p:cNvSpPr/>
+          <p:nvPr/>
+        </p:nvSpPr>
+        <p:spPr>
+          <a:xfrm>
+            <a:off x="5218730" y="4169664"/>
+            <a:ext cx="603504" cy="475488"/>
           </a:xfrm>
           <a:prstGeom prst="rect">
             <a:avLst>
@@ -28160,14 +29996,14 @@
       </p:sp>
       <p:sp>
         <p:nvSpPr>
-          <p:cNvPr id="47" name="Text 45"/>
-          <p:cNvSpPr/>
-          <p:nvPr/>
-        </p:nvSpPr>
-        <p:spPr>
-          <a:xfrm>
-            <a:off x="6062472" y="4169664"/>
-            <a:ext cx="685800" cy="475488"/>
+          <p:cNvPr id="53" name="Text 51"/>
+          <p:cNvSpPr/>
+          <p:nvPr/>
+        </p:nvSpPr>
+        <p:spPr>
+          <a:xfrm>
+            <a:off x="5218730" y="4169664"/>
+            <a:ext cx="603504" cy="475488"/>
           </a:xfrm>
           <a:prstGeom prst="rect">
             <a:avLst/>
@@ -28199,14 +30035,14 @@
       </p:sp>
       <p:sp>
         <p:nvSpPr>
-          <p:cNvPr id="48" name="Shape 46"/>
-          <p:cNvSpPr/>
-          <p:nvPr/>
-        </p:nvSpPr>
-        <p:spPr>
-          <a:xfrm>
-            <a:off x="6870192" y="4169664"/>
-            <a:ext cx="685800" cy="475488"/>
+          <p:cNvPr id="54" name="Shape 52"/>
+          <p:cNvSpPr/>
+          <p:nvPr/>
+        </p:nvSpPr>
+        <p:spPr>
+          <a:xfrm>
+            <a:off x="5872111" y="4169664"/>
+            <a:ext cx="603504" cy="475488"/>
           </a:xfrm>
           <a:prstGeom prst="rect">
             <a:avLst>
@@ -28226,14 +30062,14 @@
       </p:sp>
       <p:sp>
         <p:nvSpPr>
-          <p:cNvPr id="49" name="Text 47"/>
-          <p:cNvSpPr/>
-          <p:nvPr/>
-        </p:nvSpPr>
-        <p:spPr>
-          <a:xfrm>
-            <a:off x="6870192" y="4169664"/>
-            <a:ext cx="685800" cy="475488"/>
+          <p:cNvPr id="55" name="Text 53"/>
+          <p:cNvSpPr/>
+          <p:nvPr/>
+        </p:nvSpPr>
+        <p:spPr>
+          <a:xfrm>
+            <a:off x="5872111" y="4169664"/>
+            <a:ext cx="603504" cy="475488"/>
           </a:xfrm>
           <a:prstGeom prst="rect">
             <a:avLst/>
@@ -28265,14 +30101,14 @@
       </p:sp>
       <p:sp>
         <p:nvSpPr>
-          <p:cNvPr id="50" name="Shape 48"/>
-          <p:cNvSpPr/>
-          <p:nvPr/>
-        </p:nvSpPr>
-        <p:spPr>
-          <a:xfrm>
-            <a:off x="7677912" y="4169664"/>
-            <a:ext cx="685800" cy="475488"/>
+          <p:cNvPr id="56" name="Shape 54"/>
+          <p:cNvSpPr/>
+          <p:nvPr/>
+        </p:nvSpPr>
+        <p:spPr>
+          <a:xfrm>
+            <a:off x="6525491" y="4169664"/>
+            <a:ext cx="603504" cy="475488"/>
           </a:xfrm>
           <a:prstGeom prst="rect">
             <a:avLst>
@@ -28292,14 +30128,14 @@
       </p:sp>
       <p:sp>
         <p:nvSpPr>
-          <p:cNvPr id="51" name="Text 49"/>
-          <p:cNvSpPr/>
-          <p:nvPr/>
-        </p:nvSpPr>
-        <p:spPr>
-          <a:xfrm>
-            <a:off x="7677912" y="4169664"/>
-            <a:ext cx="685800" cy="475488"/>
+          <p:cNvPr id="57" name="Text 55"/>
+          <p:cNvSpPr/>
+          <p:nvPr/>
+        </p:nvSpPr>
+        <p:spPr>
+          <a:xfrm>
+            <a:off x="6525491" y="4169664"/>
+            <a:ext cx="603504" cy="475488"/>
           </a:xfrm>
           <a:prstGeom prst="rect">
             <a:avLst/>
@@ -28324,6 +30160,138 @@
                 <a:cs typeface="Trebuchet MS" pitchFamily="34" charset="-120"/>
               </a:rPr>
               <a:t>t</a:t>
+            </a:r>
+            <a:endParaRPr lang="en-US" sz="900" dirty="0"/>
+          </a:p>
+        </p:txBody>
+      </p:sp>
+      <p:sp>
+        <p:nvSpPr>
+          <p:cNvPr id="58" name="Shape 56"/>
+          <p:cNvSpPr/>
+          <p:nvPr/>
+        </p:nvSpPr>
+        <p:spPr>
+          <a:xfrm>
+            <a:off x="7178871" y="4169664"/>
+            <a:ext cx="603504" cy="475488"/>
+          </a:xfrm>
+          <a:prstGeom prst="rect">
+            <a:avLst>
+              <a:gd name="adj" fmla="val 7692"/>
+            </a:avLst>
+          </a:prstGeom>
+          <a:solidFill>
+            <a:srgbClr val="FFFFFF"/>
+          </a:solidFill>
+          <a:ln w="12700">
+            <a:solidFill>
+              <a:srgbClr val="DB2777"/>
+            </a:solidFill>
+            <a:prstDash val="solid"/>
+          </a:ln>
+        </p:spPr>
+      </p:sp>
+      <p:sp>
+        <p:nvSpPr>
+          <p:cNvPr id="59" name="Text 57"/>
+          <p:cNvSpPr/>
+          <p:nvPr/>
+        </p:nvSpPr>
+        <p:spPr>
+          <a:xfrm>
+            <a:off x="7178871" y="4169664"/>
+            <a:ext cx="603504" cy="475488"/>
+          </a:xfrm>
+          <a:prstGeom prst="rect">
+            <a:avLst/>
+          </a:prstGeom>
+          <a:noFill/>
+          <a:ln/>
+        </p:spPr>
+        <p:txBody>
+          <a:bodyPr wrap="square" lIns="0" tIns="0" rIns="0" bIns="0" rtlCol="0" anchor="ctr"/>
+          <a:lstStyle/>
+          <a:p>
+            <a:pPr algn="ctr" indent="0" marL="0">
+              <a:buNone/>
+            </a:pPr>
+            <a:r>
+              <a:rPr lang="en-US" sz="900" b="1" dirty="0">
+                <a:solidFill>
+                  <a:srgbClr val="9D174D"/>
+                </a:solidFill>
+                <a:latin typeface="Trebuchet MS" pitchFamily="34" charset="0"/>
+                <a:ea typeface="Trebuchet MS" pitchFamily="34" charset="-122"/>
+                <a:cs typeface="Trebuchet MS" pitchFamily="34" charset="-120"/>
+              </a:rPr>
+              <a:t>i</a:t>
+            </a:r>
+            <a:endParaRPr lang="en-US" sz="900" dirty="0"/>
+          </a:p>
+        </p:txBody>
+      </p:sp>
+      <p:sp>
+        <p:nvSpPr>
+          <p:cNvPr id="60" name="Shape 58"/>
+          <p:cNvSpPr/>
+          <p:nvPr/>
+        </p:nvSpPr>
+        <p:spPr>
+          <a:xfrm>
+            <a:off x="7832252" y="4169664"/>
+            <a:ext cx="603504" cy="475488"/>
+          </a:xfrm>
+          <a:prstGeom prst="rect">
+            <a:avLst>
+              <a:gd name="adj" fmla="val 7692"/>
+            </a:avLst>
+          </a:prstGeom>
+          <a:solidFill>
+            <a:srgbClr val="FFFFFF"/>
+          </a:solidFill>
+          <a:ln w="12700">
+            <a:solidFill>
+              <a:srgbClr val="DB2777"/>
+            </a:solidFill>
+            <a:prstDash val="solid"/>
+          </a:ln>
+        </p:spPr>
+      </p:sp>
+      <p:sp>
+        <p:nvSpPr>
+          <p:cNvPr id="61" name="Text 59"/>
+          <p:cNvSpPr/>
+          <p:nvPr/>
+        </p:nvSpPr>
+        <p:spPr>
+          <a:xfrm>
+            <a:off x="7832252" y="4169664"/>
+            <a:ext cx="603504" cy="475488"/>
+          </a:xfrm>
+          <a:prstGeom prst="rect">
+            <a:avLst/>
+          </a:prstGeom>
+          <a:noFill/>
+          <a:ln/>
+        </p:spPr>
+        <p:txBody>
+          <a:bodyPr wrap="square" lIns="0" tIns="0" rIns="0" bIns="0" rtlCol="0" anchor="ctr"/>
+          <a:lstStyle/>
+          <a:p>
+            <a:pPr algn="ctr" indent="0" marL="0">
+              <a:buNone/>
+            </a:pPr>
+            <a:r>
+              <a:rPr lang="en-US" sz="900" b="1" dirty="0">
+                <a:solidFill>
+                  <a:srgbClr val="9D174D"/>
+                </a:solidFill>
+                <a:latin typeface="Trebuchet MS" pitchFamily="34" charset="0"/>
+                <a:ea typeface="Trebuchet MS" pitchFamily="34" charset="-122"/>
+                <a:cs typeface="Trebuchet MS" pitchFamily="34" charset="-120"/>
+              </a:rPr>
+              <a:t>ng</a:t>
             </a:r>
             <a:endParaRPr lang="en-US" sz="900" dirty="0"/>
           </a:p>
@@ -28754,7 +30722,7 @@
                 <a:ea typeface="Trebuchet MS" pitchFamily="34" charset="-122"/>
                 <a:cs typeface="Trebuchet MS" pitchFamily="34" charset="-120"/>
               </a:rPr>
-              <a:t>investment</a:t>
+              <a:t>investing</a:t>
             </a:r>
             <a:endParaRPr lang="en-US" sz="2800" dirty="0"/>
           </a:p>
@@ -29581,7 +31549,7 @@
                 <a:ea typeface="Trebuchet MS" pitchFamily="34" charset="-122"/>
                 <a:cs typeface="Trebuchet MS" pitchFamily="34" charset="-120"/>
               </a:rPr>
-              <a:t>investment</a:t>
+              <a:t>investing</a:t>
             </a:r>
             <a:endParaRPr lang="en-US" sz="2800" dirty="0"/>
           </a:p>
@@ -29759,7 +31727,7 @@
                 <a:ea typeface="Calibri" pitchFamily="34" charset="-122"/>
                 <a:cs typeface="Calibri" pitchFamily="34" charset="-120"/>
               </a:rPr>
-              <a:t>to put in / to clothe</a:t>
+              <a:t>to put money or effort in</a:t>
             </a:r>
             <a:endParaRPr lang="en-US" sz="850" dirty="0"/>
           </a:p>
@@ -29832,7 +31800,7 @@
                 <a:ea typeface="Trebuchet MS" pitchFamily="34" charset="-122"/>
                 <a:cs typeface="Trebuchet MS" pitchFamily="34" charset="-120"/>
               </a:rPr>
-              <a:t>ment</a:t>
+              <a:t>ing</a:t>
             </a:r>
             <a:endParaRPr lang="en-US" sz="1300" dirty="0"/>
           </a:p>
@@ -29871,7 +31839,7 @@
                 <a:ea typeface="Calibri" pitchFamily="34" charset="-122"/>
                 <a:cs typeface="Calibri" pitchFamily="34" charset="-120"/>
               </a:rPr>
-              <a:t>result or action of</a:t>
+              <a:t>action happening now</a:t>
             </a:r>
             <a:endParaRPr lang="en-US" sz="850" dirty="0"/>
           </a:p>
@@ -30566,7 +32534,7 @@
                 <a:ea typeface="Trebuchet MS" pitchFamily="34" charset="-122"/>
                 <a:cs typeface="Trebuchet MS" pitchFamily="34" charset="-120"/>
               </a:rPr>
-              <a:t>investment</a:t>
+              <a:t>investing</a:t>
             </a:r>
             <a:endParaRPr lang="en-US" sz="2800" dirty="0"/>
           </a:p>
@@ -30744,7 +32712,7 @@
                 <a:ea typeface="Calibri" pitchFamily="34" charset="-122"/>
                 <a:cs typeface="Calibri" pitchFamily="34" charset="-120"/>
               </a:rPr>
-              <a:t>to put in / to clothe</a:t>
+              <a:t>to put money or effort in</a:t>
             </a:r>
             <a:endParaRPr lang="en-US" sz="850" dirty="0"/>
           </a:p>
@@ -30817,7 +32785,7 @@
                 <a:ea typeface="Trebuchet MS" pitchFamily="34" charset="-122"/>
                 <a:cs typeface="Trebuchet MS" pitchFamily="34" charset="-120"/>
               </a:rPr>
-              <a:t>ment</a:t>
+              <a:t>ing</a:t>
             </a:r>
             <a:endParaRPr lang="en-US" sz="1300" dirty="0"/>
           </a:p>
@@ -30856,7 +32824,7 @@
                 <a:ea typeface="Calibri" pitchFamily="34" charset="-122"/>
                 <a:cs typeface="Calibri" pitchFamily="34" charset="-120"/>
               </a:rPr>
-              <a:t>result or action of</a:t>
+              <a:t>action happening now</a:t>
             </a:r>
             <a:endParaRPr lang="en-US" sz="850" dirty="0"/>
           </a:p>
@@ -31225,7 +33193,7 @@
                 <a:ea typeface="Trebuchet MS" pitchFamily="34" charset="-122"/>
                 <a:cs typeface="Trebuchet MS" pitchFamily="34" charset="-120"/>
               </a:rPr>
-              <a:t>ment</a:t>
+              <a:t>ing</a:t>
             </a:r>
             <a:endParaRPr lang="en-US" sz="1400" dirty="0"/>
           </a:p>
@@ -31788,7 +33756,7 @@
                 <a:ea typeface="Trebuchet MS" pitchFamily="34" charset="-122"/>
                 <a:cs typeface="Trebuchet MS" pitchFamily="34" charset="-120"/>
               </a:rPr>
-              <a:t>investment</a:t>
+              <a:t>investing</a:t>
             </a:r>
             <a:endParaRPr lang="en-US" sz="2800" dirty="0"/>
           </a:p>
@@ -31966,7 +33934,7 @@
                 <a:ea typeface="Calibri" pitchFamily="34" charset="-122"/>
                 <a:cs typeface="Calibri" pitchFamily="34" charset="-120"/>
               </a:rPr>
-              <a:t>to put in / to clothe</a:t>
+              <a:t>to put money or effort in</a:t>
             </a:r>
             <a:endParaRPr lang="en-US" sz="850" dirty="0"/>
           </a:p>
@@ -32039,7 +34007,7 @@
                 <a:ea typeface="Trebuchet MS" pitchFamily="34" charset="-122"/>
                 <a:cs typeface="Trebuchet MS" pitchFamily="34" charset="-120"/>
               </a:rPr>
-              <a:t>ment</a:t>
+              <a:t>ing</a:t>
             </a:r>
             <a:endParaRPr lang="en-US" sz="1300" dirty="0"/>
           </a:p>
@@ -32078,7 +34046,7 @@
                 <a:ea typeface="Calibri" pitchFamily="34" charset="-122"/>
                 <a:cs typeface="Calibri" pitchFamily="34" charset="-120"/>
               </a:rPr>
-              <a:t>result or action of</a:t>
+              <a:t>action happening now</a:t>
             </a:r>
             <a:endParaRPr lang="en-US" sz="850" dirty="0"/>
           </a:p>
@@ -32447,7 +34415,7 @@
                 <a:ea typeface="Trebuchet MS" pitchFamily="34" charset="-122"/>
                 <a:cs typeface="Trebuchet MS" pitchFamily="34" charset="-120"/>
               </a:rPr>
-              <a:t>ment</a:t>
+              <a:t>ing</a:t>
             </a:r>
             <a:endParaRPr lang="en-US" sz="1400" dirty="0"/>
           </a:p>
@@ -32554,8 +34522,8 @@
         </p:nvSpPr>
         <p:spPr>
           <a:xfrm>
-            <a:off x="1951828" y="4169664"/>
-            <a:ext cx="603504" cy="475488"/>
+            <a:off x="2023872" y="4169664"/>
+            <a:ext cx="685800" cy="475488"/>
           </a:xfrm>
           <a:prstGeom prst="rect">
             <a:avLst>
@@ -32581,8 +34549,8 @@
         </p:nvSpPr>
         <p:spPr>
           <a:xfrm>
-            <a:off x="1951828" y="4169664"/>
-            <a:ext cx="603504" cy="475488"/>
+            <a:off x="2023872" y="4169664"/>
+            <a:ext cx="685800" cy="475488"/>
           </a:xfrm>
           <a:prstGeom prst="rect">
             <a:avLst/>
@@ -32620,8 +34588,8 @@
         </p:nvSpPr>
         <p:spPr>
           <a:xfrm>
-            <a:off x="2605209" y="4169664"/>
-            <a:ext cx="603504" cy="475488"/>
+            <a:off x="2831592" y="4169664"/>
+            <a:ext cx="685800" cy="475488"/>
           </a:xfrm>
           <a:prstGeom prst="rect">
             <a:avLst>
@@ -32647,8 +34615,8 @@
         </p:nvSpPr>
         <p:spPr>
           <a:xfrm>
-            <a:off x="2605209" y="4169664"/>
-            <a:ext cx="603504" cy="475488"/>
+            <a:off x="2831592" y="4169664"/>
+            <a:ext cx="685800" cy="475488"/>
           </a:xfrm>
           <a:prstGeom prst="rect">
             <a:avLst/>
@@ -32686,8 +34654,8 @@
         </p:nvSpPr>
         <p:spPr>
           <a:xfrm>
-            <a:off x="3258589" y="4169664"/>
-            <a:ext cx="603504" cy="475488"/>
+            <a:off x="3639312" y="4169664"/>
+            <a:ext cx="685800" cy="475488"/>
           </a:xfrm>
           <a:prstGeom prst="rect">
             <a:avLst>
@@ -32713,8 +34681,8 @@
         </p:nvSpPr>
         <p:spPr>
           <a:xfrm>
-            <a:off x="3258589" y="4169664"/>
-            <a:ext cx="603504" cy="475488"/>
+            <a:off x="3639312" y="4169664"/>
+            <a:ext cx="685800" cy="475488"/>
           </a:xfrm>
           <a:prstGeom prst="rect">
             <a:avLst/>
@@ -32752,8 +34720,8 @@
         </p:nvSpPr>
         <p:spPr>
           <a:xfrm>
-            <a:off x="3911969" y="4169664"/>
-            <a:ext cx="603504" cy="475488"/>
+            <a:off x="4447032" y="4169664"/>
+            <a:ext cx="685800" cy="475488"/>
           </a:xfrm>
           <a:prstGeom prst="rect">
             <a:avLst>
@@ -32779,8 +34747,8 @@
         </p:nvSpPr>
         <p:spPr>
           <a:xfrm>
-            <a:off x="3911969" y="4169664"/>
-            <a:ext cx="603504" cy="475488"/>
+            <a:off x="4447032" y="4169664"/>
+            <a:ext cx="685800" cy="475488"/>
           </a:xfrm>
           <a:prstGeom prst="rect">
             <a:avLst/>
@@ -32818,8 +34786,8 @@
         </p:nvSpPr>
         <p:spPr>
           <a:xfrm>
-            <a:off x="4565350" y="4169664"/>
-            <a:ext cx="603504" cy="475488"/>
+            <a:off x="5254752" y="4169664"/>
+            <a:ext cx="685800" cy="475488"/>
           </a:xfrm>
           <a:prstGeom prst="rect">
             <a:avLst>
@@ -32845,8 +34813,8 @@
         </p:nvSpPr>
         <p:spPr>
           <a:xfrm>
-            <a:off x="4565350" y="4169664"/>
-            <a:ext cx="603504" cy="475488"/>
+            <a:off x="5254752" y="4169664"/>
+            <a:ext cx="685800" cy="475488"/>
           </a:xfrm>
           <a:prstGeom prst="rect">
             <a:avLst/>
@@ -32884,8 +34852,8 @@
         </p:nvSpPr>
         <p:spPr>
           <a:xfrm>
-            <a:off x="5218730" y="4169664"/>
-            <a:ext cx="603504" cy="475488"/>
+            <a:off x="6062472" y="4169664"/>
+            <a:ext cx="685800" cy="475488"/>
           </a:xfrm>
           <a:prstGeom prst="rect">
             <a:avLst>
@@ -32911,8 +34879,8 @@
         </p:nvSpPr>
         <p:spPr>
           <a:xfrm>
-            <a:off x="5218730" y="4169664"/>
-            <a:ext cx="603504" cy="475488"/>
+            <a:off x="6062472" y="4169664"/>
+            <a:ext cx="685800" cy="475488"/>
           </a:xfrm>
           <a:prstGeom prst="rect">
             <a:avLst/>
@@ -32950,8 +34918,8 @@
         </p:nvSpPr>
         <p:spPr>
           <a:xfrm>
-            <a:off x="5872111" y="4169664"/>
-            <a:ext cx="603504" cy="475488"/>
+            <a:off x="6870192" y="4169664"/>
+            <a:ext cx="685800" cy="475488"/>
           </a:xfrm>
           <a:prstGeom prst="rect">
             <a:avLst>
@@ -32977,8 +34945,8 @@
         </p:nvSpPr>
         <p:spPr>
           <a:xfrm>
-            <a:off x="5872111" y="4169664"/>
-            <a:ext cx="603504" cy="475488"/>
+            <a:off x="6870192" y="4169664"/>
+            <a:ext cx="685800" cy="475488"/>
           </a:xfrm>
           <a:prstGeom prst="rect">
             <a:avLst/>
@@ -33002,7 +34970,7 @@
                 <a:ea typeface="Trebuchet MS" pitchFamily="34" charset="-122"/>
                 <a:cs typeface="Trebuchet MS" pitchFamily="34" charset="-120"/>
               </a:rPr>
-              <a:t>m</a:t>
+              <a:t>i</a:t>
             </a:r>
             <a:endParaRPr lang="en-US" sz="900" dirty="0"/>
           </a:p>
@@ -33016,8 +34984,8 @@
         </p:nvSpPr>
         <p:spPr>
           <a:xfrm>
-            <a:off x="6525491" y="4169664"/>
-            <a:ext cx="603504" cy="475488"/>
+            <a:off x="7677912" y="4169664"/>
+            <a:ext cx="685800" cy="475488"/>
           </a:xfrm>
           <a:prstGeom prst="rect">
             <a:avLst>
@@ -33043,8 +35011,8 @@
         </p:nvSpPr>
         <p:spPr>
           <a:xfrm>
-            <a:off x="6525491" y="4169664"/>
-            <a:ext cx="603504" cy="475488"/>
+            <a:off x="7677912" y="4169664"/>
+            <a:ext cx="685800" cy="475488"/>
           </a:xfrm>
           <a:prstGeom prst="rect">
             <a:avLst/>
@@ -33068,139 +35036,7 @@
                 <a:ea typeface="Trebuchet MS" pitchFamily="34" charset="-122"/>
                 <a:cs typeface="Trebuchet MS" pitchFamily="34" charset="-120"/>
               </a:rPr>
-              <a:t>e</a:t>
-            </a:r>
-            <a:endParaRPr lang="en-US" sz="900" dirty="0"/>
-          </a:p>
-        </p:txBody>
-      </p:sp>
-      <p:sp>
-        <p:nvSpPr>
-          <p:cNvPr id="52" name="Shape 50"/>
-          <p:cNvSpPr/>
-          <p:nvPr/>
-        </p:nvSpPr>
-        <p:spPr>
-          <a:xfrm>
-            <a:off x="7178871" y="4169664"/>
-            <a:ext cx="603504" cy="475488"/>
-          </a:xfrm>
-          <a:prstGeom prst="rect">
-            <a:avLst>
-              <a:gd name="adj" fmla="val 7692"/>
-            </a:avLst>
-          </a:prstGeom>
-          <a:solidFill>
-            <a:srgbClr val="FFFFFF"/>
-          </a:solidFill>
-          <a:ln w="12700">
-            <a:solidFill>
-              <a:srgbClr val="DB2777"/>
-            </a:solidFill>
-            <a:prstDash val="solid"/>
-          </a:ln>
-        </p:spPr>
-      </p:sp>
-      <p:sp>
-        <p:nvSpPr>
-          <p:cNvPr id="53" name="Text 51"/>
-          <p:cNvSpPr/>
-          <p:nvPr/>
-        </p:nvSpPr>
-        <p:spPr>
-          <a:xfrm>
-            <a:off x="7178871" y="4169664"/>
-            <a:ext cx="603504" cy="475488"/>
-          </a:xfrm>
-          <a:prstGeom prst="rect">
-            <a:avLst/>
-          </a:prstGeom>
-          <a:noFill/>
-          <a:ln/>
-        </p:spPr>
-        <p:txBody>
-          <a:bodyPr wrap="square" lIns="0" tIns="0" rIns="0" bIns="0" rtlCol="0" anchor="ctr"/>
-          <a:lstStyle/>
-          <a:p>
-            <a:pPr algn="ctr" indent="0" marL="0">
-              <a:buNone/>
-            </a:pPr>
-            <a:r>
-              <a:rPr lang="en-US" sz="900" b="1" dirty="0">
-                <a:solidFill>
-                  <a:srgbClr val="9D174D"/>
-                </a:solidFill>
-                <a:latin typeface="Trebuchet MS" pitchFamily="34" charset="0"/>
-                <a:ea typeface="Trebuchet MS" pitchFamily="34" charset="-122"/>
-                <a:cs typeface="Trebuchet MS" pitchFamily="34" charset="-120"/>
-              </a:rPr>
-              <a:t>n</a:t>
-            </a:r>
-            <a:endParaRPr lang="en-US" sz="900" dirty="0"/>
-          </a:p>
-        </p:txBody>
-      </p:sp>
-      <p:sp>
-        <p:nvSpPr>
-          <p:cNvPr id="54" name="Shape 52"/>
-          <p:cNvSpPr/>
-          <p:nvPr/>
-        </p:nvSpPr>
-        <p:spPr>
-          <a:xfrm>
-            <a:off x="7832252" y="4169664"/>
-            <a:ext cx="603504" cy="475488"/>
-          </a:xfrm>
-          <a:prstGeom prst="rect">
-            <a:avLst>
-              <a:gd name="adj" fmla="val 7692"/>
-            </a:avLst>
-          </a:prstGeom>
-          <a:solidFill>
-            <a:srgbClr val="FFFFFF"/>
-          </a:solidFill>
-          <a:ln w="12700">
-            <a:solidFill>
-              <a:srgbClr val="DB2777"/>
-            </a:solidFill>
-            <a:prstDash val="solid"/>
-          </a:ln>
-        </p:spPr>
-      </p:sp>
-      <p:sp>
-        <p:nvSpPr>
-          <p:cNvPr id="55" name="Text 53"/>
-          <p:cNvSpPr/>
-          <p:nvPr/>
-        </p:nvSpPr>
-        <p:spPr>
-          <a:xfrm>
-            <a:off x="7832252" y="4169664"/>
-            <a:ext cx="603504" cy="475488"/>
-          </a:xfrm>
-          <a:prstGeom prst="rect">
-            <a:avLst/>
-          </a:prstGeom>
-          <a:noFill/>
-          <a:ln/>
-        </p:spPr>
-        <p:txBody>
-          <a:bodyPr wrap="square" lIns="0" tIns="0" rIns="0" bIns="0" rtlCol="0" anchor="ctr"/>
-          <a:lstStyle/>
-          <a:p>
-            <a:pPr algn="ctr" indent="0" marL="0">
-              <a:buNone/>
-            </a:pPr>
-            <a:r>
-              <a:rPr lang="en-US" sz="900" b="1" dirty="0">
-                <a:solidFill>
-                  <a:srgbClr val="9D174D"/>
-                </a:solidFill>
-                <a:latin typeface="Trebuchet MS" pitchFamily="34" charset="0"/>
-                <a:ea typeface="Trebuchet MS" pitchFamily="34" charset="-122"/>
-                <a:cs typeface="Trebuchet MS" pitchFamily="34" charset="-120"/>
-              </a:rPr>
-              <a:t>t</a:t>
+              <a:t>ng</a:t>
             </a:r>
             <a:endParaRPr lang="en-US" sz="900" dirty="0"/>
           </a:p>
@@ -35154,7 +36990,7 @@
                 <a:ea typeface="Trebuchet MS" pitchFamily="34" charset="-122"/>
                 <a:cs typeface="Trebuchet MS" pitchFamily="34" charset="-120"/>
               </a:rPr>
-              <a:t>dis-</a:t>
+              <a:t>un-</a:t>
             </a:r>
             <a:endParaRPr lang="en-US" sz="1300" dirty="0"/>
           </a:p>
@@ -35460,7 +37296,7 @@
                 <a:ea typeface="Trebuchet MS" pitchFamily="34" charset="-122"/>
                 <a:cs typeface="Trebuchet MS" pitchFamily="34" charset="-120"/>
               </a:rPr>
-              <a:t>under-</a:t>
+              <a:t>mis-</a:t>
             </a:r>
             <a:endParaRPr lang="en-US" sz="1300" dirty="0"/>
           </a:p>
@@ -35613,7 +37449,7 @@
                 <a:ea typeface="Trebuchet MS" pitchFamily="34" charset="-122"/>
                 <a:cs typeface="Trebuchet MS" pitchFamily="34" charset="-120"/>
               </a:rPr>
-              <a:t>mis-</a:t>
+              <a:t>under-</a:t>
             </a:r>
             <a:endParaRPr lang="en-US" sz="1300" dirty="0"/>
           </a:p>
@@ -36269,7 +38105,7 @@
                 <a:ea typeface="Trebuchet MS" pitchFamily="34" charset="-122"/>
                 <a:cs typeface="Trebuchet MS" pitchFamily="34" charset="-120"/>
               </a:rPr>
-              <a:t>reinvestment</a:t>
+              <a:t>investigator</a:t>
             </a:r>
             <a:endParaRPr lang="en-US" sz="1200" dirty="0"/>
           </a:p>
@@ -37457,7 +39293,7 @@
                 <a:ea typeface="Calibri" pitchFamily="34" charset="-122"/>
                 <a:cs typeface="Calibri" pitchFamily="34" charset="-120"/>
               </a:rPr>
-              <a:t>1.  The root 'invest' comes from Latin.</a:t>
+              <a:t>1.  'Reinvest' means to put money back in after earning it.</a:t>
             </a:r>
             <a:endParaRPr lang="en-US" sz="1300" dirty="0"/>
           </a:p>
@@ -37596,7 +39432,7 @@
                 <a:ea typeface="Calibri" pitchFamily="34" charset="-122"/>
                 <a:cs typeface="Calibri" pitchFamily="34" charset="-120"/>
               </a:rPr>
-              <a:t>2.  An investor is someone who spends all their money without any plan.</a:t>
+              <a:t>2.  An investigation involves carefully looking into something to find the truth.</a:t>
             </a:r>
             <a:endParaRPr lang="en-US" sz="1300" dirty="0"/>
           </a:p>
@@ -37619,11 +39455,11 @@
             </a:avLst>
           </a:prstGeom>
           <a:solidFill>
-            <a:srgbClr val="FEE2E2"/>
-          </a:solidFill>
-          <a:ln w="12700">
-            <a:solidFill>
-              <a:srgbClr val="DC2626"/>
+            <a:srgbClr val="DCFCE7"/>
+          </a:solidFill>
+          <a:ln w="12700">
+            <a:solidFill>
+              <a:srgbClr val="16A34A"/>
             </a:solidFill>
             <a:prstDash val="solid"/>
           </a:ln>
@@ -37656,13 +39492,13 @@
             <a:r>
               <a:rPr lang="en-US" sz="1100" b="1" dirty="0">
                 <a:solidFill>
-                  <a:srgbClr val="DC2626"/>
+                  <a:srgbClr val="16A34A"/>
                 </a:solidFill>
                 <a:latin typeface="Trebuchet MS" pitchFamily="34" charset="0"/>
                 <a:ea typeface="Trebuchet MS" pitchFamily="34" charset="-122"/>
                 <a:cs typeface="Trebuchet MS" pitchFamily="34" charset="-120"/>
               </a:rPr>
-              <a:t>FALSE</a:t>
+              <a:t>TRUE</a:t>
             </a:r>
             <a:endParaRPr lang="en-US" sz="1100" dirty="0"/>
           </a:p>
@@ -37735,7 +39571,7 @@
                 <a:ea typeface="Calibri" pitchFamily="34" charset="-122"/>
                 <a:cs typeface="Calibri" pitchFamily="34" charset="-120"/>
               </a:rPr>
-              <a:t>3.  The word 'reinvest' contains the prefix 're-', meaning again.</a:t>
+              <a:t>3.  The root 'invest' comes from ancient Greek.</a:t>
             </a:r>
             <a:endParaRPr lang="en-US" sz="1300" dirty="0"/>
           </a:p>
@@ -37758,11 +39594,11 @@
             </a:avLst>
           </a:prstGeom>
           <a:solidFill>
-            <a:srgbClr val="DCFCE7"/>
-          </a:solidFill>
-          <a:ln w="12700">
-            <a:solidFill>
-              <a:srgbClr val="16A34A"/>
+            <a:srgbClr val="FEE2E2"/>
+          </a:solidFill>
+          <a:ln w="12700">
+            <a:solidFill>
+              <a:srgbClr val="DC2626"/>
             </a:solidFill>
             <a:prstDash val="solid"/>
           </a:ln>
@@ -37795,13 +39631,13 @@
             <a:r>
               <a:rPr lang="en-US" sz="1100" b="1" dirty="0">
                 <a:solidFill>
-                  <a:srgbClr val="16A34A"/>
+                  <a:srgbClr val="DC2626"/>
                 </a:solidFill>
                 <a:latin typeface="Trebuchet MS" pitchFamily="34" charset="0"/>
                 <a:ea typeface="Trebuchet MS" pitchFamily="34" charset="-122"/>
                 <a:cs typeface="Trebuchet MS" pitchFamily="34" charset="-120"/>
               </a:rPr>
-              <a:t>TRUE</a:t>
+              <a:t>FALSE</a:t>
             </a:r>
             <a:endParaRPr lang="en-US" sz="1100" dirty="0"/>
           </a:p>
@@ -37874,7 +39710,7 @@
                 <a:ea typeface="Calibri" pitchFamily="34" charset="-122"/>
                 <a:cs typeface="Calibri" pitchFamily="34" charset="-120"/>
               </a:rPr>
-              <a:t>4.  An investment can include putting time and effort into something, not just money.</a:t>
+              <a:t>4.  The word 'investor' contains the root 'invest'.</a:t>
             </a:r>
             <a:endParaRPr lang="en-US" sz="1300" dirty="0"/>
           </a:p>
@@ -38013,7 +39849,7 @@
                 <a:ea typeface="Calibri" pitchFamily="34" charset="-122"/>
                 <a:cs typeface="Calibri" pitchFamily="34" charset="-120"/>
               </a:rPr>
-              <a:t>5.  The word 'investigation' has nothing to do with the root 'invest'.</a:t>
+              <a:t>5.  The suffix '-ment' in 'investment' means a person who does something.</a:t>
             </a:r>
             <a:endParaRPr lang="en-US" sz="1300" dirty="0"/>
           </a:p>
@@ -39833,7 +41669,7 @@
                 <a:ea typeface="Trebuchet MS" pitchFamily="34" charset="-122"/>
                 <a:cs typeface="Trebuchet MS" pitchFamily="34" charset="-120"/>
               </a:rPr>
-              <a:t>dis-</a:t>
+              <a:t>un-</a:t>
             </a:r>
             <a:endParaRPr lang="en-US" sz="1300" dirty="0"/>
           </a:p>
@@ -40139,7 +41975,7 @@
                 <a:ea typeface="Trebuchet MS" pitchFamily="34" charset="-122"/>
                 <a:cs typeface="Trebuchet MS" pitchFamily="34" charset="-120"/>
               </a:rPr>
-              <a:t>under-</a:t>
+              <a:t>mis-</a:t>
             </a:r>
             <a:endParaRPr lang="en-US" sz="1300" dirty="0"/>
           </a:p>
@@ -40292,7 +42128,7 @@
                 <a:ea typeface="Trebuchet MS" pitchFamily="34" charset="-122"/>
                 <a:cs typeface="Trebuchet MS" pitchFamily="34" charset="-120"/>
               </a:rPr>
-              <a:t>mis-</a:t>
+              <a:t>under-</a:t>
             </a:r>
             <a:endParaRPr lang="en-US" sz="1300" dirty="0"/>
           </a:p>
@@ -41292,7 +43128,7 @@
                 <a:ea typeface="Calibri" pitchFamily="34" charset="-122"/>
                 <a:cs typeface="Calibri" pitchFamily="34" charset="-120"/>
               </a:rPr>
-              <a:t>A careful search or study to find out the truth about something.</a:t>
+              <a:t>A careful search to find out the truth about something, like a detective's work.</a:t>
             </a:r>
             <a:endParaRPr lang="en-US" sz="1200" dirty="0"/>
           </a:p>
@@ -41431,7 +43267,7 @@
                 <a:ea typeface="Calibri" pitchFamily="34" charset="-122"/>
                 <a:cs typeface="Calibri" pitchFamily="34" charset="-120"/>
               </a:rPr>
-              <a:t>To put money, time, or effort into something hoping it will grow or improve.</a:t>
+              <a:t>To put money, time, or effort into something hoping to get a good result later.</a:t>
             </a:r>
             <a:endParaRPr lang="en-US" sz="1200" dirty="0"/>
           </a:p>
@@ -41570,7 +43406,7 @@
                 <a:ea typeface="Calibri" pitchFamily="34" charset="-122"/>
                 <a:cs typeface="Calibri" pitchFamily="34" charset="-120"/>
               </a:rPr>
-              <a:t>The action of putting money or effort into something right now.</a:t>
+              <a:t>The act of putting money or effort into something right now.</a:t>
             </a:r>
             <a:endParaRPr lang="en-US" sz="1200" dirty="0"/>
           </a:p>
@@ -41709,7 +43545,7 @@
                 <a:ea typeface="Calibri" pitchFamily="34" charset="-122"/>
                 <a:cs typeface="Calibri" pitchFamily="34" charset="-120"/>
               </a:rPr>
-              <a:t>Having already put money or effort into something in the past.</a:t>
+              <a:t>Having already put money, time, or effort into something.</a:t>
             </a:r>
             <a:endParaRPr lang="en-US" sz="1200" dirty="0"/>
           </a:p>
@@ -41848,7 +43684,7 @@
                 <a:ea typeface="Calibri" pitchFamily="34" charset="-122"/>
                 <a:cs typeface="Calibri" pitchFamily="34" charset="-120"/>
               </a:rPr>
-              <a:t>To take money you have earned and put it back into something to keep growing it.</a:t>
+              <a:t>To take money you have earned and put it back in to make even more.</a:t>
             </a:r>
             <a:endParaRPr lang="en-US" sz="1200" dirty="0"/>
           </a:p>
@@ -41987,7 +43823,7 @@
                 <a:ea typeface="Calibri" pitchFamily="34" charset="-122"/>
                 <a:cs typeface="Calibri" pitchFamily="34" charset="-120"/>
               </a:rPr>
-              <a:t>The money, time, or effort you put into something to make it better or more valuable.</a:t>
+              <a:t>The money, time, or effort you put into something to get a good result.</a:t>
             </a:r>
             <a:endParaRPr lang="en-US" sz="1200" dirty="0"/>
           </a:p>
@@ -42126,7 +43962,7 @@
                 <a:ea typeface="Calibri" pitchFamily="34" charset="-122"/>
                 <a:cs typeface="Calibri" pitchFamily="34" charset="-120"/>
               </a:rPr>
-              <a:t>A person who puts money into something, like a business, hoping to make more money.</a:t>
+              <a:t>A person who puts money into something hoping to make more money from it.</a:t>
             </a:r>
             <a:endParaRPr lang="en-US" sz="1200" dirty="0"/>
           </a:p>
@@ -42621,7 +44457,7 @@
                 <a:ea typeface="Calibri" pitchFamily="34" charset="-122"/>
                 <a:cs typeface="Calibri" pitchFamily="34" charset="-120"/>
               </a:rPr>
-              <a:t>Mia decided to invest her pocket money in a small plant stall at the school market.</a:t>
+              <a:t>Our class decided to invest time in learning about how money grows in a savings account.</a:t>
             </a:r>
             <a:endParaRPr lang="en-US" sz="1500" dirty="0"/>
           </a:p>
@@ -42785,7 +44621,7 @@
                 <a:ea typeface="Calibri" pitchFamily="34" charset="-122"/>
                 <a:cs typeface="Calibri" pitchFamily="34" charset="-120"/>
               </a:rPr>
-              <a:t>The investor visited the new community garden to see how her money was being used.</a:t>
+              <a:t>The young investor put her birthday money into shares and watched it grow over two years.</a:t>
             </a:r>
             <a:endParaRPr lang="en-US" sz="1500" dirty="0"/>
           </a:p>
@@ -42949,7 +44785,7 @@
                 <a:ea typeface="Calibri" pitchFamily="34" charset="-122"/>
                 <a:cs typeface="Calibri" pitchFamily="34" charset="-120"/>
               </a:rPr>
-              <a:t>After saving for months, Jake made his first investment by buying supplies for his handmade card business.</a:t>
+              <a:t>Buying good books is a smart investment because knowledge stays with you forever.</a:t>
             </a:r>
             <a:endParaRPr lang="en-US" sz="1500" dirty="0"/>
           </a:p>
